--- a/3023244222-1-3/reports/introduction.pptx
+++ b/3023244222-1-3/reports/introduction.pptx
@@ -5,7 +5,7 @@
     <p:sldMasterId id="2147483648" r:id="rId1"/>
   </p:sldMasterIdLst>
   <p:notesMasterIdLst>
-    <p:notesMasterId r:id="rId33"/>
+    <p:notesMasterId r:id="rId36"/>
   </p:notesMasterIdLst>
   <p:sldIdLst>
     <p:sldId id="256" r:id="rId2"/>
@@ -26,19 +26,22 @@
     <p:sldId id="284" r:id="rId17"/>
     <p:sldId id="285" r:id="rId18"/>
     <p:sldId id="286" r:id="rId19"/>
-    <p:sldId id="287" r:id="rId20"/>
-    <p:sldId id="288" r:id="rId21"/>
-    <p:sldId id="289" r:id="rId22"/>
-    <p:sldId id="290" r:id="rId23"/>
-    <p:sldId id="291" r:id="rId24"/>
-    <p:sldId id="295" r:id="rId25"/>
-    <p:sldId id="272" r:id="rId26"/>
-    <p:sldId id="292" r:id="rId27"/>
-    <p:sldId id="293" r:id="rId28"/>
-    <p:sldId id="294" r:id="rId29"/>
-    <p:sldId id="273" r:id="rId30"/>
-    <p:sldId id="296" r:id="rId31"/>
-    <p:sldId id="267" r:id="rId32"/>
+    <p:sldId id="288" r:id="rId20"/>
+    <p:sldId id="287" r:id="rId21"/>
+    <p:sldId id="297" r:id="rId22"/>
+    <p:sldId id="289" r:id="rId23"/>
+    <p:sldId id="290" r:id="rId24"/>
+    <p:sldId id="291" r:id="rId25"/>
+    <p:sldId id="295" r:id="rId26"/>
+    <p:sldId id="272" r:id="rId27"/>
+    <p:sldId id="292" r:id="rId28"/>
+    <p:sldId id="293" r:id="rId29"/>
+    <p:sldId id="298" r:id="rId30"/>
+    <p:sldId id="299" r:id="rId31"/>
+    <p:sldId id="294" r:id="rId32"/>
+    <p:sldId id="273" r:id="rId33"/>
+    <p:sldId id="296" r:id="rId34"/>
+    <p:sldId id="267" r:id="rId35"/>
   </p:sldIdLst>
   <p:sldSz cx="12192000" cy="6858000"/>
   <p:notesSz cx="6858000" cy="9144000"/>
@@ -172,8 +175,9 @@
             <p14:sldId id="284"/>
             <p14:sldId id="285"/>
             <p14:sldId id="286"/>
+            <p14:sldId id="288"/>
             <p14:sldId id="287"/>
-            <p14:sldId id="288"/>
+            <p14:sldId id="297"/>
             <p14:sldId id="289"/>
             <p14:sldId id="290"/>
             <p14:sldId id="291"/>
@@ -185,6 +189,8 @@
             <p14:sldId id="272"/>
             <p14:sldId id="292"/>
             <p14:sldId id="293"/>
+            <p14:sldId id="298"/>
+            <p14:sldId id="299"/>
             <p14:sldId id="294"/>
           </p14:sldIdLst>
         </p14:section>
@@ -304,7 +310,7 @@
           <a:p>
             <a:fld id="{D2A48B96-639E-45A3-A0BA-2464DFDB1FAA}" type="datetimeFigureOut">
               <a:rPr lang="zh-CN" altLang="en-US" smtClean="0"/>
-              <a:t>2025/6/3</a:t>
+              <a:t>2025/6/12</a:t>
             </a:fld>
             <a:endParaRPr lang="zh-CN" altLang="en-US"/>
           </a:p>
@@ -711,7 +717,7 @@
           <a:p>
             <a:fld id="{760FBDFE-C587-4B4C-A407-44438C67B59E}" type="datetimeFigureOut">
               <a:rPr lang="zh-CN" altLang="en-US" smtClean="0"/>
-              <a:t>2025/6/3</a:t>
+              <a:t>2025/6/12</a:t>
             </a:fld>
             <a:endParaRPr lang="zh-CN" altLang="en-US"/>
           </a:p>
@@ -811,7 +817,7 @@
           <a:p>
             <a:fld id="{760FBDFE-C587-4B4C-A407-44438C67B59E}" type="datetimeFigureOut">
               <a:rPr lang="zh-CN" altLang="en-US" smtClean="0"/>
-              <a:t>2025/6/3</a:t>
+              <a:t>2025/6/12</a:t>
             </a:fld>
             <a:endParaRPr lang="zh-CN" altLang="en-US"/>
           </a:p>
@@ -970,7 +976,7 @@
           <a:p>
             <a:fld id="{760FBDFE-C587-4B4C-A407-44438C67B59E}" type="datetimeFigureOut">
               <a:rPr lang="zh-CN" altLang="en-US" smtClean="0"/>
-              <a:t>2025/6/3</a:t>
+              <a:t>2025/6/12</a:t>
             </a:fld>
             <a:endParaRPr lang="zh-CN" altLang="en-US"/>
           </a:p>
@@ -1256,7 +1262,7 @@
           <a:p>
             <a:fld id="{760FBDFE-C587-4B4C-A407-44438C67B59E}" type="datetimeFigureOut">
               <a:rPr lang="zh-CN" altLang="en-US" smtClean="0"/>
-              <a:t>2025/6/3</a:t>
+              <a:t>2025/6/12</a:t>
             </a:fld>
             <a:endParaRPr lang="zh-CN" altLang="en-US"/>
           </a:p>
@@ -1517,7 +1523,7 @@
           <a:p>
             <a:fld id="{760FBDFE-C587-4B4C-A407-44438C67B59E}" type="datetimeFigureOut">
               <a:rPr lang="zh-CN" altLang="en-US" smtClean="0"/>
-              <a:t>2025/6/3</a:t>
+              <a:t>2025/6/12</a:t>
             </a:fld>
             <a:endParaRPr lang="zh-CN" altLang="en-US"/>
           </a:p>
@@ -1784,7 +1790,7 @@
           <a:p>
             <a:fld id="{760FBDFE-C587-4B4C-A407-44438C67B59E}" type="datetimeFigureOut">
               <a:rPr lang="zh-CN" altLang="en-US" smtClean="0"/>
-              <a:t>2025/6/3</a:t>
+              <a:t>2025/6/12</a:t>
             </a:fld>
             <a:endParaRPr lang="zh-CN" altLang="en-US"/>
           </a:p>
@@ -2223,7 +2229,7 @@
           <a:p>
             <a:fld id="{760FBDFE-C587-4B4C-A407-44438C67B59E}" type="datetimeFigureOut">
               <a:rPr lang="zh-CN" altLang="en-US" smtClean="0"/>
-              <a:t>2025/6/3</a:t>
+              <a:t>2025/6/12</a:t>
             </a:fld>
             <a:endParaRPr lang="zh-CN" altLang="en-US"/>
           </a:p>
@@ -2358,7 +2364,7 @@
           <a:p>
             <a:fld id="{760FBDFE-C587-4B4C-A407-44438C67B59E}" type="datetimeFigureOut">
               <a:rPr lang="zh-CN" altLang="en-US" smtClean="0"/>
-              <a:t>2025/6/3</a:t>
+              <a:t>2025/6/12</a:t>
             </a:fld>
             <a:endParaRPr lang="zh-CN" altLang="en-US"/>
           </a:p>
@@ -2458,7 +2464,7 @@
           <a:p>
             <a:fld id="{760FBDFE-C587-4B4C-A407-44438C67B59E}" type="datetimeFigureOut">
               <a:rPr lang="zh-CN" altLang="en-US" smtClean="0"/>
-              <a:t>2025/6/3</a:t>
+              <a:t>2025/6/12</a:t>
             </a:fld>
             <a:endParaRPr lang="zh-CN" altLang="en-US"/>
           </a:p>
@@ -2635,7 +2641,7 @@
           <a:p>
             <a:fld id="{9EFD9D74-47D9-4702-A33C-335B63B48DBF}" type="datetimeFigureOut">
               <a:rPr lang="zh-CN" altLang="en-US" smtClean="0"/>
-              <a:t>2025/6/3</a:t>
+              <a:t>2025/6/12</a:t>
             </a:fld>
             <a:endParaRPr lang="zh-CN" altLang="en-US" dirty="0"/>
           </a:p>
@@ -2878,7 +2884,7 @@
           <a:p>
             <a:fld id="{760FBDFE-C587-4B4C-A407-44438C67B59E}" type="datetimeFigureOut">
               <a:rPr lang="zh-CN" altLang="en-US" smtClean="0"/>
-              <a:t>2025/6/3</a:t>
+              <a:t>2025/6/12</a:t>
             </a:fld>
             <a:endParaRPr lang="zh-CN" altLang="en-US"/>
           </a:p>
@@ -3107,7 +3113,7 @@
           <a:p>
             <a:fld id="{760FBDFE-C587-4B4C-A407-44438C67B59E}" type="datetimeFigureOut">
               <a:rPr lang="zh-CN" altLang="en-US" smtClean="0"/>
-              <a:t>2025/6/3</a:t>
+              <a:t>2025/6/12</a:t>
             </a:fld>
             <a:endParaRPr lang="zh-CN" altLang="en-US"/>
           </a:p>
@@ -4049,13 +4055,13 @@
   <p:clrMapOvr>
     <a:masterClrMapping/>
   </p:clrMapOvr>
-  <mc:AlternateContent xmlns:mc="http://schemas.openxmlformats.org/markup-compatibility/2006">
-    <mc:Choice xmlns:p159="http://schemas.microsoft.com/office/powerpoint/2015/09/main" Requires="p159">
+  <mc:AlternateContent xmlns:mc="http://schemas.openxmlformats.org/markup-compatibility/2006" xmlns:p159="http://schemas.microsoft.com/office/powerpoint/2015/09/main">
+    <mc:Choice Requires="p159">
       <p:transition xmlns:p14="http://schemas.microsoft.com/office/powerpoint/2010/main" spd="slow" p14:dur="2000">
         <p159:morph option="byObject"/>
       </p:transition>
     </mc:Choice>
-    <mc:Fallback>
+    <mc:Fallback xmlns="">
       <p:transition spd="slow">
         <p:fade/>
       </p:transition>
@@ -4724,13 +4730,13 @@
   <p:clrMapOvr>
     <a:masterClrMapping/>
   </p:clrMapOvr>
-  <mc:AlternateContent xmlns:mc="http://schemas.openxmlformats.org/markup-compatibility/2006">
-    <mc:Choice xmlns:p159="http://schemas.microsoft.com/office/powerpoint/2015/09/main" Requires="p159">
+  <mc:AlternateContent xmlns:mc="http://schemas.openxmlformats.org/markup-compatibility/2006" xmlns:p159="http://schemas.microsoft.com/office/powerpoint/2015/09/main">
+    <mc:Choice Requires="p159">
       <p:transition xmlns:p14="http://schemas.microsoft.com/office/powerpoint/2010/main" spd="slow" p14:dur="2000">
         <p159:morph option="byObject"/>
       </p:transition>
     </mc:Choice>
-    <mc:Fallback>
+    <mc:Fallback xmlns="">
       <p:transition spd="slow">
         <p:fade/>
       </p:transition>
@@ -5518,13 +5524,13 @@
   <p:clrMapOvr>
     <a:masterClrMapping/>
   </p:clrMapOvr>
-  <mc:AlternateContent xmlns:mc="http://schemas.openxmlformats.org/markup-compatibility/2006">
-    <mc:Choice xmlns:p159="http://schemas.microsoft.com/office/powerpoint/2015/09/main" Requires="p159">
+  <mc:AlternateContent xmlns:mc="http://schemas.openxmlformats.org/markup-compatibility/2006" xmlns:p159="http://schemas.microsoft.com/office/powerpoint/2015/09/main">
+    <mc:Choice Requires="p159">
       <p:transition xmlns:p14="http://schemas.microsoft.com/office/powerpoint/2010/main" spd="slow" p14:dur="2000">
         <p159:morph option="byObject"/>
       </p:transition>
     </mc:Choice>
-    <mc:Fallback>
+    <mc:Fallback xmlns="">
       <p:transition spd="slow">
         <p:fade/>
       </p:transition>
@@ -7078,13 +7084,13 @@
   <p:clrMapOvr>
     <a:masterClrMapping/>
   </p:clrMapOvr>
-  <mc:AlternateContent xmlns:mc="http://schemas.openxmlformats.org/markup-compatibility/2006">
-    <mc:Choice xmlns:p159="http://schemas.microsoft.com/office/powerpoint/2015/09/main" Requires="p159">
+  <mc:AlternateContent xmlns:mc="http://schemas.openxmlformats.org/markup-compatibility/2006" xmlns:p159="http://schemas.microsoft.com/office/powerpoint/2015/09/main">
+    <mc:Choice Requires="p159">
       <p:transition xmlns:p14="http://schemas.microsoft.com/office/powerpoint/2010/main" spd="slow" p14:dur="2000">
         <p159:morph option="byObject"/>
       </p:transition>
     </mc:Choice>
-    <mc:Fallback>
+    <mc:Fallback xmlns="">
       <p:transition spd="slow">
         <p:fade/>
       </p:transition>
@@ -8060,13 +8066,13 @@
   <p:clrMapOvr>
     <a:masterClrMapping/>
   </p:clrMapOvr>
-  <mc:AlternateContent xmlns:mc="http://schemas.openxmlformats.org/markup-compatibility/2006">
-    <mc:Choice xmlns:p159="http://schemas.microsoft.com/office/powerpoint/2015/09/main" Requires="p159">
+  <mc:AlternateContent xmlns:mc="http://schemas.openxmlformats.org/markup-compatibility/2006" xmlns:p159="http://schemas.microsoft.com/office/powerpoint/2015/09/main">
+    <mc:Choice Requires="p159">
       <p:transition xmlns:p14="http://schemas.microsoft.com/office/powerpoint/2010/main" spd="slow" p14:dur="2000">
         <p159:morph option="byObject"/>
       </p:transition>
     </mc:Choice>
-    <mc:Fallback>
+    <mc:Fallback xmlns="">
       <p:transition spd="slow">
         <p:fade/>
       </p:transition>
@@ -9041,13 +9047,13 @@
   <p:clrMapOvr>
     <a:masterClrMapping/>
   </p:clrMapOvr>
-  <mc:AlternateContent xmlns:mc="http://schemas.openxmlformats.org/markup-compatibility/2006">
-    <mc:Choice xmlns:p159="http://schemas.microsoft.com/office/powerpoint/2015/09/main" Requires="p159">
+  <mc:AlternateContent xmlns:mc="http://schemas.openxmlformats.org/markup-compatibility/2006" xmlns:p159="http://schemas.microsoft.com/office/powerpoint/2015/09/main">
+    <mc:Choice Requires="p159">
       <p:transition xmlns:p14="http://schemas.microsoft.com/office/powerpoint/2010/main" spd="slow" p14:dur="2000">
         <p159:morph option="byObject"/>
       </p:transition>
     </mc:Choice>
-    <mc:Fallback>
+    <mc:Fallback xmlns="">
       <p:transition spd="slow">
         <p:fade/>
       </p:transition>
@@ -10025,13 +10031,13 @@
   <p:clrMapOvr>
     <a:masterClrMapping/>
   </p:clrMapOvr>
-  <mc:AlternateContent xmlns:mc="http://schemas.openxmlformats.org/markup-compatibility/2006">
-    <mc:Choice xmlns:p159="http://schemas.microsoft.com/office/powerpoint/2015/09/main" Requires="p159">
+  <mc:AlternateContent xmlns:mc="http://schemas.openxmlformats.org/markup-compatibility/2006" xmlns:p159="http://schemas.microsoft.com/office/powerpoint/2015/09/main">
+    <mc:Choice Requires="p159">
       <p:transition xmlns:p14="http://schemas.microsoft.com/office/powerpoint/2010/main" spd="slow" p14:dur="2000">
         <p159:morph option="byObject"/>
       </p:transition>
     </mc:Choice>
-    <mc:Fallback>
+    <mc:Fallback xmlns="">
       <p:transition spd="slow">
         <p:fade/>
       </p:transition>
@@ -11075,13 +11081,13 @@
   <p:clrMapOvr>
     <a:masterClrMapping/>
   </p:clrMapOvr>
-  <mc:AlternateContent xmlns:mc="http://schemas.openxmlformats.org/markup-compatibility/2006">
-    <mc:Choice xmlns:p159="http://schemas.microsoft.com/office/powerpoint/2015/09/main" Requires="p159">
+  <mc:AlternateContent xmlns:mc="http://schemas.openxmlformats.org/markup-compatibility/2006" xmlns:p159="http://schemas.microsoft.com/office/powerpoint/2015/09/main">
+    <mc:Choice Requires="p159">
       <p:transition xmlns:p14="http://schemas.microsoft.com/office/powerpoint/2010/main" spd="slow" p14:dur="2000">
         <p159:morph option="byObject"/>
       </p:transition>
     </mc:Choice>
-    <mc:Fallback>
+    <mc:Fallback xmlns="">
       <p:transition spd="slow">
         <p:fade/>
       </p:transition>
@@ -12005,13 +12011,13 @@
   <p:clrMapOvr>
     <a:masterClrMapping/>
   </p:clrMapOvr>
-  <mc:AlternateContent xmlns:mc="http://schemas.openxmlformats.org/markup-compatibility/2006">
-    <mc:Choice xmlns:p159="http://schemas.microsoft.com/office/powerpoint/2015/09/main" Requires="p159">
+  <mc:AlternateContent xmlns:mc="http://schemas.openxmlformats.org/markup-compatibility/2006" xmlns:p159="http://schemas.microsoft.com/office/powerpoint/2015/09/main">
+    <mc:Choice Requires="p159">
       <p:transition xmlns:p14="http://schemas.microsoft.com/office/powerpoint/2010/main" spd="slow" p14:dur="2000">
         <p159:morph option="byObject"/>
       </p:transition>
     </mc:Choice>
-    <mc:Fallback>
+    <mc:Fallback xmlns="">
       <p:transition spd="slow">
         <p:fade/>
       </p:transition>
@@ -12856,13 +12862,13 @@
   <p:clrMapOvr>
     <a:masterClrMapping/>
   </p:clrMapOvr>
-  <mc:AlternateContent xmlns:mc="http://schemas.openxmlformats.org/markup-compatibility/2006">
-    <mc:Choice xmlns:p159="http://schemas.microsoft.com/office/powerpoint/2015/09/main" Requires="p159">
+  <mc:AlternateContent xmlns:mc="http://schemas.openxmlformats.org/markup-compatibility/2006" xmlns:p159="http://schemas.microsoft.com/office/powerpoint/2015/09/main">
+    <mc:Choice Requires="p159">
       <p:transition xmlns:p14="http://schemas.microsoft.com/office/powerpoint/2010/main" spd="slow" p14:dur="2000">
         <p159:morph option="byObject"/>
       </p:transition>
     </mc:Choice>
-    <mc:Fallback>
+    <mc:Fallback xmlns="">
       <p:transition spd="slow">
         <p:fade/>
       </p:transition>
@@ -12879,7 +12885,7 @@
         <p:cNvPr id="1" name="">
           <a:extLst>
             <a:ext uri="{FF2B5EF4-FFF2-40B4-BE49-F238E27FC236}">
-              <a16:creationId xmlns:a16="http://schemas.microsoft.com/office/drawing/2014/main" id="{1A3AA1B7-E413-4F27-505F-0464E99FAC86}"/>
+              <a16:creationId xmlns:a16="http://schemas.microsoft.com/office/drawing/2014/main" id="{71576937-E6DA-CB3E-645E-32FDBA83DAE1}"/>
             </a:ext>
           </a:extLst>
         </p:cNvPr>
@@ -12899,7 +12905,7 @@
           <p:cNvPr id="13" name="组合 12">
             <a:extLst>
               <a:ext uri="{FF2B5EF4-FFF2-40B4-BE49-F238E27FC236}">
-                <a16:creationId xmlns:a16="http://schemas.microsoft.com/office/drawing/2014/main" id="{47C63C57-E5D5-AE4A-162C-52C10967D891}"/>
+                <a16:creationId xmlns:a16="http://schemas.microsoft.com/office/drawing/2014/main" id="{4226FC5A-148D-4B31-823F-322A942CF6D1}"/>
               </a:ext>
             </a:extLst>
           </p:cNvPr>
@@ -12919,7 +12925,7 @@
             <p:cNvPr id="14" name="矩形 13">
               <a:extLst>
                 <a:ext uri="{FF2B5EF4-FFF2-40B4-BE49-F238E27FC236}">
-                  <a16:creationId xmlns:a16="http://schemas.microsoft.com/office/drawing/2014/main" id="{083F14E2-9A3E-1044-06B2-AE6CAB3DF1CF}"/>
+                  <a16:creationId xmlns:a16="http://schemas.microsoft.com/office/drawing/2014/main" id="{E3C5E0AF-1519-F17F-1BEF-93C66DC5EF06}"/>
                 </a:ext>
               </a:extLst>
             </p:cNvPr>
@@ -12976,7 +12982,7 @@
             <p:cNvPr id="15" name="矩形 14">
               <a:extLst>
                 <a:ext uri="{FF2B5EF4-FFF2-40B4-BE49-F238E27FC236}">
-                  <a16:creationId xmlns:a16="http://schemas.microsoft.com/office/drawing/2014/main" id="{2D7FA945-EA82-C5A0-FD8E-FB78B875B5C2}"/>
+                  <a16:creationId xmlns:a16="http://schemas.microsoft.com/office/drawing/2014/main" id="{4EBE5B74-C2F9-23DE-8C58-0D4B7C0F5E35}"/>
                 </a:ext>
               </a:extLst>
             </p:cNvPr>
@@ -13039,7 +13045,7 @@
             <p:cNvPr id="16" name="文本框 15">
               <a:extLst>
                 <a:ext uri="{FF2B5EF4-FFF2-40B4-BE49-F238E27FC236}">
-                  <a16:creationId xmlns:a16="http://schemas.microsoft.com/office/drawing/2014/main" id="{2339087E-E8A3-B254-A49D-B92EEF87EEAA}"/>
+                  <a16:creationId xmlns:a16="http://schemas.microsoft.com/office/drawing/2014/main" id="{4A86EA7D-C890-A02E-E880-B9A9E457B529}"/>
                 </a:ext>
               </a:extLst>
             </p:cNvPr>
@@ -13085,7 +13091,7 @@
           <p:cNvPr id="51" name="组合 50">
             <a:extLst>
               <a:ext uri="{FF2B5EF4-FFF2-40B4-BE49-F238E27FC236}">
-                <a16:creationId xmlns:a16="http://schemas.microsoft.com/office/drawing/2014/main" id="{3AD60F8B-A6A7-1E62-B723-DBF4A38561BA}"/>
+                <a16:creationId xmlns:a16="http://schemas.microsoft.com/office/drawing/2014/main" id="{D235E86F-4C88-0518-BAF1-789D48FB0CFB}"/>
               </a:ext>
             </a:extLst>
           </p:cNvPr>
@@ -13105,7 +13111,7 @@
             <p:cNvPr id="41" name="组合 40">
               <a:extLst>
                 <a:ext uri="{FF2B5EF4-FFF2-40B4-BE49-F238E27FC236}">
-                  <a16:creationId xmlns:a16="http://schemas.microsoft.com/office/drawing/2014/main" id="{32BEADE0-2199-1B11-E8AC-98B96BB551B5}"/>
+                  <a16:creationId xmlns:a16="http://schemas.microsoft.com/office/drawing/2014/main" id="{08D1A6CC-E4FA-E3D0-18E1-E74EF174BB3D}"/>
                 </a:ext>
               </a:extLst>
             </p:cNvPr>
@@ -13125,7 +13131,7 @@
               <p:cNvPr id="35" name="矩形: 圆角 34">
                 <a:extLst>
                   <a:ext uri="{FF2B5EF4-FFF2-40B4-BE49-F238E27FC236}">
-                    <a16:creationId xmlns:a16="http://schemas.microsoft.com/office/drawing/2014/main" id="{0AF46759-4D46-5508-54C0-EC9ECBF0901A}"/>
+                    <a16:creationId xmlns:a16="http://schemas.microsoft.com/office/drawing/2014/main" id="{FA44AB52-F689-A58E-FDE5-A4DC5F4BAC94}"/>
                   </a:ext>
                 </a:extLst>
               </p:cNvPr>
@@ -13179,7 +13185,7 @@
               <p:cNvPr id="36" name="文本框 35">
                 <a:extLst>
                   <a:ext uri="{FF2B5EF4-FFF2-40B4-BE49-F238E27FC236}">
-                    <a16:creationId xmlns:a16="http://schemas.microsoft.com/office/drawing/2014/main" id="{D0569012-926D-39F5-CA14-5CFED78DF792}"/>
+                    <a16:creationId xmlns:a16="http://schemas.microsoft.com/office/drawing/2014/main" id="{98ADD8C0-F8EE-0AE0-58C1-466DD6BF7A83}"/>
                   </a:ext>
                 </a:extLst>
               </p:cNvPr>
@@ -13210,7 +13216,7 @@
                     </a:solidFill>
                     <a:latin typeface="Consolas" panose="020B0609020204030204" pitchFamily="49" charset="0"/>
                   </a:rPr>
-                  <a:t>MST</a:t>
+                  <a:t>greedy</a:t>
                 </a:r>
                 <a:endParaRPr lang="zh-CN" altLang="en-US" sz="2400" b="1">
                   <a:solidFill>
@@ -13227,7 +13233,7 @@
             <p:cNvPr id="46" name="组合 45">
               <a:extLst>
                 <a:ext uri="{FF2B5EF4-FFF2-40B4-BE49-F238E27FC236}">
-                  <a16:creationId xmlns:a16="http://schemas.microsoft.com/office/drawing/2014/main" id="{5022A916-E8E3-F683-A2F6-206B4BB82DA6}"/>
+                  <a16:creationId xmlns:a16="http://schemas.microsoft.com/office/drawing/2014/main" id="{CABE8730-14E3-1E60-7DE6-2BB1D4CB640E}"/>
                 </a:ext>
               </a:extLst>
             </p:cNvPr>
@@ -13247,7 +13253,7 @@
               <p:cNvPr id="17" name="矩形: 圆角 16">
                 <a:extLst>
                   <a:ext uri="{FF2B5EF4-FFF2-40B4-BE49-F238E27FC236}">
-                    <a16:creationId xmlns:a16="http://schemas.microsoft.com/office/drawing/2014/main" id="{04A1C5A2-A5D6-A527-60B7-6ACF1AD79B89}"/>
+                    <a16:creationId xmlns:a16="http://schemas.microsoft.com/office/drawing/2014/main" id="{40C631A7-DBD1-C824-9E79-03B868A399F5}"/>
                   </a:ext>
                 </a:extLst>
               </p:cNvPr>
@@ -13301,7 +13307,7 @@
               <p:cNvPr id="42" name="文本框 41">
                 <a:extLst>
                   <a:ext uri="{FF2B5EF4-FFF2-40B4-BE49-F238E27FC236}">
-                    <a16:creationId xmlns:a16="http://schemas.microsoft.com/office/drawing/2014/main" id="{249033C2-388A-FF66-6ACB-9D2B7706131D}"/>
+                    <a16:creationId xmlns:a16="http://schemas.microsoft.com/office/drawing/2014/main" id="{72E41EED-D500-AB17-208C-197C343A3FFD}"/>
                   </a:ext>
                 </a:extLst>
               </p:cNvPr>
@@ -13310,8 +13316,8 @@
             </p:nvSpPr>
             <p:spPr>
               <a:xfrm>
-                <a:off x="1052985" y="2838050"/>
-                <a:ext cx="2505395" cy="2811795"/>
+                <a:off x="1052985" y="2837506"/>
+                <a:ext cx="2505395" cy="2812886"/>
               </a:xfrm>
               <a:prstGeom prst="rect">
                 <a:avLst/>
@@ -13344,7 +13350,7 @@
                 </a:pPr>
                 <a:r>
                   <a:rPr lang="zh-CN" altLang="en-US" sz="2000" b="0"/>
-                  <a:t>先求出图的最小生成树，然后前序遍历生成路径，并求出当前花费。由于最小生成树与起点选取有关，因此需遍历所有起点。</a:t>
+                  <a:t>使用最简单的贪心算法，每次都选取距离当前节点最近的未访问节点，直至形成回路。需要遍历所有起点。</a:t>
                 </a:r>
               </a:p>
             </p:txBody>
@@ -13356,7 +13362,7 @@
           <p:cNvPr id="52" name="矩形: 圆角 51">
             <a:extLst>
               <a:ext uri="{FF2B5EF4-FFF2-40B4-BE49-F238E27FC236}">
-                <a16:creationId xmlns:a16="http://schemas.microsoft.com/office/drawing/2014/main" id="{DCBF5B1C-BC07-A3F9-F251-34364D9D00B7}"/>
+                <a16:creationId xmlns:a16="http://schemas.microsoft.com/office/drawing/2014/main" id="{9156FB42-E422-BDF8-1024-9D6C344D3AD9}"/>
               </a:ext>
             </a:extLst>
           </p:cNvPr>
@@ -13412,7 +13418,7 @@
           <p:cNvPr id="60" name="文本框 59">
             <a:extLst>
               <a:ext uri="{FF2B5EF4-FFF2-40B4-BE49-F238E27FC236}">
-                <a16:creationId xmlns:a16="http://schemas.microsoft.com/office/drawing/2014/main" id="{3BD3A651-7CDF-D629-8B58-87F847E551B8}"/>
+                <a16:creationId xmlns:a16="http://schemas.microsoft.com/office/drawing/2014/main" id="{8E0CEF7D-792F-3C67-59A4-DCD2AB8ABD6F}"/>
               </a:ext>
             </a:extLst>
           </p:cNvPr>
@@ -13421,8 +13427,8 @@
         </p:nvSpPr>
         <p:spPr>
           <a:xfrm>
-            <a:off x="5786167" y="1225750"/>
-            <a:ext cx="5492522" cy="5403402"/>
+            <a:off x="5626290" y="1298872"/>
+            <a:ext cx="5812276" cy="4912883"/>
           </a:xfrm>
           <a:prstGeom prst="rect">
             <a:avLst/>
@@ -13441,7 +13447,7 @@
               </a:lnSpc>
             </a:pPr>
             <a:r>
-              <a:rPr lang="en-US" altLang="zh-CN" sz="1100">
+              <a:rPr lang="en-US" altLang="zh-CN" sz="1400">
                 <a:latin typeface="Fira Code Medium" pitchFamily="1" charset="0"/>
                 <a:ea typeface="楷体" panose="02010609060101010101" pitchFamily="49" charset="-122"/>
                 <a:cs typeface="Fira Code Medium" pitchFamily="1" charset="0"/>
@@ -13456,7 +13462,7 @@
               </a:lnSpc>
             </a:pPr>
             <a:r>
-              <a:rPr lang="en-US" altLang="zh-CN" sz="1100">
+              <a:rPr lang="en-US" altLang="zh-CN" sz="1400">
                 <a:latin typeface="Fira Code Medium" pitchFamily="1" charset="0"/>
                 <a:ea typeface="楷体" panose="02010609060101010101" pitchFamily="49" charset="-122"/>
                 <a:cs typeface="Fira Code Medium" pitchFamily="1" charset="0"/>
@@ -13471,12 +13477,12 @@
               </a:lnSpc>
             </a:pPr>
             <a:r>
-              <a:rPr lang="en-US" altLang="zh-CN" sz="1100">
+              <a:rPr lang="en-US" altLang="zh-CN" sz="1400">
                 <a:latin typeface="Fira Code Medium" pitchFamily="1" charset="0"/>
                 <a:ea typeface="楷体" panose="02010609060101010101" pitchFamily="49" charset="-122"/>
                 <a:cs typeface="Fira Code Medium" pitchFamily="1" charset="0"/>
               </a:rPr>
-              <a:t>        int src = 0, dst = 0, minx = INF;</a:t>
+              <a:t>        int nxt, minx = INF;</a:t>
             </a:r>
           </a:p>
           <a:p>
@@ -13486,7 +13492,7 @@
               </a:lnSpc>
             </a:pPr>
             <a:r>
-              <a:rPr lang="en-US" altLang="zh-CN" sz="1100">
+              <a:rPr lang="en-US" altLang="zh-CN" sz="1400">
                 <a:latin typeface="Fira Code Medium" pitchFamily="1" charset="0"/>
                 <a:ea typeface="楷体" panose="02010609060101010101" pitchFamily="49" charset="-122"/>
                 <a:cs typeface="Fira Code Medium" pitchFamily="1" charset="0"/>
@@ -13501,12 +13507,12 @@
               </a:lnSpc>
             </a:pPr>
             <a:r>
-              <a:rPr lang="en-US" altLang="zh-CN" sz="1100">
+              <a:rPr lang="en-US" altLang="zh-CN" sz="1400">
                 <a:latin typeface="Fira Code Medium" pitchFamily="1" charset="0"/>
                 <a:ea typeface="楷体" panose="02010609060101010101" pitchFamily="49" charset="-122"/>
                 <a:cs typeface="Fira Code Medium" pitchFamily="1" charset="0"/>
               </a:rPr>
-              <a:t>            if (!vis[i]) continue;</a:t>
+              <a:t>            if (!vis[i] &amp;&amp; grid[node][i] &lt; minx) {</a:t>
             </a:r>
           </a:p>
           <a:p>
@@ -13516,12 +13522,12 @@
               </a:lnSpc>
             </a:pPr>
             <a:r>
-              <a:rPr lang="en-US" altLang="zh-CN" sz="1100">
+              <a:rPr lang="en-US" altLang="zh-CN" sz="1400">
                 <a:latin typeface="Fira Code Medium" pitchFamily="1" charset="0"/>
                 <a:ea typeface="楷体" panose="02010609060101010101" pitchFamily="49" charset="-122"/>
                 <a:cs typeface="Fira Code Medium" pitchFamily="1" charset="0"/>
               </a:rPr>
-              <a:t>            for (int k = 1; k &lt;= n; ++k) {</a:t>
+              <a:t>                minx = grid[node][i];</a:t>
             </a:r>
           </a:p>
           <a:p>
@@ -13531,12 +13537,12 @@
               </a:lnSpc>
             </a:pPr>
             <a:r>
-              <a:rPr lang="en-US" altLang="zh-CN" sz="1100">
+              <a:rPr lang="en-US" altLang="zh-CN" sz="1400">
                 <a:latin typeface="Fira Code Medium" pitchFamily="1" charset="0"/>
                 <a:ea typeface="楷体" panose="02010609060101010101" pitchFamily="49" charset="-122"/>
                 <a:cs typeface="Fira Code Medium" pitchFamily="1" charset="0"/>
               </a:rPr>
-              <a:t>                if (!vis[k] &amp;&amp; grid[i][k] &lt; minx) {</a:t>
+              <a:t>                nxt = i;</a:t>
             </a:r>
           </a:p>
           <a:p>
@@ -13546,52 +13552,7 @@
               </a:lnSpc>
             </a:pPr>
             <a:r>
-              <a:rPr lang="en-US" altLang="zh-CN" sz="1100">
-                <a:latin typeface="Fira Code Medium" pitchFamily="1" charset="0"/>
-                <a:ea typeface="楷体" panose="02010609060101010101" pitchFamily="49" charset="-122"/>
-                <a:cs typeface="Fira Code Medium" pitchFamily="1" charset="0"/>
-              </a:rPr>
-              <a:t>                    src = i;</a:t>
-            </a:r>
-          </a:p>
-          <a:p>
-            <a:pPr>
-              <a:lnSpc>
-                <a:spcPct val="150000"/>
-              </a:lnSpc>
-            </a:pPr>
-            <a:r>
-              <a:rPr lang="en-US" altLang="zh-CN" sz="1100">
-                <a:latin typeface="Fira Code Medium" pitchFamily="1" charset="0"/>
-                <a:ea typeface="楷体" panose="02010609060101010101" pitchFamily="49" charset="-122"/>
-                <a:cs typeface="Fira Code Medium" pitchFamily="1" charset="0"/>
-              </a:rPr>
-              <a:t>                    dst = k;</a:t>
-            </a:r>
-          </a:p>
-          <a:p>
-            <a:pPr>
-              <a:lnSpc>
-                <a:spcPct val="150000"/>
-              </a:lnSpc>
-            </a:pPr>
-            <a:r>
-              <a:rPr lang="en-US" altLang="zh-CN" sz="1100">
-                <a:latin typeface="Fira Code Medium" pitchFamily="1" charset="0"/>
-                <a:ea typeface="楷体" panose="02010609060101010101" pitchFamily="49" charset="-122"/>
-                <a:cs typeface="Fira Code Medium" pitchFamily="1" charset="0"/>
-              </a:rPr>
-              <a:t>                    minx = grid[i][k]; }</a:t>
-            </a:r>
-          </a:p>
-          <a:p>
-            <a:pPr>
-              <a:lnSpc>
-                <a:spcPct val="150000"/>
-              </a:lnSpc>
-            </a:pPr>
-            <a:r>
-              <a:rPr lang="en-US" altLang="zh-CN" sz="1100">
+              <a:rPr lang="en-US" altLang="zh-CN" sz="1400">
                 <a:latin typeface="Fira Code Medium" pitchFamily="1" charset="0"/>
                 <a:ea typeface="楷体" panose="02010609060101010101" pitchFamily="49" charset="-122"/>
                 <a:cs typeface="Fira Code Medium" pitchFamily="1" charset="0"/>
@@ -13606,7 +13567,7 @@
               </a:lnSpc>
             </a:pPr>
             <a:r>
-              <a:rPr lang="en-US" altLang="zh-CN" sz="1100">
+              <a:rPr lang="en-US" altLang="zh-CN" sz="1400">
                 <a:latin typeface="Fira Code Medium" pitchFamily="1" charset="0"/>
                 <a:ea typeface="楷体" panose="02010609060101010101" pitchFamily="49" charset="-122"/>
                 <a:cs typeface="Fira Code Medium" pitchFamily="1" charset="0"/>
@@ -13621,12 +13582,12 @@
               </a:lnSpc>
             </a:pPr>
             <a:r>
-              <a:rPr lang="en-US" altLang="zh-CN" sz="1100">
+              <a:rPr lang="en-US" altLang="zh-CN" sz="1400">
                 <a:latin typeface="Fira Code Medium" pitchFamily="1" charset="0"/>
                 <a:ea typeface="楷体" panose="02010609060101010101" pitchFamily="49" charset="-122"/>
                 <a:cs typeface="Fira Code Medium" pitchFamily="1" charset="0"/>
               </a:rPr>
-              <a:t>        vis[dst] = 1;</a:t>
+              <a:t>        cost += minx;</a:t>
             </a:r>
           </a:p>
           <a:p>
@@ -13636,12 +13597,12 @@
               </a:lnSpc>
             </a:pPr>
             <a:r>
-              <a:rPr lang="en-US" altLang="zh-CN" sz="1100">
+              <a:rPr lang="en-US" altLang="zh-CN" sz="1400">
                 <a:latin typeface="Fira Code Medium" pitchFamily="1" charset="0"/>
                 <a:ea typeface="楷体" panose="02010609060101010101" pitchFamily="49" charset="-122"/>
                 <a:cs typeface="Fira Code Medium" pitchFamily="1" charset="0"/>
               </a:rPr>
-              <a:t>        mst[src].push_back(dst);</a:t>
+              <a:t>        vis[nxt] = 1;</a:t>
             </a:r>
           </a:p>
           <a:p>
@@ -13651,12 +13612,12 @@
               </a:lnSpc>
             </a:pPr>
             <a:r>
-              <a:rPr lang="en-US" altLang="zh-CN" sz="1100">
+              <a:rPr lang="en-US" altLang="zh-CN" sz="1400">
                 <a:latin typeface="Fira Code Medium" pitchFamily="1" charset="0"/>
                 <a:ea typeface="楷体" panose="02010609060101010101" pitchFamily="49" charset="-122"/>
                 <a:cs typeface="Fira Code Medium" pitchFamily="1" charset="0"/>
               </a:rPr>
-              <a:t>        cnt++; }</a:t>
+              <a:t>        _path[++cnt] = nxt;</a:t>
             </a:r>
           </a:p>
           <a:p>
@@ -13666,12 +13627,12 @@
               </a:lnSpc>
             </a:pPr>
             <a:r>
-              <a:rPr lang="en-US" altLang="zh-CN" sz="1100">
+              <a:rPr lang="en-US" altLang="zh-CN" sz="1400">
                 <a:latin typeface="Fira Code Medium" pitchFamily="1" charset="0"/>
                 <a:ea typeface="楷体" panose="02010609060101010101" pitchFamily="49" charset="-122"/>
                 <a:cs typeface="Fira Code Medium" pitchFamily="1" charset="0"/>
               </a:rPr>
-              <a:t>}</a:t>
+              <a:t>        node = nxt;</a:t>
             </a:r>
           </a:p>
           <a:p>
@@ -13680,156 +13641,30 @@
                 <a:spcPct val="150000"/>
               </a:lnSpc>
             </a:pPr>
-            <a:endParaRPr lang="en-US" altLang="zh-CN" sz="1100">
-              <a:latin typeface="Fira Code Medium" pitchFamily="1" charset="0"/>
-              <a:ea typeface="楷体" panose="02010609060101010101" pitchFamily="49" charset="-122"/>
-              <a:cs typeface="Fira Code Medium" pitchFamily="1" charset="0"/>
-            </a:endParaRPr>
-          </a:p>
-          <a:p>
-            <a:pPr marL="0" marR="0" lvl="0" indent="0" algn="l" defTabSz="914400" rtl="0" eaLnBrk="1" fontAlgn="auto" latinLnBrk="0" hangingPunct="1">
-              <a:lnSpc>
-                <a:spcPct val="150000"/>
-              </a:lnSpc>
-              <a:spcBef>
-                <a:spcPts val="0"/>
-              </a:spcBef>
-              <a:spcAft>
-                <a:spcPts val="0"/>
-              </a:spcAft>
-              <a:buClrTx/>
-              <a:buSzTx/>
-              <a:buFontTx/>
-              <a:buNone/>
-              <a:tabLst/>
-              <a:defRPr/>
-            </a:pPr>
             <a:r>
-              <a:rPr kumimoji="0" lang="en-US" altLang="zh-CN" sz="1100" b="0" i="0" u="none" strike="noStrike" kern="1200" cap="none" spc="0" normalizeH="0" baseline="0" noProof="0">
-                <a:ln>
-                  <a:noFill/>
-                </a:ln>
-                <a:solidFill>
-                  <a:srgbClr val="000000"/>
-                </a:solidFill>
-                <a:effectLst/>
-                <a:uLnTx/>
-                <a:uFillTx/>
+              <a:rPr lang="en-US" altLang="zh-CN" sz="1400">
                 <a:latin typeface="Fira Code Medium" pitchFamily="1" charset="0"/>
                 <a:ea typeface="楷体" panose="02010609060101010101" pitchFamily="49" charset="-122"/>
                 <a:cs typeface="Fira Code Medium" pitchFamily="1" charset="0"/>
               </a:rPr>
-              <a:t>void getPath(int node, vector&lt;int&gt; &amp;ret, vector&lt;int&gt; mst[]) {</a:t>
+              <a:t>    }</a:t>
             </a:r>
           </a:p>
           <a:p>
-            <a:pPr marL="0" marR="0" lvl="0" indent="0" algn="l" defTabSz="914400" rtl="0" eaLnBrk="1" fontAlgn="auto" latinLnBrk="0" hangingPunct="1">
+            <a:pPr>
               <a:lnSpc>
                 <a:spcPct val="150000"/>
               </a:lnSpc>
-              <a:spcBef>
-                <a:spcPts val="0"/>
-              </a:spcBef>
-              <a:spcAft>
-                <a:spcPts val="0"/>
-              </a:spcAft>
-              <a:buClrTx/>
-              <a:buSzTx/>
-              <a:buFontTx/>
-              <a:buNone/>
-              <a:tabLst/>
-              <a:defRPr/>
             </a:pPr>
             <a:r>
-              <a:rPr kumimoji="0" lang="en-US" altLang="zh-CN" sz="1100" b="0" i="0" u="none" strike="noStrike" kern="1200" cap="none" spc="0" normalizeH="0" baseline="0" noProof="0">
-                <a:ln>
-                  <a:noFill/>
-                </a:ln>
-                <a:solidFill>
-                  <a:srgbClr val="000000"/>
-                </a:solidFill>
-                <a:effectLst/>
-                <a:uLnTx/>
-                <a:uFillTx/>
-                <a:latin typeface="Fira Code Medium" pitchFamily="1" charset="0"/>
-                <a:ea typeface="楷体" panose="02010609060101010101" pitchFamily="49" charset="-122"/>
-                <a:cs typeface="Fira Code Medium" pitchFamily="1" charset="0"/>
-              </a:rPr>
-              <a:t>    ret.push_back(node);</a:t>
-            </a:r>
-          </a:p>
-          <a:p>
-            <a:pPr marL="0" marR="0" lvl="0" indent="0" algn="l" defTabSz="914400" rtl="0" eaLnBrk="1" fontAlgn="auto" latinLnBrk="0" hangingPunct="1">
-              <a:lnSpc>
-                <a:spcPct val="150000"/>
-              </a:lnSpc>
-              <a:spcBef>
-                <a:spcPts val="0"/>
-              </a:spcBef>
-              <a:spcAft>
-                <a:spcPts val="0"/>
-              </a:spcAft>
-              <a:buClrTx/>
-              <a:buSzTx/>
-              <a:buFontTx/>
-              <a:buNone/>
-              <a:tabLst/>
-              <a:defRPr/>
-            </a:pPr>
-            <a:r>
-              <a:rPr kumimoji="0" lang="en-US" altLang="zh-CN" sz="1100" b="0" i="0" u="none" strike="noStrike" kern="1200" cap="none" spc="0" normalizeH="0" baseline="0" noProof="0">
-                <a:ln>
-                  <a:noFill/>
-                </a:ln>
-                <a:solidFill>
-                  <a:srgbClr val="000000"/>
-                </a:solidFill>
-                <a:effectLst/>
-                <a:uLnTx/>
-                <a:uFillTx/>
-                <a:latin typeface="Fira Code Medium" pitchFamily="1" charset="0"/>
-                <a:ea typeface="楷体" panose="02010609060101010101" pitchFamily="49" charset="-122"/>
-                <a:cs typeface="Fira Code Medium" pitchFamily="1" charset="0"/>
-              </a:rPr>
-              <a:t>    for (int &amp;nxt: mst[node]) getPath(nxt, ret, mst);</a:t>
-            </a:r>
-          </a:p>
-          <a:p>
-            <a:pPr marL="0" marR="0" lvl="0" indent="0" algn="l" defTabSz="914400" rtl="0" eaLnBrk="1" fontAlgn="auto" latinLnBrk="0" hangingPunct="1">
-              <a:lnSpc>
-                <a:spcPct val="150000"/>
-              </a:lnSpc>
-              <a:spcBef>
-                <a:spcPts val="0"/>
-              </a:spcBef>
-              <a:spcAft>
-                <a:spcPts val="0"/>
-              </a:spcAft>
-              <a:buClrTx/>
-              <a:buSzTx/>
-              <a:buFontTx/>
-              <a:buNone/>
-              <a:tabLst/>
-              <a:defRPr/>
-            </a:pPr>
-            <a:r>
-              <a:rPr kumimoji="0" lang="en-US" altLang="zh-CN" sz="1100" b="0" i="0" u="none" strike="noStrike" kern="1200" cap="none" spc="0" normalizeH="0" baseline="0" noProof="0">
-                <a:ln>
-                  <a:noFill/>
-                </a:ln>
-                <a:solidFill>
-                  <a:srgbClr val="000000"/>
-                </a:solidFill>
-                <a:effectLst/>
-                <a:uLnTx/>
-                <a:uFillTx/>
+              <a:rPr lang="en-US" altLang="zh-CN" sz="1400">
                 <a:latin typeface="Fira Code Medium" pitchFamily="1" charset="0"/>
                 <a:ea typeface="楷体" panose="02010609060101010101" pitchFamily="49" charset="-122"/>
                 <a:cs typeface="Fira Code Medium" pitchFamily="1" charset="0"/>
               </a:rPr>
               <a:t>}</a:t>
             </a:r>
-            <a:endParaRPr kumimoji="0" lang="zh-CN" altLang="en-US" sz="1100" b="0" i="0" u="none" strike="noStrike" kern="1200" cap="none" spc="0" normalizeH="0" baseline="0" noProof="0">
+            <a:endParaRPr kumimoji="0" lang="zh-CN" altLang="en-US" sz="1400" b="0" i="0" u="none" strike="noStrike" kern="1200" cap="none" spc="0" normalizeH="0" baseline="0" noProof="0">
               <a:ln>
                 <a:noFill/>
               </a:ln>
@@ -13851,7 +13686,7 @@
           <p:cNvPr id="43" name="组合 42">
             <a:extLst>
               <a:ext uri="{FF2B5EF4-FFF2-40B4-BE49-F238E27FC236}">
-                <a16:creationId xmlns:a16="http://schemas.microsoft.com/office/drawing/2014/main" id="{EAA87C05-D76C-2EE5-E14E-B0F7E5C06A90}"/>
+                <a16:creationId xmlns:a16="http://schemas.microsoft.com/office/drawing/2014/main" id="{230D6FB0-57AD-40C9-00BB-93E950A5E0E7}"/>
               </a:ext>
             </a:extLst>
           </p:cNvPr>
@@ -13871,7 +13706,7 @@
             <p:cNvPr id="44" name="矩形: 圆角 43">
               <a:extLst>
                 <a:ext uri="{FF2B5EF4-FFF2-40B4-BE49-F238E27FC236}">
-                  <a16:creationId xmlns:a16="http://schemas.microsoft.com/office/drawing/2014/main" id="{9EB658B4-DBE0-085F-6C3E-31B1E5936F35}"/>
+                  <a16:creationId xmlns:a16="http://schemas.microsoft.com/office/drawing/2014/main" id="{5C2787F2-989F-0231-6F0C-1E9D5AD8A240}"/>
                 </a:ext>
               </a:extLst>
             </p:cNvPr>
@@ -13925,7 +13760,7 @@
             <p:cNvPr id="45" name="文本框 44">
               <a:extLst>
                 <a:ext uri="{FF2B5EF4-FFF2-40B4-BE49-F238E27FC236}">
-                  <a16:creationId xmlns:a16="http://schemas.microsoft.com/office/drawing/2014/main" id="{0E4F7566-AE16-A6D3-C528-CF228D7BCB2C}"/>
+                  <a16:creationId xmlns:a16="http://schemas.microsoft.com/office/drawing/2014/main" id="{182C89D6-77CF-EAF7-D0F9-D490ECC34B3C}"/>
                 </a:ext>
               </a:extLst>
             </p:cNvPr>
@@ -13966,20 +13801,20 @@
     </p:spTree>
     <p:extLst>
       <p:ext uri="{BB962C8B-B14F-4D97-AF65-F5344CB8AC3E}">
-        <p14:creationId xmlns:p14="http://schemas.microsoft.com/office/powerpoint/2010/main" val="3614476896"/>
+        <p14:creationId xmlns:p14="http://schemas.microsoft.com/office/powerpoint/2010/main" val="938304987"/>
       </p:ext>
     </p:extLst>
   </p:cSld>
   <p:clrMapOvr>
     <a:masterClrMapping/>
   </p:clrMapOvr>
-  <mc:AlternateContent xmlns:mc="http://schemas.openxmlformats.org/markup-compatibility/2006">
-    <mc:Choice xmlns:p159="http://schemas.microsoft.com/office/powerpoint/2015/09/main" Requires="p159">
+  <mc:AlternateContent xmlns:mc="http://schemas.openxmlformats.org/markup-compatibility/2006" xmlns:p159="http://schemas.microsoft.com/office/powerpoint/2015/09/main">
+    <mc:Choice Requires="p159">
       <p:transition xmlns:p14="http://schemas.microsoft.com/office/powerpoint/2010/main" spd="slow" p14:dur="2000">
         <p159:morph option="byObject"/>
       </p:transition>
     </mc:Choice>
-    <mc:Fallback>
+    <mc:Fallback xmlns="">
       <p:transition spd="slow">
         <p:fade/>
       </p:transition>
@@ -14872,13 +14707,13 @@
   <p:clrMapOvr>
     <a:masterClrMapping/>
   </p:clrMapOvr>
-  <mc:AlternateContent xmlns:mc="http://schemas.openxmlformats.org/markup-compatibility/2006">
-    <mc:Choice xmlns:p159="http://schemas.microsoft.com/office/powerpoint/2015/09/main" Requires="p159">
+  <mc:AlternateContent xmlns:mc="http://schemas.openxmlformats.org/markup-compatibility/2006" xmlns:p159="http://schemas.microsoft.com/office/powerpoint/2015/09/main">
+    <mc:Choice Requires="p159">
       <p:transition xmlns:p14="http://schemas.microsoft.com/office/powerpoint/2010/main" spd="slow" p14:dur="2000">
         <p159:morph option="byObject"/>
       </p:transition>
     </mc:Choice>
-    <mc:Fallback>
+    <mc:Fallback xmlns="">
       <p:transition spd="slow">
         <p:fade/>
       </p:transition>
@@ -14895,7 +14730,7 @@
         <p:cNvPr id="1" name="">
           <a:extLst>
             <a:ext uri="{FF2B5EF4-FFF2-40B4-BE49-F238E27FC236}">
-              <a16:creationId xmlns:a16="http://schemas.microsoft.com/office/drawing/2014/main" id="{71576937-E6DA-CB3E-645E-32FDBA83DAE1}"/>
+              <a16:creationId xmlns:a16="http://schemas.microsoft.com/office/drawing/2014/main" id="{1A3AA1B7-E413-4F27-505F-0464E99FAC86}"/>
             </a:ext>
           </a:extLst>
         </p:cNvPr>
@@ -14915,7 +14750,7 @@
           <p:cNvPr id="13" name="组合 12">
             <a:extLst>
               <a:ext uri="{FF2B5EF4-FFF2-40B4-BE49-F238E27FC236}">
-                <a16:creationId xmlns:a16="http://schemas.microsoft.com/office/drawing/2014/main" id="{4226FC5A-148D-4B31-823F-322A942CF6D1}"/>
+                <a16:creationId xmlns:a16="http://schemas.microsoft.com/office/drawing/2014/main" id="{47C63C57-E5D5-AE4A-162C-52C10967D891}"/>
               </a:ext>
             </a:extLst>
           </p:cNvPr>
@@ -14935,7 +14770,7 @@
             <p:cNvPr id="14" name="矩形 13">
               <a:extLst>
                 <a:ext uri="{FF2B5EF4-FFF2-40B4-BE49-F238E27FC236}">
-                  <a16:creationId xmlns:a16="http://schemas.microsoft.com/office/drawing/2014/main" id="{E3C5E0AF-1519-F17F-1BEF-93C66DC5EF06}"/>
+                  <a16:creationId xmlns:a16="http://schemas.microsoft.com/office/drawing/2014/main" id="{083F14E2-9A3E-1044-06B2-AE6CAB3DF1CF}"/>
                 </a:ext>
               </a:extLst>
             </p:cNvPr>
@@ -14992,7 +14827,7 @@
             <p:cNvPr id="15" name="矩形 14">
               <a:extLst>
                 <a:ext uri="{FF2B5EF4-FFF2-40B4-BE49-F238E27FC236}">
-                  <a16:creationId xmlns:a16="http://schemas.microsoft.com/office/drawing/2014/main" id="{4EBE5B74-C2F9-23DE-8C58-0D4B7C0F5E35}"/>
+                  <a16:creationId xmlns:a16="http://schemas.microsoft.com/office/drawing/2014/main" id="{2D7FA945-EA82-C5A0-FD8E-FB78B875B5C2}"/>
                 </a:ext>
               </a:extLst>
             </p:cNvPr>
@@ -15055,7 +14890,7 @@
             <p:cNvPr id="16" name="文本框 15">
               <a:extLst>
                 <a:ext uri="{FF2B5EF4-FFF2-40B4-BE49-F238E27FC236}">
-                  <a16:creationId xmlns:a16="http://schemas.microsoft.com/office/drawing/2014/main" id="{4A86EA7D-C890-A02E-E880-B9A9E457B529}"/>
+                  <a16:creationId xmlns:a16="http://schemas.microsoft.com/office/drawing/2014/main" id="{2339087E-E8A3-B254-A49D-B92EEF87EEAA}"/>
                 </a:ext>
               </a:extLst>
             </p:cNvPr>
@@ -15101,7 +14936,7 @@
           <p:cNvPr id="51" name="组合 50">
             <a:extLst>
               <a:ext uri="{FF2B5EF4-FFF2-40B4-BE49-F238E27FC236}">
-                <a16:creationId xmlns:a16="http://schemas.microsoft.com/office/drawing/2014/main" id="{D235E86F-4C88-0518-BAF1-789D48FB0CFB}"/>
+                <a16:creationId xmlns:a16="http://schemas.microsoft.com/office/drawing/2014/main" id="{3AD60F8B-A6A7-1E62-B723-DBF4A38561BA}"/>
               </a:ext>
             </a:extLst>
           </p:cNvPr>
@@ -15121,7 +14956,7 @@
             <p:cNvPr id="41" name="组合 40">
               <a:extLst>
                 <a:ext uri="{FF2B5EF4-FFF2-40B4-BE49-F238E27FC236}">
-                  <a16:creationId xmlns:a16="http://schemas.microsoft.com/office/drawing/2014/main" id="{08D1A6CC-E4FA-E3D0-18E1-E74EF174BB3D}"/>
+                  <a16:creationId xmlns:a16="http://schemas.microsoft.com/office/drawing/2014/main" id="{32BEADE0-2199-1B11-E8AC-98B96BB551B5}"/>
                 </a:ext>
               </a:extLst>
             </p:cNvPr>
@@ -15141,7 +14976,7 @@
               <p:cNvPr id="35" name="矩形: 圆角 34">
                 <a:extLst>
                   <a:ext uri="{FF2B5EF4-FFF2-40B4-BE49-F238E27FC236}">
-                    <a16:creationId xmlns:a16="http://schemas.microsoft.com/office/drawing/2014/main" id="{FA44AB52-F689-A58E-FDE5-A4DC5F4BAC94}"/>
+                    <a16:creationId xmlns:a16="http://schemas.microsoft.com/office/drawing/2014/main" id="{0AF46759-4D46-5508-54C0-EC9ECBF0901A}"/>
                   </a:ext>
                 </a:extLst>
               </p:cNvPr>
@@ -15195,7 +15030,7 @@
               <p:cNvPr id="36" name="文本框 35">
                 <a:extLst>
                   <a:ext uri="{FF2B5EF4-FFF2-40B4-BE49-F238E27FC236}">
-                    <a16:creationId xmlns:a16="http://schemas.microsoft.com/office/drawing/2014/main" id="{98ADD8C0-F8EE-0AE0-58C1-466DD6BF7A83}"/>
+                    <a16:creationId xmlns:a16="http://schemas.microsoft.com/office/drawing/2014/main" id="{D0569012-926D-39F5-CA14-5CFED78DF792}"/>
                   </a:ext>
                 </a:extLst>
               </p:cNvPr>
@@ -15226,7 +15061,7 @@
                     </a:solidFill>
                     <a:latin typeface="Consolas" panose="020B0609020204030204" pitchFamily="49" charset="0"/>
                   </a:rPr>
-                  <a:t>greedy</a:t>
+                  <a:t>MST-0</a:t>
                 </a:r>
                 <a:endParaRPr lang="zh-CN" altLang="en-US" sz="2400" b="1">
                   <a:solidFill>
@@ -15243,7 +15078,7 @@
             <p:cNvPr id="46" name="组合 45">
               <a:extLst>
                 <a:ext uri="{FF2B5EF4-FFF2-40B4-BE49-F238E27FC236}">
-                  <a16:creationId xmlns:a16="http://schemas.microsoft.com/office/drawing/2014/main" id="{CABE8730-14E3-1E60-7DE6-2BB1D4CB640E}"/>
+                  <a16:creationId xmlns:a16="http://schemas.microsoft.com/office/drawing/2014/main" id="{5022A916-E8E3-F683-A2F6-206B4BB82DA6}"/>
                 </a:ext>
               </a:extLst>
             </p:cNvPr>
@@ -15263,7 +15098,7 @@
               <p:cNvPr id="17" name="矩形: 圆角 16">
                 <a:extLst>
                   <a:ext uri="{FF2B5EF4-FFF2-40B4-BE49-F238E27FC236}">
-                    <a16:creationId xmlns:a16="http://schemas.microsoft.com/office/drawing/2014/main" id="{40C631A7-DBD1-C824-9E79-03B868A399F5}"/>
+                    <a16:creationId xmlns:a16="http://schemas.microsoft.com/office/drawing/2014/main" id="{04A1C5A2-A5D6-A527-60B7-6ACF1AD79B89}"/>
                   </a:ext>
                 </a:extLst>
               </p:cNvPr>
@@ -15317,7 +15152,7 @@
               <p:cNvPr id="42" name="文本框 41">
                 <a:extLst>
                   <a:ext uri="{FF2B5EF4-FFF2-40B4-BE49-F238E27FC236}">
-                    <a16:creationId xmlns:a16="http://schemas.microsoft.com/office/drawing/2014/main" id="{72E41EED-D500-AB17-208C-197C343A3FFD}"/>
+                    <a16:creationId xmlns:a16="http://schemas.microsoft.com/office/drawing/2014/main" id="{249033C2-388A-FF66-6ACB-9D2B7706131D}"/>
                   </a:ext>
                 </a:extLst>
               </p:cNvPr>
@@ -15326,8 +15161,8 @@
             </p:nvSpPr>
             <p:spPr>
               <a:xfrm>
-                <a:off x="1052985" y="2837506"/>
-                <a:ext cx="2505395" cy="2812886"/>
+                <a:off x="1052985" y="2375841"/>
+                <a:ext cx="2505395" cy="3736216"/>
               </a:xfrm>
               <a:prstGeom prst="rect">
                 <a:avLst/>
@@ -15360,7 +15195,23 @@
                 </a:pPr>
                 <a:r>
                   <a:rPr lang="zh-CN" altLang="en-US" sz="2000" b="0"/>
-                  <a:t>使用最简单的贪心算法，每次都选取距离当前节点最近的未访问节点，直至形成回路。同样需要遍历所有起点。</a:t>
+                  <a:t>先求出图的最小生成树，然后前序遍历生成路径。由于最小生成树与起点选取有关，需遍历所有起点。由于应用于完全图，因此</a:t>
+                </a:r>
+                <a:r>
+                  <a:rPr lang="en-US" altLang="zh-CN" sz="2000" b="0"/>
+                  <a:t>PRIM</a:t>
+                </a:r>
+                <a:r>
+                  <a:rPr lang="zh-CN" altLang="en-US" sz="2000" b="0"/>
+                  <a:t>算法优于</a:t>
+                </a:r>
+                <a:r>
+                  <a:rPr lang="en-US" altLang="zh-CN" sz="2000" b="0"/>
+                  <a:t>KRUSCAL</a:t>
+                </a:r>
+                <a:r>
+                  <a:rPr lang="zh-CN" altLang="en-US" sz="2000" b="0"/>
+                  <a:t>算法。</a:t>
                 </a:r>
               </a:p>
             </p:txBody>
@@ -15372,7 +15223,7 @@
           <p:cNvPr id="52" name="矩形: 圆角 51">
             <a:extLst>
               <a:ext uri="{FF2B5EF4-FFF2-40B4-BE49-F238E27FC236}">
-                <a16:creationId xmlns:a16="http://schemas.microsoft.com/office/drawing/2014/main" id="{9156FB42-E422-BDF8-1024-9D6C344D3AD9}"/>
+                <a16:creationId xmlns:a16="http://schemas.microsoft.com/office/drawing/2014/main" id="{DCBF5B1C-BC07-A3F9-F251-34364D9D00B7}"/>
               </a:ext>
             </a:extLst>
           </p:cNvPr>
@@ -15428,7 +15279,7 @@
           <p:cNvPr id="60" name="文本框 59">
             <a:extLst>
               <a:ext uri="{FF2B5EF4-FFF2-40B4-BE49-F238E27FC236}">
-                <a16:creationId xmlns:a16="http://schemas.microsoft.com/office/drawing/2014/main" id="{8E0CEF7D-792F-3C67-59A4-DCD2AB8ABD6F}"/>
+                <a16:creationId xmlns:a16="http://schemas.microsoft.com/office/drawing/2014/main" id="{3BD3A651-7CDF-D629-8B58-87F847E551B8}"/>
               </a:ext>
             </a:extLst>
           </p:cNvPr>
@@ -15437,8 +15288,8 @@
         </p:nvSpPr>
         <p:spPr>
           <a:xfrm>
-            <a:off x="5626290" y="1298872"/>
-            <a:ext cx="5812276" cy="4912883"/>
+            <a:off x="5786167" y="1225750"/>
+            <a:ext cx="5492522" cy="5403402"/>
           </a:xfrm>
           <a:prstGeom prst="rect">
             <a:avLst/>
@@ -15457,7 +15308,7 @@
               </a:lnSpc>
             </a:pPr>
             <a:r>
-              <a:rPr lang="en-US" altLang="zh-CN" sz="1400">
+              <a:rPr lang="en-US" altLang="zh-CN" sz="1100">
                 <a:latin typeface="Fira Code Medium" pitchFamily="1" charset="0"/>
                 <a:ea typeface="楷体" panose="02010609060101010101" pitchFamily="49" charset="-122"/>
                 <a:cs typeface="Fira Code Medium" pitchFamily="1" charset="0"/>
@@ -15472,7 +15323,7 @@
               </a:lnSpc>
             </a:pPr>
             <a:r>
-              <a:rPr lang="en-US" altLang="zh-CN" sz="1400">
+              <a:rPr lang="en-US" altLang="zh-CN" sz="1100">
                 <a:latin typeface="Fira Code Medium" pitchFamily="1" charset="0"/>
                 <a:ea typeface="楷体" panose="02010609060101010101" pitchFamily="49" charset="-122"/>
                 <a:cs typeface="Fira Code Medium" pitchFamily="1" charset="0"/>
@@ -15487,12 +15338,12 @@
               </a:lnSpc>
             </a:pPr>
             <a:r>
-              <a:rPr lang="en-US" altLang="zh-CN" sz="1400">
+              <a:rPr lang="en-US" altLang="zh-CN" sz="1100">
                 <a:latin typeface="Fira Code Medium" pitchFamily="1" charset="0"/>
                 <a:ea typeface="楷体" panose="02010609060101010101" pitchFamily="49" charset="-122"/>
                 <a:cs typeface="Fira Code Medium" pitchFamily="1" charset="0"/>
               </a:rPr>
-              <a:t>        int nxt, minx = INF;</a:t>
+              <a:t>        int src = 0, dst = 0, minx = INF;</a:t>
             </a:r>
           </a:p>
           <a:p>
@@ -15502,7 +15353,7 @@
               </a:lnSpc>
             </a:pPr>
             <a:r>
-              <a:rPr lang="en-US" altLang="zh-CN" sz="1400">
+              <a:rPr lang="en-US" altLang="zh-CN" sz="1100">
                 <a:latin typeface="Fira Code Medium" pitchFamily="1" charset="0"/>
                 <a:ea typeface="楷体" panose="02010609060101010101" pitchFamily="49" charset="-122"/>
                 <a:cs typeface="Fira Code Medium" pitchFamily="1" charset="0"/>
@@ -15517,12 +15368,12 @@
               </a:lnSpc>
             </a:pPr>
             <a:r>
-              <a:rPr lang="en-US" altLang="zh-CN" sz="1400">
+              <a:rPr lang="en-US" altLang="zh-CN" sz="1100">
                 <a:latin typeface="Fira Code Medium" pitchFamily="1" charset="0"/>
                 <a:ea typeface="楷体" panose="02010609060101010101" pitchFamily="49" charset="-122"/>
                 <a:cs typeface="Fira Code Medium" pitchFamily="1" charset="0"/>
               </a:rPr>
-              <a:t>            if (!vis[i] &amp;&amp; grid[node][i] &lt; minx) {</a:t>
+              <a:t>            if (!vis[i]) continue;</a:t>
             </a:r>
           </a:p>
           <a:p>
@@ -15532,12 +15383,12 @@
               </a:lnSpc>
             </a:pPr>
             <a:r>
-              <a:rPr lang="en-US" altLang="zh-CN" sz="1400">
+              <a:rPr lang="en-US" altLang="zh-CN" sz="1100">
                 <a:latin typeface="Fira Code Medium" pitchFamily="1" charset="0"/>
                 <a:ea typeface="楷体" panose="02010609060101010101" pitchFamily="49" charset="-122"/>
                 <a:cs typeface="Fira Code Medium" pitchFamily="1" charset="0"/>
               </a:rPr>
-              <a:t>                minx = grid[node][i];</a:t>
+              <a:t>            for (int k = 1; k &lt;= n; ++k) {</a:t>
             </a:r>
           </a:p>
           <a:p>
@@ -15547,12 +15398,12 @@
               </a:lnSpc>
             </a:pPr>
             <a:r>
-              <a:rPr lang="en-US" altLang="zh-CN" sz="1400">
+              <a:rPr lang="en-US" altLang="zh-CN" sz="1100">
                 <a:latin typeface="Fira Code Medium" pitchFamily="1" charset="0"/>
                 <a:ea typeface="楷体" panose="02010609060101010101" pitchFamily="49" charset="-122"/>
                 <a:cs typeface="Fira Code Medium" pitchFamily="1" charset="0"/>
               </a:rPr>
-              <a:t>                nxt = i;</a:t>
+              <a:t>                if (!vis[k] &amp;&amp; grid[i][k] &lt; minx) {</a:t>
             </a:r>
           </a:p>
           <a:p>
@@ -15562,7 +15413,52 @@
               </a:lnSpc>
             </a:pPr>
             <a:r>
-              <a:rPr lang="en-US" altLang="zh-CN" sz="1400">
+              <a:rPr lang="en-US" altLang="zh-CN" sz="1100">
+                <a:latin typeface="Fira Code Medium" pitchFamily="1" charset="0"/>
+                <a:ea typeface="楷体" panose="02010609060101010101" pitchFamily="49" charset="-122"/>
+                <a:cs typeface="Fira Code Medium" pitchFamily="1" charset="0"/>
+              </a:rPr>
+              <a:t>                    src = i;</a:t>
+            </a:r>
+          </a:p>
+          <a:p>
+            <a:pPr>
+              <a:lnSpc>
+                <a:spcPct val="150000"/>
+              </a:lnSpc>
+            </a:pPr>
+            <a:r>
+              <a:rPr lang="en-US" altLang="zh-CN" sz="1100">
+                <a:latin typeface="Fira Code Medium" pitchFamily="1" charset="0"/>
+                <a:ea typeface="楷体" panose="02010609060101010101" pitchFamily="49" charset="-122"/>
+                <a:cs typeface="Fira Code Medium" pitchFamily="1" charset="0"/>
+              </a:rPr>
+              <a:t>                    dst = k;</a:t>
+            </a:r>
+          </a:p>
+          <a:p>
+            <a:pPr>
+              <a:lnSpc>
+                <a:spcPct val="150000"/>
+              </a:lnSpc>
+            </a:pPr>
+            <a:r>
+              <a:rPr lang="en-US" altLang="zh-CN" sz="1100">
+                <a:latin typeface="Fira Code Medium" pitchFamily="1" charset="0"/>
+                <a:ea typeface="楷体" panose="02010609060101010101" pitchFamily="49" charset="-122"/>
+                <a:cs typeface="Fira Code Medium" pitchFamily="1" charset="0"/>
+              </a:rPr>
+              <a:t>                    minx = grid[i][k]; }</a:t>
+            </a:r>
+          </a:p>
+          <a:p>
+            <a:pPr>
+              <a:lnSpc>
+                <a:spcPct val="150000"/>
+              </a:lnSpc>
+            </a:pPr>
+            <a:r>
+              <a:rPr lang="en-US" altLang="zh-CN" sz="1100">
                 <a:latin typeface="Fira Code Medium" pitchFamily="1" charset="0"/>
                 <a:ea typeface="楷体" panose="02010609060101010101" pitchFamily="49" charset="-122"/>
                 <a:cs typeface="Fira Code Medium" pitchFamily="1" charset="0"/>
@@ -15577,7 +15473,7 @@
               </a:lnSpc>
             </a:pPr>
             <a:r>
-              <a:rPr lang="en-US" altLang="zh-CN" sz="1400">
+              <a:rPr lang="en-US" altLang="zh-CN" sz="1100">
                 <a:latin typeface="Fira Code Medium" pitchFamily="1" charset="0"/>
                 <a:ea typeface="楷体" panose="02010609060101010101" pitchFamily="49" charset="-122"/>
                 <a:cs typeface="Fira Code Medium" pitchFamily="1" charset="0"/>
@@ -15592,12 +15488,12 @@
               </a:lnSpc>
             </a:pPr>
             <a:r>
-              <a:rPr lang="en-US" altLang="zh-CN" sz="1400">
+              <a:rPr lang="en-US" altLang="zh-CN" sz="1100">
                 <a:latin typeface="Fira Code Medium" pitchFamily="1" charset="0"/>
                 <a:ea typeface="楷体" panose="02010609060101010101" pitchFamily="49" charset="-122"/>
                 <a:cs typeface="Fira Code Medium" pitchFamily="1" charset="0"/>
               </a:rPr>
-              <a:t>        cost += minx;</a:t>
+              <a:t>        vis[dst] = 1;</a:t>
             </a:r>
           </a:p>
           <a:p>
@@ -15607,12 +15503,12 @@
               </a:lnSpc>
             </a:pPr>
             <a:r>
-              <a:rPr lang="en-US" altLang="zh-CN" sz="1400">
+              <a:rPr lang="en-US" altLang="zh-CN" sz="1100">
                 <a:latin typeface="Fira Code Medium" pitchFamily="1" charset="0"/>
                 <a:ea typeface="楷体" panose="02010609060101010101" pitchFamily="49" charset="-122"/>
                 <a:cs typeface="Fira Code Medium" pitchFamily="1" charset="0"/>
               </a:rPr>
-              <a:t>        vis[nxt] = 1;</a:t>
+              <a:t>        mst[src].push_back(dst);</a:t>
             </a:r>
           </a:p>
           <a:p>
@@ -15622,12 +15518,12 @@
               </a:lnSpc>
             </a:pPr>
             <a:r>
-              <a:rPr lang="en-US" altLang="zh-CN" sz="1400">
+              <a:rPr lang="en-US" altLang="zh-CN" sz="1100">
                 <a:latin typeface="Fira Code Medium" pitchFamily="1" charset="0"/>
                 <a:ea typeface="楷体" panose="02010609060101010101" pitchFamily="49" charset="-122"/>
                 <a:cs typeface="Fira Code Medium" pitchFamily="1" charset="0"/>
               </a:rPr>
-              <a:t>        _path[++cnt] = nxt;</a:t>
+              <a:t>        cnt++; }</a:t>
             </a:r>
           </a:p>
           <a:p>
@@ -15637,12 +15533,12 @@
               </a:lnSpc>
             </a:pPr>
             <a:r>
-              <a:rPr lang="en-US" altLang="zh-CN" sz="1400">
+              <a:rPr lang="en-US" altLang="zh-CN" sz="1100">
                 <a:latin typeface="Fira Code Medium" pitchFamily="1" charset="0"/>
                 <a:ea typeface="楷体" panose="02010609060101010101" pitchFamily="49" charset="-122"/>
                 <a:cs typeface="Fira Code Medium" pitchFamily="1" charset="0"/>
               </a:rPr>
-              <a:t>        node = nxt;</a:t>
+              <a:t>}</a:t>
             </a:r>
           </a:p>
           <a:p>
@@ -15651,30 +15547,156 @@
                 <a:spcPct val="150000"/>
               </a:lnSpc>
             </a:pPr>
+            <a:endParaRPr lang="en-US" altLang="zh-CN" sz="1100">
+              <a:latin typeface="Fira Code Medium" pitchFamily="1" charset="0"/>
+              <a:ea typeface="楷体" panose="02010609060101010101" pitchFamily="49" charset="-122"/>
+              <a:cs typeface="Fira Code Medium" pitchFamily="1" charset="0"/>
+            </a:endParaRPr>
+          </a:p>
+          <a:p>
+            <a:pPr marL="0" marR="0" lvl="0" indent="0" algn="l" defTabSz="914400" rtl="0" eaLnBrk="1" fontAlgn="auto" latinLnBrk="0" hangingPunct="1">
+              <a:lnSpc>
+                <a:spcPct val="150000"/>
+              </a:lnSpc>
+              <a:spcBef>
+                <a:spcPts val="0"/>
+              </a:spcBef>
+              <a:spcAft>
+                <a:spcPts val="0"/>
+              </a:spcAft>
+              <a:buClrTx/>
+              <a:buSzTx/>
+              <a:buFontTx/>
+              <a:buNone/>
+              <a:tabLst/>
+              <a:defRPr/>
+            </a:pPr>
             <a:r>
-              <a:rPr lang="en-US" altLang="zh-CN" sz="1400">
+              <a:rPr kumimoji="0" lang="en-US" altLang="zh-CN" sz="1100" b="0" i="0" u="none" strike="noStrike" kern="1200" cap="none" spc="0" normalizeH="0" baseline="0" noProof="0">
+                <a:ln>
+                  <a:noFill/>
+                </a:ln>
+                <a:solidFill>
+                  <a:srgbClr val="000000"/>
+                </a:solidFill>
+                <a:effectLst/>
+                <a:uLnTx/>
+                <a:uFillTx/>
                 <a:latin typeface="Fira Code Medium" pitchFamily="1" charset="0"/>
                 <a:ea typeface="楷体" panose="02010609060101010101" pitchFamily="49" charset="-122"/>
                 <a:cs typeface="Fira Code Medium" pitchFamily="1" charset="0"/>
               </a:rPr>
-              <a:t>    }</a:t>
+              <a:t>void getPath(int node, vector&lt;int&gt; &amp;ret, vector&lt;int&gt; mst[]) {</a:t>
             </a:r>
           </a:p>
           <a:p>
-            <a:pPr>
+            <a:pPr marL="0" marR="0" lvl="0" indent="0" algn="l" defTabSz="914400" rtl="0" eaLnBrk="1" fontAlgn="auto" latinLnBrk="0" hangingPunct="1">
               <a:lnSpc>
                 <a:spcPct val="150000"/>
               </a:lnSpc>
+              <a:spcBef>
+                <a:spcPts val="0"/>
+              </a:spcBef>
+              <a:spcAft>
+                <a:spcPts val="0"/>
+              </a:spcAft>
+              <a:buClrTx/>
+              <a:buSzTx/>
+              <a:buFontTx/>
+              <a:buNone/>
+              <a:tabLst/>
+              <a:defRPr/>
             </a:pPr>
             <a:r>
-              <a:rPr lang="en-US" altLang="zh-CN" sz="1400">
+              <a:rPr kumimoji="0" lang="en-US" altLang="zh-CN" sz="1100" b="0" i="0" u="none" strike="noStrike" kern="1200" cap="none" spc="0" normalizeH="0" baseline="0" noProof="0">
+                <a:ln>
+                  <a:noFill/>
+                </a:ln>
+                <a:solidFill>
+                  <a:srgbClr val="000000"/>
+                </a:solidFill>
+                <a:effectLst/>
+                <a:uLnTx/>
+                <a:uFillTx/>
+                <a:latin typeface="Fira Code Medium" pitchFamily="1" charset="0"/>
+                <a:ea typeface="楷体" panose="02010609060101010101" pitchFamily="49" charset="-122"/>
+                <a:cs typeface="Fira Code Medium" pitchFamily="1" charset="0"/>
+              </a:rPr>
+              <a:t>    ret.push_back(node);</a:t>
+            </a:r>
+          </a:p>
+          <a:p>
+            <a:pPr marL="0" marR="0" lvl="0" indent="0" algn="l" defTabSz="914400" rtl="0" eaLnBrk="1" fontAlgn="auto" latinLnBrk="0" hangingPunct="1">
+              <a:lnSpc>
+                <a:spcPct val="150000"/>
+              </a:lnSpc>
+              <a:spcBef>
+                <a:spcPts val="0"/>
+              </a:spcBef>
+              <a:spcAft>
+                <a:spcPts val="0"/>
+              </a:spcAft>
+              <a:buClrTx/>
+              <a:buSzTx/>
+              <a:buFontTx/>
+              <a:buNone/>
+              <a:tabLst/>
+              <a:defRPr/>
+            </a:pPr>
+            <a:r>
+              <a:rPr kumimoji="0" lang="en-US" altLang="zh-CN" sz="1100" b="0" i="0" u="none" strike="noStrike" kern="1200" cap="none" spc="0" normalizeH="0" baseline="0" noProof="0">
+                <a:ln>
+                  <a:noFill/>
+                </a:ln>
+                <a:solidFill>
+                  <a:srgbClr val="000000"/>
+                </a:solidFill>
+                <a:effectLst/>
+                <a:uLnTx/>
+                <a:uFillTx/>
+                <a:latin typeface="Fira Code Medium" pitchFamily="1" charset="0"/>
+                <a:ea typeface="楷体" panose="02010609060101010101" pitchFamily="49" charset="-122"/>
+                <a:cs typeface="Fira Code Medium" pitchFamily="1" charset="0"/>
+              </a:rPr>
+              <a:t>    for (int &amp;nxt: mst[node]) getPath(nxt, ret, mst);</a:t>
+            </a:r>
+          </a:p>
+          <a:p>
+            <a:pPr marL="0" marR="0" lvl="0" indent="0" algn="l" defTabSz="914400" rtl="0" eaLnBrk="1" fontAlgn="auto" latinLnBrk="0" hangingPunct="1">
+              <a:lnSpc>
+                <a:spcPct val="150000"/>
+              </a:lnSpc>
+              <a:spcBef>
+                <a:spcPts val="0"/>
+              </a:spcBef>
+              <a:spcAft>
+                <a:spcPts val="0"/>
+              </a:spcAft>
+              <a:buClrTx/>
+              <a:buSzTx/>
+              <a:buFontTx/>
+              <a:buNone/>
+              <a:tabLst/>
+              <a:defRPr/>
+            </a:pPr>
+            <a:r>
+              <a:rPr kumimoji="0" lang="en-US" altLang="zh-CN" sz="1100" b="0" i="0" u="none" strike="noStrike" kern="1200" cap="none" spc="0" normalizeH="0" baseline="0" noProof="0">
+                <a:ln>
+                  <a:noFill/>
+                </a:ln>
+                <a:solidFill>
+                  <a:srgbClr val="000000"/>
+                </a:solidFill>
+                <a:effectLst/>
+                <a:uLnTx/>
+                <a:uFillTx/>
                 <a:latin typeface="Fira Code Medium" pitchFamily="1" charset="0"/>
                 <a:ea typeface="楷体" panose="02010609060101010101" pitchFamily="49" charset="-122"/>
                 <a:cs typeface="Fira Code Medium" pitchFamily="1" charset="0"/>
               </a:rPr>
               <a:t>}</a:t>
             </a:r>
-            <a:endParaRPr kumimoji="0" lang="zh-CN" altLang="en-US" sz="1400" b="0" i="0" u="none" strike="noStrike" kern="1200" cap="none" spc="0" normalizeH="0" baseline="0" noProof="0">
+            <a:endParaRPr kumimoji="0" lang="zh-CN" altLang="en-US" sz="1100" b="0" i="0" u="none" strike="noStrike" kern="1200" cap="none" spc="0" normalizeH="0" baseline="0" noProof="0">
               <a:ln>
                 <a:noFill/>
               </a:ln>
@@ -15696,7 +15718,7 @@
           <p:cNvPr id="43" name="组合 42">
             <a:extLst>
               <a:ext uri="{FF2B5EF4-FFF2-40B4-BE49-F238E27FC236}">
-                <a16:creationId xmlns:a16="http://schemas.microsoft.com/office/drawing/2014/main" id="{230D6FB0-57AD-40C9-00BB-93E950A5E0E7}"/>
+                <a16:creationId xmlns:a16="http://schemas.microsoft.com/office/drawing/2014/main" id="{EAA87C05-D76C-2EE5-E14E-B0F7E5C06A90}"/>
               </a:ext>
             </a:extLst>
           </p:cNvPr>
@@ -15716,7 +15738,7 @@
             <p:cNvPr id="44" name="矩形: 圆角 43">
               <a:extLst>
                 <a:ext uri="{FF2B5EF4-FFF2-40B4-BE49-F238E27FC236}">
-                  <a16:creationId xmlns:a16="http://schemas.microsoft.com/office/drawing/2014/main" id="{5C2787F2-989F-0231-6F0C-1E9D5AD8A240}"/>
+                  <a16:creationId xmlns:a16="http://schemas.microsoft.com/office/drawing/2014/main" id="{9EB658B4-DBE0-085F-6C3E-31B1E5936F35}"/>
                 </a:ext>
               </a:extLst>
             </p:cNvPr>
@@ -15770,7 +15792,7 @@
             <p:cNvPr id="45" name="文本框 44">
               <a:extLst>
                 <a:ext uri="{FF2B5EF4-FFF2-40B4-BE49-F238E27FC236}">
-                  <a16:creationId xmlns:a16="http://schemas.microsoft.com/office/drawing/2014/main" id="{182C89D6-77CF-EAF7-D0F9-D490ECC34B3C}"/>
+                  <a16:creationId xmlns:a16="http://schemas.microsoft.com/office/drawing/2014/main" id="{0E4F7566-AE16-A6D3-C528-CF228D7BCB2C}"/>
                 </a:ext>
               </a:extLst>
             </p:cNvPr>
@@ -15811,20 +15833,20 @@
     </p:spTree>
     <p:extLst>
       <p:ext uri="{BB962C8B-B14F-4D97-AF65-F5344CB8AC3E}">
-        <p14:creationId xmlns:p14="http://schemas.microsoft.com/office/powerpoint/2010/main" val="1545626617"/>
+        <p14:creationId xmlns:p14="http://schemas.microsoft.com/office/powerpoint/2010/main" val="3614476896"/>
       </p:ext>
     </p:extLst>
   </p:cSld>
   <p:clrMapOvr>
     <a:masterClrMapping/>
   </p:clrMapOvr>
-  <mc:AlternateContent xmlns:mc="http://schemas.openxmlformats.org/markup-compatibility/2006">
-    <mc:Choice xmlns:p159="http://schemas.microsoft.com/office/powerpoint/2015/09/main" Requires="p159">
+  <mc:AlternateContent xmlns:mc="http://schemas.openxmlformats.org/markup-compatibility/2006" xmlns:p159="http://schemas.microsoft.com/office/powerpoint/2015/09/main">
+    <mc:Choice Requires="p159">
       <p:transition xmlns:p14="http://schemas.microsoft.com/office/powerpoint/2010/main" spd="slow" p14:dur="2000">
         <p159:morph option="byObject"/>
       </p:transition>
     </mc:Choice>
-    <mc:Fallback>
+    <mc:Fallback xmlns="">
       <p:transition spd="slow">
         <p:fade/>
       </p:transition>
@@ -15834,6 +15856,1211 @@
 </file>
 
 <file path=ppt/slides/slide21.xml><?xml version="1.0" encoding="utf-8"?>
+<p:sld xmlns:a="http://schemas.openxmlformats.org/drawingml/2006/main" xmlns:r="http://schemas.openxmlformats.org/officeDocument/2006/relationships" xmlns:p="http://schemas.openxmlformats.org/presentationml/2006/main">
+  <p:cSld>
+    <p:spTree>
+      <p:nvGrpSpPr>
+        <p:cNvPr id="1" name="">
+          <a:extLst>
+            <a:ext uri="{FF2B5EF4-FFF2-40B4-BE49-F238E27FC236}">
+              <a16:creationId xmlns:a16="http://schemas.microsoft.com/office/drawing/2014/main" id="{FDD1D256-6F91-33CB-0FBB-02DE199198F8}"/>
+            </a:ext>
+          </a:extLst>
+        </p:cNvPr>
+        <p:cNvGrpSpPr/>
+        <p:nvPr/>
+      </p:nvGrpSpPr>
+      <p:grpSpPr>
+        <a:xfrm>
+          <a:off x="0" y="0"/>
+          <a:ext cx="0" cy="0"/>
+          <a:chOff x="0" y="0"/>
+          <a:chExt cx="0" cy="0"/>
+        </a:xfrm>
+      </p:grpSpPr>
+      <p:grpSp>
+        <p:nvGrpSpPr>
+          <p:cNvPr id="13" name="组合 12">
+            <a:extLst>
+              <a:ext uri="{FF2B5EF4-FFF2-40B4-BE49-F238E27FC236}">
+                <a16:creationId xmlns:a16="http://schemas.microsoft.com/office/drawing/2014/main" id="{01FFA333-3C63-92B2-95B4-7EAE3D1F310D}"/>
+              </a:ext>
+            </a:extLst>
+          </p:cNvPr>
+          <p:cNvGrpSpPr/>
+          <p:nvPr/>
+        </p:nvGrpSpPr>
+        <p:grpSpPr>
+          <a:xfrm>
+            <a:off x="-12700" y="-13335"/>
+            <a:ext cx="3762375" cy="874395"/>
+            <a:chOff x="-12700" y="-13335"/>
+            <a:chExt cx="3762375" cy="874395"/>
+          </a:xfrm>
+        </p:grpSpPr>
+        <p:sp>
+          <p:nvSpPr>
+            <p:cNvPr id="14" name="矩形 13">
+              <a:extLst>
+                <a:ext uri="{FF2B5EF4-FFF2-40B4-BE49-F238E27FC236}">
+                  <a16:creationId xmlns:a16="http://schemas.microsoft.com/office/drawing/2014/main" id="{621B4C80-333F-0E3C-A7A7-7882CB2B4139}"/>
+                </a:ext>
+              </a:extLst>
+            </p:cNvPr>
+            <p:cNvSpPr/>
+            <p:nvPr/>
+          </p:nvSpPr>
+          <p:spPr>
+            <a:xfrm>
+              <a:off x="-12700" y="784860"/>
+              <a:ext cx="3762375" cy="76200"/>
+            </a:xfrm>
+            <a:prstGeom prst="rect">
+              <a:avLst/>
+            </a:prstGeom>
+            <a:solidFill>
+              <a:schemeClr val="tx2">
+                <a:lumMod val="75000"/>
+                <a:lumOff val="25000"/>
+              </a:schemeClr>
+            </a:solidFill>
+            <a:ln>
+              <a:solidFill>
+                <a:schemeClr val="bg1"/>
+              </a:solidFill>
+            </a:ln>
+          </p:spPr>
+          <p:style>
+            <a:lnRef idx="2">
+              <a:schemeClr val="accent1">
+                <a:shade val="50000"/>
+              </a:schemeClr>
+            </a:lnRef>
+            <a:fillRef idx="1">
+              <a:schemeClr val="accent1"/>
+            </a:fillRef>
+            <a:effectRef idx="0">
+              <a:schemeClr val="accent1"/>
+            </a:effectRef>
+            <a:fontRef idx="minor">
+              <a:schemeClr val="lt1"/>
+            </a:fontRef>
+          </p:style>
+          <p:txBody>
+            <a:bodyPr rtlCol="0" anchor="ctr"/>
+            <a:lstStyle/>
+            <a:p>
+              <a:pPr algn="ctr"/>
+              <a:endParaRPr lang="zh-CN" altLang="en-US"/>
+            </a:p>
+          </p:txBody>
+        </p:sp>
+        <p:sp>
+          <p:nvSpPr>
+            <p:cNvPr id="15" name="矩形 14">
+              <a:extLst>
+                <a:ext uri="{FF2B5EF4-FFF2-40B4-BE49-F238E27FC236}">
+                  <a16:creationId xmlns:a16="http://schemas.microsoft.com/office/drawing/2014/main" id="{9659C2C5-05D0-DE05-187D-30445D9F297C}"/>
+                </a:ext>
+              </a:extLst>
+            </p:cNvPr>
+            <p:cNvSpPr/>
+            <p:nvPr/>
+          </p:nvSpPr>
+          <p:spPr>
+            <a:xfrm>
+              <a:off x="-12700" y="-13335"/>
+              <a:ext cx="874395" cy="874395"/>
+            </a:xfrm>
+            <a:prstGeom prst="rect">
+              <a:avLst/>
+            </a:prstGeom>
+            <a:solidFill>
+              <a:schemeClr val="tx2">
+                <a:lumMod val="75000"/>
+                <a:lumOff val="25000"/>
+              </a:schemeClr>
+            </a:solidFill>
+            <a:ln>
+              <a:solidFill>
+                <a:schemeClr val="bg1"/>
+              </a:solidFill>
+            </a:ln>
+          </p:spPr>
+          <p:style>
+            <a:lnRef idx="2">
+              <a:schemeClr val="accent1">
+                <a:shade val="50000"/>
+              </a:schemeClr>
+            </a:lnRef>
+            <a:fillRef idx="1">
+              <a:schemeClr val="accent1"/>
+            </a:fillRef>
+            <a:effectRef idx="0">
+              <a:schemeClr val="accent1"/>
+            </a:effectRef>
+            <a:fontRef idx="minor">
+              <a:schemeClr val="lt1"/>
+            </a:fontRef>
+          </p:style>
+          <p:txBody>
+            <a:bodyPr rtlCol="0" anchor="ctr"/>
+            <a:lstStyle/>
+            <a:p>
+              <a:pPr algn="ctr"/>
+              <a:r>
+                <a:rPr lang="en-US" altLang="zh-CN" sz="4800">
+                  <a:latin typeface="微软雅黑" panose="020B0503020204020204" pitchFamily="34" charset="-122"/>
+                  <a:ea typeface="微软雅黑" panose="020B0503020204020204" pitchFamily="34" charset="-122"/>
+                </a:rPr>
+                <a:t>3</a:t>
+              </a:r>
+            </a:p>
+          </p:txBody>
+        </p:sp>
+        <p:sp>
+          <p:nvSpPr>
+            <p:cNvPr id="16" name="文本框 15">
+              <a:extLst>
+                <a:ext uri="{FF2B5EF4-FFF2-40B4-BE49-F238E27FC236}">
+                  <a16:creationId xmlns:a16="http://schemas.microsoft.com/office/drawing/2014/main" id="{2AD14BA3-EDF6-DB71-EA27-A72E14235DDF}"/>
+                </a:ext>
+              </a:extLst>
+            </p:cNvPr>
+            <p:cNvSpPr txBox="1"/>
+            <p:nvPr/>
+          </p:nvSpPr>
+          <p:spPr>
+            <a:xfrm>
+              <a:off x="861695" y="0"/>
+              <a:ext cx="2887980" cy="830997"/>
+            </a:xfrm>
+            <a:prstGeom prst="rect">
+              <a:avLst/>
+            </a:prstGeom>
+            <a:noFill/>
+          </p:spPr>
+          <p:txBody>
+            <a:bodyPr wrap="square" rtlCol="0">
+              <a:spAutoFit/>
+            </a:bodyPr>
+            <a:lstStyle/>
+            <a:p>
+              <a:pPr algn="ctr"/>
+              <a:r>
+                <a:rPr lang="zh-CN" altLang="en-US" sz="4800" b="1">
+                  <a:solidFill>
+                    <a:schemeClr val="tx2">
+                      <a:lumMod val="75000"/>
+                      <a:lumOff val="25000"/>
+                    </a:schemeClr>
+                  </a:solidFill>
+                  <a:latin typeface="华文中宋" panose="02010600040101010101" pitchFamily="2" charset="-122"/>
+                  <a:ea typeface="华文中宋" panose="02010600040101010101" pitchFamily="2" charset="-122"/>
+                </a:rPr>
+                <a:t>实验过程</a:t>
+              </a:r>
+            </a:p>
+          </p:txBody>
+        </p:sp>
+      </p:grpSp>
+      <p:grpSp>
+        <p:nvGrpSpPr>
+          <p:cNvPr id="51" name="组合 50">
+            <a:extLst>
+              <a:ext uri="{FF2B5EF4-FFF2-40B4-BE49-F238E27FC236}">
+                <a16:creationId xmlns:a16="http://schemas.microsoft.com/office/drawing/2014/main" id="{0F7C1EBC-B198-560A-0D9B-13B0E82C47F5}"/>
+              </a:ext>
+            </a:extLst>
+          </p:cNvPr>
+          <p:cNvGrpSpPr/>
+          <p:nvPr/>
+        </p:nvGrpSpPr>
+        <p:grpSpPr>
+          <a:xfrm>
+            <a:off x="515977" y="1197142"/>
+            <a:ext cx="4176339" cy="4355431"/>
+            <a:chOff x="1237872" y="1298872"/>
+            <a:chExt cx="2887979" cy="6463523"/>
+          </a:xfrm>
+        </p:grpSpPr>
+        <p:grpSp>
+          <p:nvGrpSpPr>
+            <p:cNvPr id="41" name="组合 40">
+              <a:extLst>
+                <a:ext uri="{FF2B5EF4-FFF2-40B4-BE49-F238E27FC236}">
+                  <a16:creationId xmlns:a16="http://schemas.microsoft.com/office/drawing/2014/main" id="{263F06F2-C5B5-A119-CCA0-1D8949614820}"/>
+                </a:ext>
+              </a:extLst>
+            </p:cNvPr>
+            <p:cNvGrpSpPr/>
+            <p:nvPr/>
+          </p:nvGrpSpPr>
+          <p:grpSpPr>
+            <a:xfrm>
+              <a:off x="1237872" y="1298872"/>
+              <a:ext cx="2887979" cy="969819"/>
+              <a:chOff x="861695" y="1126384"/>
+              <a:chExt cx="3214255" cy="969819"/>
+            </a:xfrm>
+          </p:grpSpPr>
+          <p:sp>
+            <p:nvSpPr>
+              <p:cNvPr id="35" name="矩形: 圆角 34">
+                <a:extLst>
+                  <a:ext uri="{FF2B5EF4-FFF2-40B4-BE49-F238E27FC236}">
+                    <a16:creationId xmlns:a16="http://schemas.microsoft.com/office/drawing/2014/main" id="{E9528A2F-9CA4-2A46-A0C0-BE3E2DC5B8E9}"/>
+                  </a:ext>
+                </a:extLst>
+              </p:cNvPr>
+              <p:cNvSpPr/>
+              <p:nvPr/>
+            </p:nvSpPr>
+            <p:spPr>
+              <a:xfrm>
+                <a:off x="861695" y="1126384"/>
+                <a:ext cx="3214255" cy="969819"/>
+              </a:xfrm>
+              <a:prstGeom prst="roundRect">
+                <a:avLst/>
+              </a:prstGeom>
+              <a:solidFill>
+                <a:srgbClr val="324273"/>
+              </a:solidFill>
+              <a:ln w="19050">
+                <a:solidFill>
+                  <a:srgbClr val="324273"/>
+                </a:solidFill>
+              </a:ln>
+            </p:spPr>
+            <p:style>
+              <a:lnRef idx="2">
+                <a:schemeClr val="accent1">
+                  <a:shade val="15000"/>
+                </a:schemeClr>
+              </a:lnRef>
+              <a:fillRef idx="1">
+                <a:schemeClr val="accent1"/>
+              </a:fillRef>
+              <a:effectRef idx="0">
+                <a:schemeClr val="accent1"/>
+              </a:effectRef>
+              <a:fontRef idx="minor">
+                <a:schemeClr val="lt1"/>
+              </a:fontRef>
+            </p:style>
+            <p:txBody>
+              <a:bodyPr rtlCol="0" anchor="ctr"/>
+              <a:lstStyle/>
+              <a:p>
+                <a:pPr algn="ctr"/>
+                <a:endParaRPr lang="zh-CN" altLang="en-US"/>
+              </a:p>
+            </p:txBody>
+          </p:sp>
+          <p:sp>
+            <p:nvSpPr>
+              <p:cNvPr id="36" name="文本框 35">
+                <a:extLst>
+                  <a:ext uri="{FF2B5EF4-FFF2-40B4-BE49-F238E27FC236}">
+                    <a16:creationId xmlns:a16="http://schemas.microsoft.com/office/drawing/2014/main" id="{620D620F-3908-0DD5-D57F-75AF8505A5FA}"/>
+                  </a:ext>
+                </a:extLst>
+              </p:cNvPr>
+              <p:cNvSpPr txBox="1"/>
+              <p:nvPr/>
+            </p:nvSpPr>
+            <p:spPr>
+              <a:xfrm>
+                <a:off x="1493653" y="1380461"/>
+                <a:ext cx="1950335" cy="461665"/>
+              </a:xfrm>
+              <a:prstGeom prst="rect">
+                <a:avLst/>
+              </a:prstGeom>
+              <a:noFill/>
+            </p:spPr>
+            <p:txBody>
+              <a:bodyPr wrap="square" rtlCol="0" anchor="ctr">
+                <a:spAutoFit/>
+              </a:bodyPr>
+              <a:lstStyle/>
+              <a:p>
+                <a:pPr algn="ctr"/>
+                <a:r>
+                  <a:rPr lang="en-US" altLang="zh-CN" sz="2400" b="1">
+                    <a:solidFill>
+                      <a:schemeClr val="bg1"/>
+                    </a:solidFill>
+                    <a:latin typeface="Consolas" panose="020B0609020204030204" pitchFamily="49" charset="0"/>
+                  </a:rPr>
+                  <a:t>MST-1</a:t>
+                </a:r>
+                <a:endParaRPr lang="zh-CN" altLang="en-US" sz="2400" b="1">
+                  <a:solidFill>
+                    <a:schemeClr val="bg1"/>
+                  </a:solidFill>
+                  <a:latin typeface="Consolas" panose="020B0609020204030204" pitchFamily="49" charset="0"/>
+                </a:endParaRPr>
+              </a:p>
+            </p:txBody>
+          </p:sp>
+        </p:grpSp>
+        <p:grpSp>
+          <p:nvGrpSpPr>
+            <p:cNvPr id="46" name="组合 45">
+              <a:extLst>
+                <a:ext uri="{FF2B5EF4-FFF2-40B4-BE49-F238E27FC236}">
+                  <a16:creationId xmlns:a16="http://schemas.microsoft.com/office/drawing/2014/main" id="{54AEBD89-2C18-C94D-57E3-EE2E530547B0}"/>
+                </a:ext>
+              </a:extLst>
+            </p:cNvPr>
+            <p:cNvGrpSpPr/>
+            <p:nvPr/>
+          </p:nvGrpSpPr>
+          <p:grpSpPr>
+            <a:xfrm>
+              <a:off x="1237872" y="2786626"/>
+              <a:ext cx="2887978" cy="4975769"/>
+              <a:chOff x="861695" y="2607219"/>
+              <a:chExt cx="2887978" cy="4975769"/>
+            </a:xfrm>
+          </p:grpSpPr>
+          <p:sp>
+            <p:nvSpPr>
+              <p:cNvPr id="17" name="矩形: 圆角 16">
+                <a:extLst>
+                  <a:ext uri="{FF2B5EF4-FFF2-40B4-BE49-F238E27FC236}">
+                    <a16:creationId xmlns:a16="http://schemas.microsoft.com/office/drawing/2014/main" id="{A3D9BCE2-7225-696B-B2F0-A2FA82A2181B}"/>
+                  </a:ext>
+                </a:extLst>
+              </p:cNvPr>
+              <p:cNvSpPr/>
+              <p:nvPr/>
+            </p:nvSpPr>
+            <p:spPr>
+              <a:xfrm>
+                <a:off x="861695" y="2607219"/>
+                <a:ext cx="2887978" cy="4975769"/>
+              </a:xfrm>
+              <a:prstGeom prst="roundRect">
+                <a:avLst/>
+              </a:prstGeom>
+              <a:solidFill>
+                <a:srgbClr val="D9D9D9"/>
+              </a:solidFill>
+              <a:ln w="19050">
+                <a:solidFill>
+                  <a:srgbClr val="324273"/>
+                </a:solidFill>
+              </a:ln>
+            </p:spPr>
+            <p:style>
+              <a:lnRef idx="2">
+                <a:schemeClr val="accent1">
+                  <a:shade val="15000"/>
+                </a:schemeClr>
+              </a:lnRef>
+              <a:fillRef idx="1">
+                <a:schemeClr val="accent1"/>
+              </a:fillRef>
+              <a:effectRef idx="0">
+                <a:schemeClr val="accent1"/>
+              </a:effectRef>
+              <a:fontRef idx="minor">
+                <a:schemeClr val="lt1"/>
+              </a:fontRef>
+            </p:style>
+            <p:txBody>
+              <a:bodyPr rtlCol="0" anchor="ctr"/>
+              <a:lstStyle/>
+              <a:p>
+                <a:pPr algn="ctr"/>
+                <a:endParaRPr lang="zh-CN" altLang="en-US"/>
+              </a:p>
+            </p:txBody>
+          </p:sp>
+          <p:sp>
+            <p:nvSpPr>
+              <p:cNvPr id="42" name="文本框 41">
+                <a:extLst>
+                  <a:ext uri="{FF2B5EF4-FFF2-40B4-BE49-F238E27FC236}">
+                    <a16:creationId xmlns:a16="http://schemas.microsoft.com/office/drawing/2014/main" id="{37F43D5F-4232-EA05-334A-16CA3B3F35F9}"/>
+                  </a:ext>
+                </a:extLst>
+              </p:cNvPr>
+              <p:cNvSpPr txBox="1"/>
+              <p:nvPr/>
+            </p:nvSpPr>
+            <p:spPr>
+              <a:xfrm>
+                <a:off x="1052985" y="3458373"/>
+                <a:ext cx="2505395" cy="3273460"/>
+              </a:xfrm>
+              <a:prstGeom prst="rect">
+                <a:avLst/>
+              </a:prstGeom>
+              <a:noFill/>
+            </p:spPr>
+            <p:txBody>
+              <a:bodyPr wrap="square" rtlCol="0" anchor="ctr">
+                <a:spAutoFit/>
+              </a:bodyPr>
+              <a:lstStyle>
+                <a:defPPr>
+                  <a:defRPr lang="zh-CN"/>
+                </a:defPPr>
+                <a:lvl1pPr algn="ctr">
+                  <a:defRPr sz="2800" b="1">
+                    <a:solidFill>
+                      <a:srgbClr val="324273"/>
+                    </a:solidFill>
+                    <a:latin typeface="Consolas" panose="020B0609020204030204" pitchFamily="49" charset="0"/>
+                    <a:ea typeface="华文中宋" panose="02010600040101010101" pitchFamily="2" charset="-122"/>
+                  </a:defRPr>
+                </a:lvl1pPr>
+              </a:lstStyle>
+              <a:p>
+                <a:pPr algn="just">
+                  <a:lnSpc>
+                    <a:spcPct val="150000"/>
+                  </a:lnSpc>
+                </a:pPr>
+                <a:r>
+                  <a:rPr lang="zh-CN" altLang="en-US" sz="2000" b="0"/>
+                  <a:t>我们查阅资料，发现当</a:t>
+                </a:r>
+                <a:r>
+                  <a:rPr lang="en-US" altLang="zh-CN" sz="2000" b="0"/>
+                  <a:t>PRIM</a:t>
+                </a:r>
+                <a:r>
+                  <a:rPr lang="zh-CN" altLang="en-US" sz="2000" b="0"/>
+                  <a:t>算法应用于完全图时，无论起点选取如何，树的权值和总是相同；若不存在相同权值的边，则树的结构也相同。</a:t>
+                </a:r>
+              </a:p>
+            </p:txBody>
+          </p:sp>
+        </p:grpSp>
+      </p:grpSp>
+      <p:sp>
+        <p:nvSpPr>
+          <p:cNvPr id="52" name="矩形: 圆角 51">
+            <a:extLst>
+              <a:ext uri="{FF2B5EF4-FFF2-40B4-BE49-F238E27FC236}">
+                <a16:creationId xmlns:a16="http://schemas.microsoft.com/office/drawing/2014/main" id="{62B82639-BC7D-53B8-E9B8-8A81F4A4FABF}"/>
+              </a:ext>
+            </a:extLst>
+          </p:cNvPr>
+          <p:cNvSpPr/>
+          <p:nvPr/>
+        </p:nvSpPr>
+        <p:spPr>
+          <a:xfrm>
+            <a:off x="4869284" y="1461838"/>
+            <a:ext cx="7146086" cy="4090736"/>
+          </a:xfrm>
+          <a:prstGeom prst="roundRect">
+            <a:avLst>
+              <a:gd name="adj" fmla="val 8942"/>
+            </a:avLst>
+          </a:prstGeom>
+          <a:solidFill>
+            <a:srgbClr val="D9D9D9"/>
+          </a:solidFill>
+          <a:ln w="19050">
+            <a:solidFill>
+              <a:srgbClr val="324273"/>
+            </a:solidFill>
+          </a:ln>
+        </p:spPr>
+        <p:style>
+          <a:lnRef idx="2">
+            <a:schemeClr val="accent1">
+              <a:shade val="15000"/>
+            </a:schemeClr>
+          </a:lnRef>
+          <a:fillRef idx="1">
+            <a:schemeClr val="accent1"/>
+          </a:fillRef>
+          <a:effectRef idx="0">
+            <a:schemeClr val="accent1"/>
+          </a:effectRef>
+          <a:fontRef idx="minor">
+            <a:schemeClr val="lt1"/>
+          </a:fontRef>
+        </p:style>
+        <p:txBody>
+          <a:bodyPr rtlCol="0" anchor="ctr"/>
+          <a:lstStyle/>
+          <a:p>
+            <a:pPr algn="ctr"/>
+            <a:endParaRPr lang="zh-CN" altLang="en-US"/>
+          </a:p>
+        </p:txBody>
+      </p:sp>
+      <p:sp>
+        <p:nvSpPr>
+          <p:cNvPr id="60" name="文本框 59">
+            <a:extLst>
+              <a:ext uri="{FF2B5EF4-FFF2-40B4-BE49-F238E27FC236}">
+                <a16:creationId xmlns:a16="http://schemas.microsoft.com/office/drawing/2014/main" id="{AEA26571-8D71-997F-3160-A80169BAFD9E}"/>
+              </a:ext>
+            </a:extLst>
+          </p:cNvPr>
+          <p:cNvSpPr txBox="1"/>
+          <p:nvPr/>
+        </p:nvSpPr>
+        <p:spPr>
+          <a:xfrm>
+            <a:off x="5280018" y="2210701"/>
+            <a:ext cx="3071652" cy="3016210"/>
+          </a:xfrm>
+          <a:prstGeom prst="rect">
+            <a:avLst/>
+          </a:prstGeom>
+          <a:noFill/>
+        </p:spPr>
+        <p:txBody>
+          <a:bodyPr wrap="square" numCol="1" rtlCol="0">
+            <a:spAutoFit/>
+          </a:bodyPr>
+          <a:lstStyle/>
+          <a:p>
+            <a:pPr>
+              <a:lnSpc>
+                <a:spcPct val="150000"/>
+              </a:lnSpc>
+            </a:pPr>
+            <a:r>
+              <a:rPr kumimoji="0" lang="en-US" altLang="zh-CN" sz="1600" b="0" i="0" u="none" strike="noStrike" kern="1200" cap="none" spc="0" normalizeH="0" baseline="0" noProof="0">
+                <a:ln>
+                  <a:noFill/>
+                </a:ln>
+                <a:solidFill>
+                  <a:srgbClr val="000000"/>
+                </a:solidFill>
+                <a:effectLst/>
+                <a:uLnTx/>
+                <a:uFillTx/>
+                <a:latin typeface="Fira Code Medium" pitchFamily="1" charset="0"/>
+                <a:ea typeface="楷体" panose="02010609060101010101" pitchFamily="49" charset="-122"/>
+                <a:cs typeface="Fira Code Medium" pitchFamily="1" charset="0"/>
+              </a:rPr>
+              <a:t>// MST-0</a:t>
+            </a:r>
+          </a:p>
+          <a:p>
+            <a:pPr>
+              <a:lnSpc>
+                <a:spcPct val="150000"/>
+              </a:lnSpc>
+            </a:pPr>
+            <a:r>
+              <a:rPr lang="en-US" altLang="zh-CN" sz="1600">
+                <a:solidFill>
+                  <a:srgbClr val="000000"/>
+                </a:solidFill>
+                <a:latin typeface="Fira Code Medium" pitchFamily="1" charset="0"/>
+                <a:ea typeface="楷体" panose="02010609060101010101" pitchFamily="49" charset="-122"/>
+                <a:cs typeface="Fira Code Medium" pitchFamily="1" charset="0"/>
+              </a:rPr>
+              <a:t>int main() {</a:t>
+            </a:r>
+          </a:p>
+          <a:p>
+            <a:pPr>
+              <a:lnSpc>
+                <a:spcPct val="150000"/>
+              </a:lnSpc>
+            </a:pPr>
+            <a:r>
+              <a:rPr lang="en-US" altLang="zh-CN" sz="1600">
+                <a:solidFill>
+                  <a:srgbClr val="000000"/>
+                </a:solidFill>
+                <a:latin typeface="Fira Code Medium" pitchFamily="1" charset="0"/>
+                <a:ea typeface="楷体" panose="02010609060101010101" pitchFamily="49" charset="-122"/>
+                <a:cs typeface="Fira Code Medium" pitchFamily="1" charset="0"/>
+              </a:rPr>
+              <a:t>    /* ... */</a:t>
+            </a:r>
+          </a:p>
+          <a:p>
+            <a:pPr>
+              <a:lnSpc>
+                <a:spcPct val="150000"/>
+              </a:lnSpc>
+            </a:pPr>
+            <a:r>
+              <a:rPr lang="en-US" altLang="zh-CN" sz="1600">
+                <a:solidFill>
+                  <a:srgbClr val="000000"/>
+                </a:solidFill>
+                <a:latin typeface="Fira Code Medium" pitchFamily="1" charset="0"/>
+                <a:ea typeface="楷体" panose="02010609060101010101" pitchFamily="49" charset="-122"/>
+                <a:cs typeface="Fira Code Medium" pitchFamily="1" charset="0"/>
+              </a:rPr>
+              <a:t>    int i = 1;</a:t>
+            </a:r>
+          </a:p>
+          <a:p>
+            <a:pPr>
+              <a:lnSpc>
+                <a:spcPct val="150000"/>
+              </a:lnSpc>
+            </a:pPr>
+            <a:r>
+              <a:rPr kumimoji="0" lang="en-US" altLang="zh-CN" sz="1600" b="0" i="0" u="none" strike="noStrike" kern="1200" cap="none" spc="0" normalizeH="0" baseline="0" noProof="0">
+                <a:ln>
+                  <a:noFill/>
+                </a:ln>
+                <a:solidFill>
+                  <a:srgbClr val="000000"/>
+                </a:solidFill>
+                <a:effectLst/>
+                <a:uLnTx/>
+                <a:uFillTx/>
+                <a:latin typeface="Fira Code Medium" pitchFamily="1" charset="0"/>
+                <a:ea typeface="楷体" panose="02010609060101010101" pitchFamily="49" charset="-122"/>
+                <a:cs typeface="Fira Code Medium" pitchFamily="1" charset="0"/>
+              </a:rPr>
+              <a:t>    for (; i &lt;= n; ++i) </a:t>
+            </a:r>
+          </a:p>
+          <a:p>
+            <a:pPr>
+              <a:lnSpc>
+                <a:spcPct val="150000"/>
+              </a:lnSpc>
+            </a:pPr>
+            <a:r>
+              <a:rPr lang="en-US" altLang="zh-CN" sz="1600">
+                <a:solidFill>
+                  <a:srgbClr val="000000"/>
+                </a:solidFill>
+                <a:latin typeface="Fira Code Medium" pitchFamily="1" charset="0"/>
+                <a:ea typeface="楷体" panose="02010609060101010101" pitchFamily="49" charset="-122"/>
+                <a:cs typeface="Fira Code Medium" pitchFamily="1" charset="0"/>
+              </a:rPr>
+              <a:t>        </a:t>
+            </a:r>
+            <a:r>
+              <a:rPr kumimoji="0" lang="en-US" altLang="zh-CN" sz="1600" b="0" i="0" u="none" strike="noStrike" kern="1200" cap="none" spc="0" normalizeH="0" baseline="0" noProof="0">
+                <a:ln>
+                  <a:noFill/>
+                </a:ln>
+                <a:solidFill>
+                  <a:srgbClr val="000000"/>
+                </a:solidFill>
+                <a:effectLst/>
+                <a:uLnTx/>
+                <a:uFillTx/>
+                <a:latin typeface="Fira Code Medium" pitchFamily="1" charset="0"/>
+                <a:ea typeface="楷体" panose="02010609060101010101" pitchFamily="49" charset="-122"/>
+                <a:cs typeface="Fira Code Medium" pitchFamily="1" charset="0"/>
+              </a:rPr>
+              <a:t>solve(i);</a:t>
+            </a:r>
+          </a:p>
+          <a:p>
+            <a:pPr>
+              <a:lnSpc>
+                <a:spcPct val="150000"/>
+              </a:lnSpc>
+            </a:pPr>
+            <a:r>
+              <a:rPr lang="en-US" altLang="zh-CN" sz="1600">
+                <a:solidFill>
+                  <a:srgbClr val="000000"/>
+                </a:solidFill>
+                <a:latin typeface="Fira Code Medium" pitchFamily="1" charset="0"/>
+                <a:ea typeface="楷体" panose="02010609060101010101" pitchFamily="49" charset="-122"/>
+                <a:cs typeface="Fira Code Medium" pitchFamily="1" charset="0"/>
+              </a:rPr>
+              <a:t>    /* ... */</a:t>
+            </a:r>
+          </a:p>
+          <a:p>
+            <a:pPr>
+              <a:lnSpc>
+                <a:spcPct val="150000"/>
+              </a:lnSpc>
+            </a:pPr>
+            <a:r>
+              <a:rPr kumimoji="0" lang="en-US" altLang="zh-CN" sz="1600" b="0" i="0" u="none" strike="noStrike" kern="1200" cap="none" spc="0" normalizeH="0" baseline="0" noProof="0">
+                <a:ln>
+                  <a:noFill/>
+                </a:ln>
+                <a:solidFill>
+                  <a:srgbClr val="000000"/>
+                </a:solidFill>
+                <a:effectLst/>
+                <a:uLnTx/>
+                <a:uFillTx/>
+                <a:latin typeface="Fira Code Medium" pitchFamily="1" charset="0"/>
+                <a:ea typeface="楷体" panose="02010609060101010101" pitchFamily="49" charset="-122"/>
+                <a:cs typeface="Fira Code Medium" pitchFamily="1" charset="0"/>
+              </a:rPr>
+              <a:t>}</a:t>
+            </a:r>
+          </a:p>
+        </p:txBody>
+      </p:sp>
+      <p:grpSp>
+        <p:nvGrpSpPr>
+          <p:cNvPr id="43" name="组合 42">
+            <a:extLst>
+              <a:ext uri="{FF2B5EF4-FFF2-40B4-BE49-F238E27FC236}">
+                <a16:creationId xmlns:a16="http://schemas.microsoft.com/office/drawing/2014/main" id="{A688A684-40AD-0277-2FD5-8CF371190DEF}"/>
+              </a:ext>
+            </a:extLst>
+          </p:cNvPr>
+          <p:cNvGrpSpPr/>
+          <p:nvPr/>
+        </p:nvGrpSpPr>
+        <p:grpSpPr>
+          <a:xfrm>
+            <a:off x="6998331" y="1133617"/>
+            <a:ext cx="2887979" cy="780559"/>
+            <a:chOff x="861695" y="1092231"/>
+            <a:chExt cx="3214255" cy="841059"/>
+          </a:xfrm>
+        </p:grpSpPr>
+        <p:sp>
+          <p:nvSpPr>
+            <p:cNvPr id="44" name="矩形: 圆角 43">
+              <a:extLst>
+                <a:ext uri="{FF2B5EF4-FFF2-40B4-BE49-F238E27FC236}">
+                  <a16:creationId xmlns:a16="http://schemas.microsoft.com/office/drawing/2014/main" id="{AF670BFF-C662-A6DA-275D-DE79E56E2F93}"/>
+                </a:ext>
+              </a:extLst>
+            </p:cNvPr>
+            <p:cNvSpPr/>
+            <p:nvPr/>
+          </p:nvSpPr>
+          <p:spPr>
+            <a:xfrm>
+              <a:off x="861695" y="1126384"/>
+              <a:ext cx="3214255" cy="780559"/>
+            </a:xfrm>
+            <a:prstGeom prst="roundRect">
+              <a:avLst/>
+            </a:prstGeom>
+            <a:solidFill>
+              <a:srgbClr val="324273"/>
+            </a:solidFill>
+            <a:ln w="19050">
+              <a:solidFill>
+                <a:srgbClr val="324273"/>
+              </a:solidFill>
+            </a:ln>
+          </p:spPr>
+          <p:style>
+            <a:lnRef idx="2">
+              <a:schemeClr val="accent1">
+                <a:shade val="15000"/>
+              </a:schemeClr>
+            </a:lnRef>
+            <a:fillRef idx="1">
+              <a:schemeClr val="accent1"/>
+            </a:fillRef>
+            <a:effectRef idx="0">
+              <a:schemeClr val="accent1"/>
+            </a:effectRef>
+            <a:fontRef idx="minor">
+              <a:schemeClr val="lt1"/>
+            </a:fontRef>
+          </p:style>
+          <p:txBody>
+            <a:bodyPr rtlCol="0" anchor="ctr"/>
+            <a:lstStyle/>
+            <a:p>
+              <a:pPr algn="ctr"/>
+              <a:endParaRPr lang="zh-CN" altLang="en-US"/>
+            </a:p>
+          </p:txBody>
+        </p:sp>
+        <p:sp>
+          <p:nvSpPr>
+            <p:cNvPr id="45" name="文本框 44">
+              <a:extLst>
+                <a:ext uri="{FF2B5EF4-FFF2-40B4-BE49-F238E27FC236}">
+                  <a16:creationId xmlns:a16="http://schemas.microsoft.com/office/drawing/2014/main" id="{7BF88037-E8A5-7709-19A4-2856CE091994}"/>
+                </a:ext>
+              </a:extLst>
+            </p:cNvPr>
+            <p:cNvSpPr txBox="1"/>
+            <p:nvPr/>
+          </p:nvSpPr>
+          <p:spPr>
+            <a:xfrm>
+              <a:off x="1493654" y="1092231"/>
+              <a:ext cx="1950335" cy="841059"/>
+            </a:xfrm>
+            <a:prstGeom prst="rect">
+              <a:avLst/>
+            </a:prstGeom>
+            <a:noFill/>
+          </p:spPr>
+          <p:txBody>
+            <a:bodyPr wrap="square" rtlCol="0" anchor="ctr">
+              <a:spAutoFit/>
+            </a:bodyPr>
+            <a:lstStyle/>
+            <a:p>
+              <a:pPr algn="ctr"/>
+              <a:r>
+                <a:rPr lang="zh-CN" altLang="en-US" sz="2400">
+                  <a:solidFill>
+                    <a:schemeClr val="bg1"/>
+                  </a:solidFill>
+                  <a:latin typeface="华文中宋" panose="02010600040101010101" pitchFamily="2" charset="-122"/>
+                  <a:ea typeface="华文中宋" panose="02010600040101010101" pitchFamily="2" charset="-122"/>
+                </a:rPr>
+                <a:t>核心代码</a:t>
+              </a:r>
+            </a:p>
+          </p:txBody>
+        </p:sp>
+      </p:grpSp>
+      <p:sp>
+        <p:nvSpPr>
+          <p:cNvPr id="2" name="文本框 1">
+            <a:extLst>
+              <a:ext uri="{FF2B5EF4-FFF2-40B4-BE49-F238E27FC236}">
+                <a16:creationId xmlns:a16="http://schemas.microsoft.com/office/drawing/2014/main" id="{03B1D17A-2708-6398-1690-DF2CF7F9128A}"/>
+              </a:ext>
+            </a:extLst>
+          </p:cNvPr>
+          <p:cNvSpPr txBox="1"/>
+          <p:nvPr/>
+        </p:nvSpPr>
+        <p:spPr>
+          <a:xfrm>
+            <a:off x="9143972" y="2184132"/>
+            <a:ext cx="2079096" cy="3016210"/>
+          </a:xfrm>
+          <a:prstGeom prst="rect">
+            <a:avLst/>
+          </a:prstGeom>
+          <a:noFill/>
+        </p:spPr>
+        <p:txBody>
+          <a:bodyPr wrap="square" rtlCol="0">
+            <a:spAutoFit/>
+          </a:bodyPr>
+          <a:lstStyle/>
+          <a:p>
+            <a:pPr marL="0" marR="0" lvl="0" indent="0" defTabSz="914400" rtl="0" eaLnBrk="1" fontAlgn="auto" latinLnBrk="0" hangingPunct="1">
+              <a:lnSpc>
+                <a:spcPct val="150000"/>
+              </a:lnSpc>
+              <a:spcBef>
+                <a:spcPts val="0"/>
+              </a:spcBef>
+              <a:spcAft>
+                <a:spcPts val="0"/>
+              </a:spcAft>
+              <a:buClrTx/>
+              <a:buSzTx/>
+              <a:buFontTx/>
+              <a:buNone/>
+              <a:tabLst/>
+              <a:defRPr/>
+            </a:pPr>
+            <a:r>
+              <a:rPr kumimoji="0" lang="en-US" altLang="zh-CN" sz="1600" b="0" i="0" u="none" strike="noStrike" kern="1200" cap="none" spc="0" normalizeH="0" baseline="0" noProof="0">
+                <a:ln>
+                  <a:noFill/>
+                </a:ln>
+                <a:solidFill>
+                  <a:srgbClr val="000000"/>
+                </a:solidFill>
+                <a:effectLst/>
+                <a:uLnTx/>
+                <a:uFillTx/>
+                <a:latin typeface="Fira Code Medium" pitchFamily="1" charset="0"/>
+                <a:ea typeface="楷体" panose="02010609060101010101" pitchFamily="49" charset="-122"/>
+                <a:cs typeface="Fira Code Medium" pitchFamily="1" charset="0"/>
+              </a:rPr>
+              <a:t>// MST-1</a:t>
+            </a:r>
+          </a:p>
+          <a:p>
+            <a:pPr marL="0" marR="0" lvl="0" indent="0" algn="l" defTabSz="914400" rtl="0" eaLnBrk="1" fontAlgn="auto" latinLnBrk="0" hangingPunct="1">
+              <a:lnSpc>
+                <a:spcPct val="150000"/>
+              </a:lnSpc>
+              <a:spcBef>
+                <a:spcPts val="0"/>
+              </a:spcBef>
+              <a:spcAft>
+                <a:spcPts val="0"/>
+              </a:spcAft>
+              <a:buClrTx/>
+              <a:buSzTx/>
+              <a:buFontTx/>
+              <a:buNone/>
+              <a:tabLst/>
+              <a:defRPr/>
+            </a:pPr>
+            <a:r>
+              <a:rPr kumimoji="0" lang="en-US" altLang="zh-CN" sz="1600" b="0" i="0" u="none" strike="noStrike" kern="1200" cap="none" spc="0" normalizeH="0" baseline="0" noProof="0">
+                <a:ln>
+                  <a:noFill/>
+                </a:ln>
+                <a:solidFill>
+                  <a:srgbClr val="000000"/>
+                </a:solidFill>
+                <a:effectLst/>
+                <a:uLnTx/>
+                <a:uFillTx/>
+                <a:latin typeface="Fira Code Medium" pitchFamily="1" charset="0"/>
+                <a:ea typeface="楷体" panose="02010609060101010101" pitchFamily="49" charset="-122"/>
+                <a:cs typeface="Fira Code Medium" pitchFamily="1" charset="0"/>
+              </a:rPr>
+              <a:t>int main() {</a:t>
+            </a:r>
+          </a:p>
+          <a:p>
+            <a:pPr marL="0" marR="0" lvl="0" indent="0" algn="l" defTabSz="914400" rtl="0" eaLnBrk="1" fontAlgn="auto" latinLnBrk="0" hangingPunct="1">
+              <a:lnSpc>
+                <a:spcPct val="150000"/>
+              </a:lnSpc>
+              <a:spcBef>
+                <a:spcPts val="0"/>
+              </a:spcBef>
+              <a:spcAft>
+                <a:spcPts val="0"/>
+              </a:spcAft>
+              <a:buClrTx/>
+              <a:buSzTx/>
+              <a:buFontTx/>
+              <a:buNone/>
+              <a:tabLst/>
+              <a:defRPr/>
+            </a:pPr>
+            <a:r>
+              <a:rPr kumimoji="0" lang="en-US" altLang="zh-CN" sz="1600" b="0" i="0" u="none" strike="noStrike" kern="1200" cap="none" spc="0" normalizeH="0" baseline="0" noProof="0">
+                <a:ln>
+                  <a:noFill/>
+                </a:ln>
+                <a:solidFill>
+                  <a:srgbClr val="000000"/>
+                </a:solidFill>
+                <a:effectLst/>
+                <a:uLnTx/>
+                <a:uFillTx/>
+                <a:latin typeface="Fira Code Medium" pitchFamily="1" charset="0"/>
+                <a:ea typeface="楷体" panose="02010609060101010101" pitchFamily="49" charset="-122"/>
+                <a:cs typeface="Fira Code Medium" pitchFamily="1" charset="0"/>
+              </a:rPr>
+              <a:t>    /* ... */</a:t>
+            </a:r>
+          </a:p>
+          <a:p>
+            <a:pPr marL="0" marR="0" lvl="0" indent="0" algn="l" defTabSz="914400" rtl="0" eaLnBrk="1" fontAlgn="auto" latinLnBrk="0" hangingPunct="1">
+              <a:lnSpc>
+                <a:spcPct val="150000"/>
+              </a:lnSpc>
+              <a:spcBef>
+                <a:spcPts val="0"/>
+              </a:spcBef>
+              <a:spcAft>
+                <a:spcPts val="0"/>
+              </a:spcAft>
+              <a:buClrTx/>
+              <a:buSzTx/>
+              <a:buFontTx/>
+              <a:buNone/>
+              <a:tabLst/>
+              <a:defRPr/>
+            </a:pPr>
+            <a:endParaRPr kumimoji="0" lang="en-US" altLang="zh-CN" sz="1600" b="0" i="0" u="none" strike="noStrike" kern="1200" cap="none" spc="0" normalizeH="0" baseline="0" noProof="0">
+              <a:ln>
+                <a:noFill/>
+              </a:ln>
+              <a:solidFill>
+                <a:srgbClr val="000000"/>
+              </a:solidFill>
+              <a:effectLst/>
+              <a:uLnTx/>
+              <a:uFillTx/>
+              <a:latin typeface="Fira Code Medium" pitchFamily="1" charset="0"/>
+              <a:ea typeface="楷体" panose="02010609060101010101" pitchFamily="49" charset="-122"/>
+              <a:cs typeface="Fira Code Medium" pitchFamily="1" charset="0"/>
+            </a:endParaRPr>
+          </a:p>
+          <a:p>
+            <a:pPr marL="0" marR="0" lvl="0" indent="0" algn="l" defTabSz="914400" rtl="0" eaLnBrk="1" fontAlgn="auto" latinLnBrk="0" hangingPunct="1">
+              <a:lnSpc>
+                <a:spcPct val="150000"/>
+              </a:lnSpc>
+              <a:spcBef>
+                <a:spcPts val="0"/>
+              </a:spcBef>
+              <a:spcAft>
+                <a:spcPts val="0"/>
+              </a:spcAft>
+              <a:buClrTx/>
+              <a:buSzTx/>
+              <a:buFontTx/>
+              <a:buNone/>
+              <a:tabLst/>
+              <a:defRPr/>
+            </a:pPr>
+            <a:r>
+              <a:rPr kumimoji="0" lang="en-US" altLang="zh-CN" sz="1600" b="0" i="0" u="none" strike="noStrike" kern="1200" cap="none" spc="0" normalizeH="0" baseline="0" noProof="0">
+                <a:ln>
+                  <a:noFill/>
+                </a:ln>
+                <a:solidFill>
+                  <a:srgbClr val="000000"/>
+                </a:solidFill>
+                <a:effectLst/>
+                <a:uLnTx/>
+                <a:uFillTx/>
+                <a:latin typeface="Fira Code Medium" pitchFamily="1" charset="0"/>
+                <a:ea typeface="楷体" panose="02010609060101010101" pitchFamily="49" charset="-122"/>
+                <a:cs typeface="Fira Code Medium" pitchFamily="1" charset="0"/>
+              </a:rPr>
+              <a:t>    solve(1);</a:t>
+            </a:r>
+          </a:p>
+          <a:p>
+            <a:pPr marL="0" marR="0" lvl="0" indent="0" algn="l" defTabSz="914400" rtl="0" eaLnBrk="1" fontAlgn="auto" latinLnBrk="0" hangingPunct="1">
+              <a:lnSpc>
+                <a:spcPct val="150000"/>
+              </a:lnSpc>
+              <a:spcBef>
+                <a:spcPts val="0"/>
+              </a:spcBef>
+              <a:spcAft>
+                <a:spcPts val="0"/>
+              </a:spcAft>
+              <a:buClrTx/>
+              <a:buSzTx/>
+              <a:buFontTx/>
+              <a:buNone/>
+              <a:tabLst/>
+              <a:defRPr/>
+            </a:pPr>
+            <a:endParaRPr kumimoji="0" lang="en-US" altLang="zh-CN" sz="1600" b="0" i="0" u="none" strike="noStrike" kern="1200" cap="none" spc="0" normalizeH="0" baseline="0" noProof="0">
+              <a:ln>
+                <a:noFill/>
+              </a:ln>
+              <a:solidFill>
+                <a:srgbClr val="000000"/>
+              </a:solidFill>
+              <a:effectLst/>
+              <a:uLnTx/>
+              <a:uFillTx/>
+              <a:latin typeface="Fira Code Medium" pitchFamily="1" charset="0"/>
+              <a:ea typeface="楷体" panose="02010609060101010101" pitchFamily="49" charset="-122"/>
+              <a:cs typeface="Fira Code Medium" pitchFamily="1" charset="0"/>
+            </a:endParaRPr>
+          </a:p>
+          <a:p>
+            <a:pPr marL="0" marR="0" lvl="0" indent="0" algn="l" defTabSz="914400" rtl="0" eaLnBrk="1" fontAlgn="auto" latinLnBrk="0" hangingPunct="1">
+              <a:lnSpc>
+                <a:spcPct val="150000"/>
+              </a:lnSpc>
+              <a:spcBef>
+                <a:spcPts val="0"/>
+              </a:spcBef>
+              <a:spcAft>
+                <a:spcPts val="0"/>
+              </a:spcAft>
+              <a:buClrTx/>
+              <a:buSzTx/>
+              <a:buFontTx/>
+              <a:buNone/>
+              <a:tabLst/>
+              <a:defRPr/>
+            </a:pPr>
+            <a:r>
+              <a:rPr kumimoji="0" lang="en-US" altLang="zh-CN" sz="1600" b="0" i="0" u="none" strike="noStrike" kern="1200" cap="none" spc="0" normalizeH="0" baseline="0" noProof="0">
+                <a:ln>
+                  <a:noFill/>
+                </a:ln>
+                <a:solidFill>
+                  <a:srgbClr val="000000"/>
+                </a:solidFill>
+                <a:effectLst/>
+                <a:uLnTx/>
+                <a:uFillTx/>
+                <a:latin typeface="Fira Code Medium" pitchFamily="1" charset="0"/>
+                <a:ea typeface="楷体" panose="02010609060101010101" pitchFamily="49" charset="-122"/>
+                <a:cs typeface="Fira Code Medium" pitchFamily="1" charset="0"/>
+              </a:rPr>
+              <a:t>    /* ... */</a:t>
+            </a:r>
+          </a:p>
+          <a:p>
+            <a:pPr marL="0" marR="0" lvl="0" indent="0" algn="l" defTabSz="914400" rtl="0" eaLnBrk="1" fontAlgn="auto" latinLnBrk="0" hangingPunct="1">
+              <a:lnSpc>
+                <a:spcPct val="150000"/>
+              </a:lnSpc>
+              <a:spcBef>
+                <a:spcPts val="0"/>
+              </a:spcBef>
+              <a:spcAft>
+                <a:spcPts val="0"/>
+              </a:spcAft>
+              <a:buClrTx/>
+              <a:buSzTx/>
+              <a:buFontTx/>
+              <a:buNone/>
+              <a:tabLst/>
+              <a:defRPr/>
+            </a:pPr>
+            <a:r>
+              <a:rPr kumimoji="0" lang="en-US" altLang="zh-CN" sz="1600" b="0" i="0" u="none" strike="noStrike" kern="1200" cap="none" spc="0" normalizeH="0" baseline="0" noProof="0">
+                <a:ln>
+                  <a:noFill/>
+                </a:ln>
+                <a:solidFill>
+                  <a:srgbClr val="000000"/>
+                </a:solidFill>
+                <a:effectLst/>
+                <a:uLnTx/>
+                <a:uFillTx/>
+                <a:latin typeface="Fira Code Medium" pitchFamily="1" charset="0"/>
+                <a:ea typeface="楷体" panose="02010609060101010101" pitchFamily="49" charset="-122"/>
+                <a:cs typeface="Fira Code Medium" pitchFamily="1" charset="0"/>
+              </a:rPr>
+              <a:t>}</a:t>
+            </a:r>
+          </a:p>
+        </p:txBody>
+      </p:sp>
+    </p:spTree>
+    <p:extLst>
+      <p:ext uri="{BB962C8B-B14F-4D97-AF65-F5344CB8AC3E}">
+        <p14:creationId xmlns:p14="http://schemas.microsoft.com/office/powerpoint/2010/main" val="2314621313"/>
+      </p:ext>
+    </p:extLst>
+  </p:cSld>
+  <p:clrMapOvr>
+    <a:masterClrMapping/>
+  </p:clrMapOvr>
+  <mc:AlternateContent xmlns:mc="http://schemas.openxmlformats.org/markup-compatibility/2006" xmlns:p159="http://schemas.microsoft.com/office/powerpoint/2015/09/main">
+    <mc:Choice Requires="p159">
+      <p:transition xmlns:p14="http://schemas.microsoft.com/office/powerpoint/2010/main" spd="slow" p14:dur="2000">
+        <p159:morph option="byObject"/>
+      </p:transition>
+    </mc:Choice>
+    <mc:Fallback xmlns="">
+      <p:transition spd="slow">
+        <p:fade/>
+      </p:transition>
+    </mc:Fallback>
+  </mc:AlternateContent>
+</p:sld>
+</file>
+
+<file path=ppt/slides/slide22.xml><?xml version="1.0" encoding="utf-8"?>
 <p:sld xmlns:a="http://schemas.openxmlformats.org/drawingml/2006/main" xmlns:r="http://schemas.openxmlformats.org/officeDocument/2006/relationships" xmlns:p="http://schemas.openxmlformats.org/presentationml/2006/main">
   <p:cSld>
     <p:spTree>
@@ -16397,13 +17624,13 @@
   <p:clrMapOvr>
     <a:masterClrMapping/>
   </p:clrMapOvr>
-  <mc:AlternateContent xmlns:mc="http://schemas.openxmlformats.org/markup-compatibility/2006">
-    <mc:Choice xmlns:p159="http://schemas.microsoft.com/office/powerpoint/2015/09/main" Requires="p159">
+  <mc:AlternateContent xmlns:mc="http://schemas.openxmlformats.org/markup-compatibility/2006" xmlns:p159="http://schemas.microsoft.com/office/powerpoint/2015/09/main">
+    <mc:Choice Requires="p159">
       <p:transition xmlns:p14="http://schemas.microsoft.com/office/powerpoint/2010/main" spd="slow" p14:dur="2000">
         <p159:morph option="byObject"/>
       </p:transition>
     </mc:Choice>
-    <mc:Fallback>
+    <mc:Fallback xmlns="">
       <p:transition spd="slow">
         <p:fade/>
       </p:transition>
@@ -16412,7 +17639,7 @@
 </p:sld>
 </file>
 
-<file path=ppt/slides/slide22.xml><?xml version="1.0" encoding="utf-8"?>
+<file path=ppt/slides/slide23.xml><?xml version="1.0" encoding="utf-8"?>
 <p:sld xmlns:a="http://schemas.openxmlformats.org/drawingml/2006/main" xmlns:r="http://schemas.openxmlformats.org/officeDocument/2006/relationships" xmlns:p="http://schemas.openxmlformats.org/presentationml/2006/main">
   <p:cSld>
     <p:spTree>
@@ -17018,13 +18245,13 @@
   <p:clrMapOvr>
     <a:masterClrMapping/>
   </p:clrMapOvr>
-  <mc:AlternateContent xmlns:mc="http://schemas.openxmlformats.org/markup-compatibility/2006">
-    <mc:Choice xmlns:p159="http://schemas.microsoft.com/office/powerpoint/2015/09/main" Requires="p159">
+  <mc:AlternateContent xmlns:mc="http://schemas.openxmlformats.org/markup-compatibility/2006" xmlns:p159="http://schemas.microsoft.com/office/powerpoint/2015/09/main">
+    <mc:Choice Requires="p159">
       <p:transition xmlns:p14="http://schemas.microsoft.com/office/powerpoint/2010/main" spd="slow" p14:dur="2000">
         <p159:morph option="byObject"/>
       </p:transition>
     </mc:Choice>
-    <mc:Fallback>
+    <mc:Fallback xmlns="">
       <p:transition spd="slow">
         <p:fade/>
       </p:transition>
@@ -17033,7 +18260,7 @@
 </p:sld>
 </file>
 
-<file path=ppt/slides/slide23.xml><?xml version="1.0" encoding="utf-8"?>
+<file path=ppt/slides/slide24.xml><?xml version="1.0" encoding="utf-8"?>
 <p:sld xmlns:a="http://schemas.openxmlformats.org/drawingml/2006/main" xmlns:r="http://schemas.openxmlformats.org/officeDocument/2006/relationships" xmlns:p="http://schemas.openxmlformats.org/presentationml/2006/main">
   <p:cSld>
     <p:spTree>
@@ -17677,13 +18904,13 @@
   <p:clrMapOvr>
     <a:masterClrMapping/>
   </p:clrMapOvr>
-  <mc:AlternateContent xmlns:mc="http://schemas.openxmlformats.org/markup-compatibility/2006">
-    <mc:Choice xmlns:p159="http://schemas.microsoft.com/office/powerpoint/2015/09/main" Requires="p159">
+  <mc:AlternateContent xmlns:mc="http://schemas.openxmlformats.org/markup-compatibility/2006" xmlns:p159="http://schemas.microsoft.com/office/powerpoint/2015/09/main">
+    <mc:Choice Requires="p159">
       <p:transition xmlns:p14="http://schemas.microsoft.com/office/powerpoint/2010/main" spd="slow" p14:dur="2000">
         <p159:morph option="byObject"/>
       </p:transition>
     </mc:Choice>
-    <mc:Fallback>
+    <mc:Fallback xmlns="">
       <p:transition spd="slow">
         <p:fade/>
       </p:transition>
@@ -17692,7 +18919,7 @@
 </p:sld>
 </file>
 
-<file path=ppt/slides/slide24.xml><?xml version="1.0" encoding="utf-8"?>
+<file path=ppt/slides/slide25.xml><?xml version="1.0" encoding="utf-8"?>
 <p:sld xmlns:a="http://schemas.openxmlformats.org/drawingml/2006/main" xmlns:r="http://schemas.openxmlformats.org/officeDocument/2006/relationships" xmlns:p="http://schemas.openxmlformats.org/presentationml/2006/main">
   <p:cSld>
     <p:spTree>
@@ -18188,13 +19415,13 @@
   <p:clrMapOvr>
     <a:masterClrMapping/>
   </p:clrMapOvr>
-  <mc:AlternateContent xmlns:mc="http://schemas.openxmlformats.org/markup-compatibility/2006">
-    <mc:Choice xmlns:p159="http://schemas.microsoft.com/office/powerpoint/2015/09/main" Requires="p159">
+  <mc:AlternateContent xmlns:mc="http://schemas.openxmlformats.org/markup-compatibility/2006" xmlns:p159="http://schemas.microsoft.com/office/powerpoint/2015/09/main">
+    <mc:Choice Requires="p159">
       <p:transition xmlns:p14="http://schemas.microsoft.com/office/powerpoint/2010/main" spd="slow" p14:dur="2000">
         <p159:morph option="byObject"/>
       </p:transition>
     </mc:Choice>
-    <mc:Fallback>
+    <mc:Fallback xmlns="">
       <p:transition spd="slow">
         <p:fade/>
       </p:transition>
@@ -18203,7 +19430,7 @@
 </p:sld>
 </file>
 
-<file path=ppt/slides/slide25.xml><?xml version="1.0" encoding="utf-8"?>
+<file path=ppt/slides/slide26.xml><?xml version="1.0" encoding="utf-8"?>
 <p:sld xmlns:a="http://schemas.openxmlformats.org/drawingml/2006/main" xmlns:r="http://schemas.openxmlformats.org/officeDocument/2006/relationships" xmlns:p="http://schemas.openxmlformats.org/presentationml/2006/main">
   <p:cSld>
     <p:spTree>
@@ -18863,13 +20090,13 @@
   <p:clrMapOvr>
     <a:masterClrMapping/>
   </p:clrMapOvr>
-  <mc:AlternateContent xmlns:mc="http://schemas.openxmlformats.org/markup-compatibility/2006">
-    <mc:Choice xmlns:p159="http://schemas.microsoft.com/office/powerpoint/2015/09/main" Requires="p159">
+  <mc:AlternateContent xmlns:mc="http://schemas.openxmlformats.org/markup-compatibility/2006" xmlns:p159="http://schemas.microsoft.com/office/powerpoint/2015/09/main">
+    <mc:Choice Requires="p159">
       <p:transition xmlns:p14="http://schemas.microsoft.com/office/powerpoint/2010/main" spd="slow" p14:dur="2000">
         <p159:morph option="byObject"/>
       </p:transition>
     </mc:Choice>
-    <mc:Fallback>
+    <mc:Fallback xmlns="">
       <p:transition spd="slow">
         <p:fade/>
       </p:transition>
@@ -18878,7 +20105,7 @@
 </p:sld>
 </file>
 
-<file path=ppt/slides/slide26.xml><?xml version="1.0" encoding="utf-8"?>
+<file path=ppt/slides/slide27.xml><?xml version="1.0" encoding="utf-8"?>
 <p:sld xmlns:a="http://schemas.openxmlformats.org/drawingml/2006/main" xmlns:r="http://schemas.openxmlformats.org/officeDocument/2006/relationships" xmlns:p="http://schemas.openxmlformats.org/presentationml/2006/main">
   <p:cSld>
     <p:spTree>
@@ -23736,13 +24963,13 @@
   <p:clrMapOvr>
     <a:masterClrMapping/>
   </p:clrMapOvr>
-  <mc:AlternateContent xmlns:mc="http://schemas.openxmlformats.org/markup-compatibility/2006">
-    <mc:Choice xmlns:p159="http://schemas.microsoft.com/office/powerpoint/2015/09/main" Requires="p159">
+  <mc:AlternateContent xmlns:mc="http://schemas.openxmlformats.org/markup-compatibility/2006" xmlns:p159="http://schemas.microsoft.com/office/powerpoint/2015/09/main">
+    <mc:Choice Requires="p159">
       <p:transition xmlns:p14="http://schemas.microsoft.com/office/powerpoint/2010/main" spd="slow" p14:dur="2000">
         <p159:morph option="byObject"/>
       </p:transition>
     </mc:Choice>
-    <mc:Fallback>
+    <mc:Fallback xmlns="">
       <p:transition spd="slow">
         <p:fade/>
       </p:transition>
@@ -23751,7 +24978,7 @@
 </p:sld>
 </file>
 
-<file path=ppt/slides/slide27.xml><?xml version="1.0" encoding="utf-8"?>
+<file path=ppt/slides/slide28.xml><?xml version="1.0" encoding="utf-8"?>
 <p:sld xmlns:a="http://schemas.openxmlformats.org/drawingml/2006/main" xmlns:r="http://schemas.openxmlformats.org/officeDocument/2006/relationships" xmlns:p="http://schemas.openxmlformats.org/presentationml/2006/main">
   <p:cSld>
     <p:spTree>
@@ -34014,13 +35241,13 @@
   <p:clrMapOvr>
     <a:masterClrMapping/>
   </p:clrMapOvr>
-  <mc:AlternateContent xmlns:mc="http://schemas.openxmlformats.org/markup-compatibility/2006">
-    <mc:Choice xmlns:p159="http://schemas.microsoft.com/office/powerpoint/2015/09/main" Requires="p159">
+  <mc:AlternateContent xmlns:mc="http://schemas.openxmlformats.org/markup-compatibility/2006" xmlns:p159="http://schemas.microsoft.com/office/powerpoint/2015/09/main">
+    <mc:Choice Requires="p159">
       <p:transition xmlns:p14="http://schemas.microsoft.com/office/powerpoint/2010/main" spd="slow" p14:dur="2000">
         <p159:morph option="byObject"/>
       </p:transition>
     </mc:Choice>
-    <mc:Fallback>
+    <mc:Fallback xmlns="">
       <p:transition spd="slow">
         <p:fade/>
       </p:transition>
@@ -34029,7 +35256,1335 @@
 </p:sld>
 </file>
 
-<file path=ppt/slides/slide28.xml><?xml version="1.0" encoding="utf-8"?>
+<file path=ppt/slides/slide29.xml><?xml version="1.0" encoding="utf-8"?>
+<p:sld xmlns:a="http://schemas.openxmlformats.org/drawingml/2006/main" xmlns:r="http://schemas.openxmlformats.org/officeDocument/2006/relationships" xmlns:p="http://schemas.openxmlformats.org/presentationml/2006/main">
+  <p:cSld>
+    <p:spTree>
+      <p:nvGrpSpPr>
+        <p:cNvPr id="1" name="">
+          <a:extLst>
+            <a:ext uri="{FF2B5EF4-FFF2-40B4-BE49-F238E27FC236}">
+              <a16:creationId xmlns:a16="http://schemas.microsoft.com/office/drawing/2014/main" id="{4E35A49B-87F3-62A7-9097-8CC370377820}"/>
+            </a:ext>
+          </a:extLst>
+        </p:cNvPr>
+        <p:cNvGrpSpPr/>
+        <p:nvPr/>
+      </p:nvGrpSpPr>
+      <p:grpSpPr>
+        <a:xfrm>
+          <a:off x="0" y="0"/>
+          <a:ext cx="0" cy="0"/>
+          <a:chOff x="0" y="0"/>
+          <a:chExt cx="0" cy="0"/>
+        </a:xfrm>
+      </p:grpSpPr>
+      <p:grpSp>
+        <p:nvGrpSpPr>
+          <p:cNvPr id="2" name="组合 1">
+            <a:extLst>
+              <a:ext uri="{FF2B5EF4-FFF2-40B4-BE49-F238E27FC236}">
+                <a16:creationId xmlns:a16="http://schemas.microsoft.com/office/drawing/2014/main" id="{3D0E99BB-138C-C375-CCD8-2CB71FA14E5B}"/>
+              </a:ext>
+            </a:extLst>
+          </p:cNvPr>
+          <p:cNvGrpSpPr/>
+          <p:nvPr/>
+        </p:nvGrpSpPr>
+        <p:grpSpPr>
+          <a:xfrm>
+            <a:off x="-12700" y="-13335"/>
+            <a:ext cx="5365991" cy="874395"/>
+            <a:chOff x="-12700" y="-13335"/>
+            <a:chExt cx="5365991" cy="874395"/>
+          </a:xfrm>
+        </p:grpSpPr>
+        <p:sp>
+          <p:nvSpPr>
+            <p:cNvPr id="6" name="矩形 5">
+              <a:extLst>
+                <a:ext uri="{FF2B5EF4-FFF2-40B4-BE49-F238E27FC236}">
+                  <a16:creationId xmlns:a16="http://schemas.microsoft.com/office/drawing/2014/main" id="{031D0368-1B88-1E92-D892-04F2BECAF426}"/>
+                </a:ext>
+              </a:extLst>
+            </p:cNvPr>
+            <p:cNvSpPr/>
+            <p:nvPr/>
+          </p:nvSpPr>
+          <p:spPr>
+            <a:xfrm>
+              <a:off x="-12700" y="784860"/>
+              <a:ext cx="5365991" cy="46137"/>
+            </a:xfrm>
+            <a:prstGeom prst="rect">
+              <a:avLst/>
+            </a:prstGeom>
+            <a:solidFill>
+              <a:schemeClr val="tx2">
+                <a:lumMod val="75000"/>
+                <a:lumOff val="25000"/>
+              </a:schemeClr>
+            </a:solidFill>
+            <a:ln>
+              <a:solidFill>
+                <a:schemeClr val="bg1"/>
+              </a:solidFill>
+            </a:ln>
+          </p:spPr>
+          <p:style>
+            <a:lnRef idx="2">
+              <a:schemeClr val="accent1">
+                <a:shade val="50000"/>
+              </a:schemeClr>
+            </a:lnRef>
+            <a:fillRef idx="1">
+              <a:schemeClr val="accent1"/>
+            </a:fillRef>
+            <a:effectRef idx="0">
+              <a:schemeClr val="accent1"/>
+            </a:effectRef>
+            <a:fontRef idx="minor">
+              <a:schemeClr val="lt1"/>
+            </a:fontRef>
+          </p:style>
+          <p:txBody>
+            <a:bodyPr rtlCol="0" anchor="ctr"/>
+            <a:lstStyle/>
+            <a:p>
+              <a:pPr algn="ctr"/>
+              <a:endParaRPr lang="zh-CN" altLang="en-US"/>
+            </a:p>
+          </p:txBody>
+        </p:sp>
+        <p:sp>
+          <p:nvSpPr>
+            <p:cNvPr id="8" name="矩形 7">
+              <a:extLst>
+                <a:ext uri="{FF2B5EF4-FFF2-40B4-BE49-F238E27FC236}">
+                  <a16:creationId xmlns:a16="http://schemas.microsoft.com/office/drawing/2014/main" id="{0470077D-0AD5-6EB1-C2F5-B70D8B29C443}"/>
+                </a:ext>
+              </a:extLst>
+            </p:cNvPr>
+            <p:cNvSpPr/>
+            <p:nvPr/>
+          </p:nvSpPr>
+          <p:spPr>
+            <a:xfrm>
+              <a:off x="-12700" y="-13335"/>
+              <a:ext cx="874395" cy="874395"/>
+            </a:xfrm>
+            <a:prstGeom prst="rect">
+              <a:avLst/>
+            </a:prstGeom>
+            <a:solidFill>
+              <a:schemeClr val="tx2">
+                <a:lumMod val="75000"/>
+                <a:lumOff val="25000"/>
+              </a:schemeClr>
+            </a:solidFill>
+            <a:ln>
+              <a:solidFill>
+                <a:schemeClr val="bg1"/>
+              </a:solidFill>
+            </a:ln>
+          </p:spPr>
+          <p:style>
+            <a:lnRef idx="2">
+              <a:schemeClr val="accent1">
+                <a:shade val="50000"/>
+              </a:schemeClr>
+            </a:lnRef>
+            <a:fillRef idx="1">
+              <a:schemeClr val="accent1"/>
+            </a:fillRef>
+            <a:effectRef idx="0">
+              <a:schemeClr val="accent1"/>
+            </a:effectRef>
+            <a:fontRef idx="minor">
+              <a:schemeClr val="lt1"/>
+            </a:fontRef>
+          </p:style>
+          <p:txBody>
+            <a:bodyPr rtlCol="0" anchor="ctr"/>
+            <a:lstStyle/>
+            <a:p>
+              <a:pPr algn="ctr"/>
+              <a:r>
+                <a:rPr lang="en-US" altLang="zh-CN" sz="4800">
+                  <a:latin typeface="微软雅黑" panose="020B0503020204020204" pitchFamily="34" charset="-122"/>
+                  <a:ea typeface="微软雅黑" panose="020B0503020204020204" pitchFamily="34" charset="-122"/>
+                </a:rPr>
+                <a:t>4</a:t>
+              </a:r>
+            </a:p>
+          </p:txBody>
+        </p:sp>
+        <p:sp>
+          <p:nvSpPr>
+            <p:cNvPr id="10" name="文本框 9">
+              <a:extLst>
+                <a:ext uri="{FF2B5EF4-FFF2-40B4-BE49-F238E27FC236}">
+                  <a16:creationId xmlns:a16="http://schemas.microsoft.com/office/drawing/2014/main" id="{E41A5881-1D5D-4E58-C02D-5CACBF91B870}"/>
+                </a:ext>
+              </a:extLst>
+            </p:cNvPr>
+            <p:cNvSpPr txBox="1"/>
+            <p:nvPr/>
+          </p:nvSpPr>
+          <p:spPr>
+            <a:xfrm>
+              <a:off x="861695" y="0"/>
+              <a:ext cx="4491596" cy="830997"/>
+            </a:xfrm>
+            <a:prstGeom prst="rect">
+              <a:avLst/>
+            </a:prstGeom>
+            <a:noFill/>
+          </p:spPr>
+          <p:txBody>
+            <a:bodyPr wrap="square" rtlCol="0">
+              <a:spAutoFit/>
+            </a:bodyPr>
+            <a:lstStyle/>
+            <a:p>
+              <a:pPr algn="ctr"/>
+              <a:r>
+                <a:rPr lang="zh-CN" altLang="en-US" sz="4800" b="1">
+                  <a:solidFill>
+                    <a:schemeClr val="tx2">
+                      <a:lumMod val="75000"/>
+                      <a:lumOff val="25000"/>
+                    </a:schemeClr>
+                  </a:solidFill>
+                  <a:latin typeface="华文中宋" panose="02010600040101010101" pitchFamily="2" charset="-122"/>
+                  <a:ea typeface="华文中宋" panose="02010600040101010101" pitchFamily="2" charset="-122"/>
+                </a:rPr>
+                <a:t>实验结果与结论</a:t>
+              </a:r>
+            </a:p>
+          </p:txBody>
+        </p:sp>
+      </p:grpSp>
+      <p:sp>
+        <p:nvSpPr>
+          <p:cNvPr id="26" name="文本框 25">
+            <a:extLst>
+              <a:ext uri="{FF2B5EF4-FFF2-40B4-BE49-F238E27FC236}">
+                <a16:creationId xmlns:a16="http://schemas.microsoft.com/office/drawing/2014/main" id="{16C5F0C9-D14C-BE04-052E-18739D4E64FC}"/>
+              </a:ext>
+            </a:extLst>
+          </p:cNvPr>
+          <p:cNvSpPr txBox="1"/>
+          <p:nvPr/>
+        </p:nvSpPr>
+        <p:spPr>
+          <a:xfrm>
+            <a:off x="1355467" y="1751136"/>
+            <a:ext cx="9481066" cy="3355727"/>
+          </a:xfrm>
+          <a:prstGeom prst="rect">
+            <a:avLst/>
+          </a:prstGeom>
+          <a:noFill/>
+        </p:spPr>
+        <p:txBody>
+          <a:bodyPr wrap="square" rtlCol="0">
+            <a:spAutoFit/>
+          </a:bodyPr>
+          <a:lstStyle>
+            <a:defPPr>
+              <a:defRPr lang="zh-CN"/>
+            </a:defPPr>
+            <a:lvl1pPr algn="ctr">
+              <a:defRPr>
+                <a:solidFill>
+                  <a:srgbClr val="324273"/>
+                </a:solidFill>
+                <a:latin typeface="Consolas" panose="020B0609020204030204" pitchFamily="49" charset="0"/>
+                <a:ea typeface="华文中宋" panose="02010600040101010101" pitchFamily="2" charset="-122"/>
+              </a:defRPr>
+            </a:lvl1pPr>
+          </a:lstStyle>
+          <a:p>
+            <a:pPr indent="457200" algn="just">
+              <a:lnSpc>
+                <a:spcPct val="150000"/>
+              </a:lnSpc>
+            </a:pPr>
+            <a:r>
+              <a:rPr lang="zh-CN" altLang="en-US" sz="2400"/>
+              <a:t>经过查阅资料，我们发现：</a:t>
+            </a:r>
+            <a:endParaRPr lang="en-US" altLang="zh-CN" sz="2400"/>
+          </a:p>
+          <a:p>
+            <a:pPr indent="457200" algn="just">
+              <a:lnSpc>
+                <a:spcPct val="150000"/>
+              </a:lnSpc>
+            </a:pPr>
+            <a:r>
+              <a:rPr lang="zh-CN" altLang="en-US" sz="2400"/>
+              <a:t>在数学上，基础贪心算法的近似比是无界的，可能产生任意差的解，而</a:t>
+            </a:r>
+            <a:r>
+              <a:rPr lang="en-US" altLang="zh-CN" sz="2400"/>
+              <a:t>MST</a:t>
+            </a:r>
+            <a:r>
+              <a:rPr lang="zh-CN" altLang="en-US" sz="2400"/>
+              <a:t>算法的近似比在完全图中保证小于等于</a:t>
+            </a:r>
+            <a:r>
+              <a:rPr lang="en-US" altLang="zh-CN" sz="2400"/>
+              <a:t>2</a:t>
+            </a:r>
+            <a:r>
+              <a:rPr lang="zh-CN" altLang="en-US" sz="2400"/>
+              <a:t>；</a:t>
+            </a:r>
+            <a:endParaRPr lang="en-US" altLang="zh-CN" sz="2400"/>
+          </a:p>
+          <a:p>
+            <a:pPr indent="457200" algn="just">
+              <a:lnSpc>
+                <a:spcPct val="150000"/>
+              </a:lnSpc>
+            </a:pPr>
+            <a:r>
+              <a:rPr lang="zh-CN" altLang="en-US" sz="2400"/>
+              <a:t>在思想上，基础贪心算法局限于局部最优选择，而</a:t>
+            </a:r>
+            <a:r>
+              <a:rPr lang="en-US" altLang="zh-CN" sz="2400"/>
+              <a:t>MST</a:t>
+            </a:r>
+            <a:r>
+              <a:rPr lang="zh-CN" altLang="en-US" sz="2400"/>
+              <a:t>利用全局结构优化；</a:t>
+            </a:r>
+            <a:endParaRPr lang="en-US" altLang="zh-CN" sz="2400"/>
+          </a:p>
+          <a:p>
+            <a:pPr indent="457200" algn="just">
+              <a:lnSpc>
+                <a:spcPct val="150000"/>
+              </a:lnSpc>
+            </a:pPr>
+            <a:r>
+              <a:rPr lang="zh-CN" altLang="en-US" sz="2400"/>
+              <a:t>总结：</a:t>
+            </a:r>
+            <a:r>
+              <a:rPr lang="en-US" altLang="zh-CN" sz="2400"/>
+              <a:t>MST</a:t>
+            </a:r>
+            <a:r>
+              <a:rPr lang="zh-CN" altLang="en-US" sz="2400"/>
+              <a:t>算法的近似比始终优于基础贪心算法。</a:t>
+            </a:r>
+          </a:p>
+        </p:txBody>
+      </p:sp>
+    </p:spTree>
+    <p:custDataLst>
+      <p:tags r:id="rId1"/>
+    </p:custDataLst>
+    <p:extLst>
+      <p:ext uri="{BB962C8B-B14F-4D97-AF65-F5344CB8AC3E}">
+        <p14:creationId xmlns:p14="http://schemas.microsoft.com/office/powerpoint/2010/main" val="3945450609"/>
+      </p:ext>
+    </p:extLst>
+  </p:cSld>
+  <p:clrMapOvr>
+    <a:masterClrMapping/>
+  </p:clrMapOvr>
+  <mc:AlternateContent xmlns:mc="http://schemas.openxmlformats.org/markup-compatibility/2006" xmlns:p159="http://schemas.microsoft.com/office/powerpoint/2015/09/main">
+    <mc:Choice Requires="p159">
+      <p:transition xmlns:p14="http://schemas.microsoft.com/office/powerpoint/2010/main" spd="slow" p14:dur="2000">
+        <p159:morph option="byObject"/>
+      </p:transition>
+    </mc:Choice>
+    <mc:Fallback xmlns="">
+      <p:transition spd="slow">
+        <p:fade/>
+      </p:transition>
+    </mc:Fallback>
+  </mc:AlternateContent>
+</p:sld>
+</file>
+
+<file path=ppt/slides/slide3.xml><?xml version="1.0" encoding="utf-8"?>
+<p:sld xmlns:a="http://schemas.openxmlformats.org/drawingml/2006/main" xmlns:r="http://schemas.openxmlformats.org/officeDocument/2006/relationships" xmlns:p="http://schemas.openxmlformats.org/presentationml/2006/main">
+  <p:cSld>
+    <p:spTree>
+      <p:nvGrpSpPr>
+        <p:cNvPr id="1" name=""/>
+        <p:cNvGrpSpPr/>
+        <p:nvPr/>
+      </p:nvGrpSpPr>
+      <p:grpSpPr>
+        <a:xfrm>
+          <a:off x="0" y="0"/>
+          <a:ext cx="0" cy="0"/>
+          <a:chOff x="0" y="0"/>
+          <a:chExt cx="0" cy="0"/>
+        </a:xfrm>
+      </p:grpSpPr>
+      <p:sp>
+        <p:nvSpPr>
+          <p:cNvPr id="2" name="矩形 1"/>
+          <p:cNvSpPr/>
+          <p:nvPr/>
+        </p:nvSpPr>
+        <p:spPr>
+          <a:xfrm>
+            <a:off x="1933575" y="3660775"/>
+            <a:ext cx="8324215" cy="427990"/>
+          </a:xfrm>
+          <a:prstGeom prst="rect">
+            <a:avLst/>
+          </a:prstGeom>
+          <a:solidFill>
+            <a:schemeClr val="tx2">
+              <a:lumMod val="75000"/>
+              <a:lumOff val="25000"/>
+            </a:schemeClr>
+          </a:solidFill>
+          <a:ln>
+            <a:solidFill>
+              <a:schemeClr val="tx2">
+                <a:lumMod val="75000"/>
+                <a:lumOff val="25000"/>
+              </a:schemeClr>
+            </a:solidFill>
+          </a:ln>
+        </p:spPr>
+        <p:style>
+          <a:lnRef idx="2">
+            <a:schemeClr val="accent1">
+              <a:shade val="50000"/>
+            </a:schemeClr>
+          </a:lnRef>
+          <a:fillRef idx="1">
+            <a:schemeClr val="accent1"/>
+          </a:fillRef>
+          <a:effectRef idx="0">
+            <a:schemeClr val="accent1"/>
+          </a:effectRef>
+          <a:fontRef idx="minor">
+            <a:schemeClr val="lt1"/>
+          </a:fontRef>
+        </p:style>
+        <p:txBody>
+          <a:bodyPr rtlCol="0" anchor="ctr"/>
+          <a:lstStyle/>
+          <a:p>
+            <a:pPr algn="ctr"/>
+            <a:endParaRPr lang="zh-CN" altLang="en-US"/>
+          </a:p>
+        </p:txBody>
+      </p:sp>
+      <p:sp>
+        <p:nvSpPr>
+          <p:cNvPr id="3" name="矩形 2"/>
+          <p:cNvSpPr/>
+          <p:nvPr/>
+        </p:nvSpPr>
+        <p:spPr>
+          <a:xfrm>
+            <a:off x="3903713" y="2679383"/>
+            <a:ext cx="874395" cy="874395"/>
+          </a:xfrm>
+          <a:prstGeom prst="rect">
+            <a:avLst/>
+          </a:prstGeom>
+          <a:solidFill>
+            <a:schemeClr val="tx2">
+              <a:lumMod val="75000"/>
+              <a:lumOff val="25000"/>
+            </a:schemeClr>
+          </a:solidFill>
+          <a:ln>
+            <a:solidFill>
+              <a:schemeClr val="bg1"/>
+            </a:solidFill>
+          </a:ln>
+        </p:spPr>
+        <p:style>
+          <a:lnRef idx="2">
+            <a:schemeClr val="accent1">
+              <a:shade val="50000"/>
+            </a:schemeClr>
+          </a:lnRef>
+          <a:fillRef idx="1">
+            <a:schemeClr val="accent1"/>
+          </a:fillRef>
+          <a:effectRef idx="0">
+            <a:schemeClr val="accent1"/>
+          </a:effectRef>
+          <a:fontRef idx="minor">
+            <a:schemeClr val="lt1"/>
+          </a:fontRef>
+        </p:style>
+        <p:txBody>
+          <a:bodyPr rtlCol="0" anchor="ctr"/>
+          <a:lstStyle/>
+          <a:p>
+            <a:pPr algn="ctr"/>
+            <a:r>
+              <a:rPr lang="en-US" altLang="zh-CN" sz="4800">
+                <a:latin typeface="微软雅黑" panose="020B0503020204020204" pitchFamily="34" charset="-122"/>
+                <a:ea typeface="微软雅黑" panose="020B0503020204020204" pitchFamily="34" charset="-122"/>
+              </a:rPr>
+              <a:t>1</a:t>
+            </a:r>
+          </a:p>
+        </p:txBody>
+      </p:sp>
+      <p:sp>
+        <p:nvSpPr>
+          <p:cNvPr id="14" name="文本框 13"/>
+          <p:cNvSpPr txBox="1"/>
+          <p:nvPr/>
+        </p:nvSpPr>
+        <p:spPr>
+          <a:xfrm>
+            <a:off x="4778108" y="2596177"/>
+            <a:ext cx="3916680" cy="923330"/>
+          </a:xfrm>
+          <a:prstGeom prst="rect">
+            <a:avLst/>
+          </a:prstGeom>
+          <a:noFill/>
+        </p:spPr>
+        <p:txBody>
+          <a:bodyPr wrap="square" rtlCol="0" anchor="ctr">
+            <a:spAutoFit/>
+          </a:bodyPr>
+          <a:lstStyle/>
+          <a:p>
+            <a:r>
+              <a:rPr lang="zh-CN" altLang="en-US" sz="5400" b="1">
+                <a:solidFill>
+                  <a:schemeClr val="tx2">
+                    <a:lumMod val="75000"/>
+                    <a:lumOff val="25000"/>
+                  </a:schemeClr>
+                </a:solidFill>
+                <a:latin typeface="华文中宋" panose="02010600040101010101" pitchFamily="2" charset="-122"/>
+                <a:ea typeface="华文中宋" panose="02010600040101010101" pitchFamily="2" charset="-122"/>
+              </a:rPr>
+              <a:t>课题概述</a:t>
+            </a:r>
+          </a:p>
+        </p:txBody>
+      </p:sp>
+      <p:cxnSp>
+        <p:nvCxnSpPr>
+          <p:cNvPr id="32" name="直接连接符 31"/>
+          <p:cNvCxnSpPr/>
+          <p:nvPr/>
+        </p:nvCxnSpPr>
+        <p:spPr>
+          <a:xfrm>
+            <a:off x="2157095" y="3874770"/>
+            <a:ext cx="7877810" cy="0"/>
+          </a:xfrm>
+          <a:prstGeom prst="line">
+            <a:avLst/>
+          </a:prstGeom>
+          <a:ln>
+            <a:solidFill>
+              <a:schemeClr val="bg1"/>
+            </a:solidFill>
+          </a:ln>
+        </p:spPr>
+        <p:style>
+          <a:lnRef idx="1">
+            <a:schemeClr val="accent1"/>
+          </a:lnRef>
+          <a:fillRef idx="0">
+            <a:schemeClr val="accent1"/>
+          </a:fillRef>
+          <a:effectRef idx="0">
+            <a:schemeClr val="accent1"/>
+          </a:effectRef>
+          <a:fontRef idx="minor">
+            <a:schemeClr val="tx1"/>
+          </a:fontRef>
+        </p:style>
+      </p:cxnSp>
+      <p:grpSp>
+        <p:nvGrpSpPr>
+          <p:cNvPr id="4" name="组合 3">
+            <a:extLst>
+              <a:ext uri="{FF2B5EF4-FFF2-40B4-BE49-F238E27FC236}">
+                <a16:creationId xmlns:a16="http://schemas.microsoft.com/office/drawing/2014/main" id="{3FC41E73-E696-1B9B-DF68-1722D0B3B147}"/>
+              </a:ext>
+            </a:extLst>
+          </p:cNvPr>
+          <p:cNvGrpSpPr/>
+          <p:nvPr/>
+        </p:nvGrpSpPr>
+        <p:grpSpPr>
+          <a:xfrm>
+            <a:off x="0" y="-17780"/>
+            <a:ext cx="1593850" cy="6095365"/>
+            <a:chOff x="0" y="-17780"/>
+            <a:chExt cx="1593850" cy="6095365"/>
+          </a:xfrm>
+        </p:grpSpPr>
+        <p:sp>
+          <p:nvSpPr>
+            <p:cNvPr id="24" name="等腰三角形 23"/>
+            <p:cNvSpPr/>
+            <p:nvPr/>
+          </p:nvSpPr>
+          <p:spPr>
+            <a:xfrm rot="10800000">
+              <a:off x="0" y="-17780"/>
+              <a:ext cx="1593850" cy="1210945"/>
+            </a:xfrm>
+            <a:prstGeom prst="triangle">
+              <a:avLst/>
+            </a:prstGeom>
+            <a:solidFill>
+              <a:schemeClr val="tx2">
+                <a:lumMod val="75000"/>
+                <a:lumOff val="25000"/>
+              </a:schemeClr>
+            </a:solidFill>
+            <a:ln>
+              <a:noFill/>
+            </a:ln>
+          </p:spPr>
+          <p:style>
+            <a:lnRef idx="2">
+              <a:schemeClr val="accent1">
+                <a:shade val="50000"/>
+              </a:schemeClr>
+            </a:lnRef>
+            <a:fillRef idx="1">
+              <a:schemeClr val="accent1"/>
+            </a:fillRef>
+            <a:effectRef idx="0">
+              <a:schemeClr val="accent1"/>
+            </a:effectRef>
+            <a:fontRef idx="minor">
+              <a:schemeClr val="lt1"/>
+            </a:fontRef>
+          </p:style>
+          <p:txBody>
+            <a:bodyPr rtlCol="0" anchor="ctr"/>
+            <a:lstStyle/>
+            <a:p>
+              <a:pPr algn="ctr"/>
+              <a:endParaRPr lang="zh-CN" altLang="en-US"/>
+            </a:p>
+          </p:txBody>
+        </p:sp>
+        <p:cxnSp>
+          <p:nvCxnSpPr>
+            <p:cNvPr id="33" name="直接连接符 32"/>
+            <p:cNvCxnSpPr/>
+            <p:nvPr/>
+          </p:nvCxnSpPr>
+          <p:spPr>
+            <a:xfrm>
+              <a:off x="200025" y="2540"/>
+              <a:ext cx="0" cy="6075045"/>
+            </a:xfrm>
+            <a:prstGeom prst="line">
+              <a:avLst/>
+            </a:prstGeom>
+            <a:ln>
+              <a:solidFill>
+                <a:schemeClr val="tx2">
+                  <a:lumMod val="75000"/>
+                  <a:lumOff val="25000"/>
+                </a:schemeClr>
+              </a:solidFill>
+            </a:ln>
+          </p:spPr>
+          <p:style>
+            <a:lnRef idx="1">
+              <a:schemeClr val="accent1"/>
+            </a:lnRef>
+            <a:fillRef idx="0">
+              <a:schemeClr val="accent1"/>
+            </a:fillRef>
+            <a:effectRef idx="0">
+              <a:schemeClr val="accent1"/>
+            </a:effectRef>
+            <a:fontRef idx="minor">
+              <a:schemeClr val="tx1"/>
+            </a:fontRef>
+          </p:style>
+        </p:cxnSp>
+        <p:cxnSp>
+          <p:nvCxnSpPr>
+            <p:cNvPr id="34" name="直接连接符 33"/>
+            <p:cNvCxnSpPr/>
+            <p:nvPr/>
+          </p:nvCxnSpPr>
+          <p:spPr>
+            <a:xfrm>
+              <a:off x="409575" y="348615"/>
+              <a:ext cx="0" cy="4763135"/>
+            </a:xfrm>
+            <a:prstGeom prst="line">
+              <a:avLst/>
+            </a:prstGeom>
+            <a:ln>
+              <a:solidFill>
+                <a:schemeClr val="tx2">
+                  <a:lumMod val="75000"/>
+                  <a:lumOff val="25000"/>
+                </a:schemeClr>
+              </a:solidFill>
+            </a:ln>
+          </p:spPr>
+          <p:style>
+            <a:lnRef idx="1">
+              <a:schemeClr val="accent1"/>
+            </a:lnRef>
+            <a:fillRef idx="0">
+              <a:schemeClr val="accent1"/>
+            </a:fillRef>
+            <a:effectRef idx="0">
+              <a:schemeClr val="accent1"/>
+            </a:effectRef>
+            <a:fontRef idx="minor">
+              <a:schemeClr val="tx1"/>
+            </a:fontRef>
+          </p:style>
+        </p:cxnSp>
+        <p:cxnSp>
+          <p:nvCxnSpPr>
+            <p:cNvPr id="37" name="直接连接符 36"/>
+            <p:cNvCxnSpPr/>
+            <p:nvPr/>
+          </p:nvCxnSpPr>
+          <p:spPr>
+            <a:xfrm>
+              <a:off x="628015" y="576580"/>
+              <a:ext cx="0" cy="3105150"/>
+            </a:xfrm>
+            <a:prstGeom prst="line">
+              <a:avLst/>
+            </a:prstGeom>
+            <a:ln>
+              <a:solidFill>
+                <a:schemeClr val="tx2">
+                  <a:lumMod val="75000"/>
+                  <a:lumOff val="25000"/>
+                </a:schemeClr>
+              </a:solidFill>
+            </a:ln>
+          </p:spPr>
+          <p:style>
+            <a:lnRef idx="1">
+              <a:schemeClr val="accent1"/>
+            </a:lnRef>
+            <a:fillRef idx="0">
+              <a:schemeClr val="accent1"/>
+            </a:fillRef>
+            <a:effectRef idx="0">
+              <a:schemeClr val="accent1"/>
+            </a:effectRef>
+            <a:fontRef idx="minor">
+              <a:schemeClr val="tx1"/>
+            </a:fontRef>
+          </p:style>
+        </p:cxnSp>
+      </p:grpSp>
+      <p:grpSp>
+        <p:nvGrpSpPr>
+          <p:cNvPr id="5" name="组合 4">
+            <a:extLst>
+              <a:ext uri="{FF2B5EF4-FFF2-40B4-BE49-F238E27FC236}">
+                <a16:creationId xmlns:a16="http://schemas.microsoft.com/office/drawing/2014/main" id="{3C4DAB68-012D-6D3A-1BBC-850CD14F3125}"/>
+              </a:ext>
+            </a:extLst>
+          </p:cNvPr>
+          <p:cNvGrpSpPr/>
+          <p:nvPr/>
+        </p:nvGrpSpPr>
+        <p:grpSpPr>
+          <a:xfrm flipH="1">
+            <a:off x="10598150" y="0"/>
+            <a:ext cx="1593850" cy="6095365"/>
+            <a:chOff x="0" y="-17780"/>
+            <a:chExt cx="1593850" cy="6095365"/>
+          </a:xfrm>
+        </p:grpSpPr>
+        <p:sp>
+          <p:nvSpPr>
+            <p:cNvPr id="6" name="等腰三角形 5">
+              <a:extLst>
+                <a:ext uri="{FF2B5EF4-FFF2-40B4-BE49-F238E27FC236}">
+                  <a16:creationId xmlns:a16="http://schemas.microsoft.com/office/drawing/2014/main" id="{817E435F-C114-793C-3DDA-7F94390B42CF}"/>
+                </a:ext>
+              </a:extLst>
+            </p:cNvPr>
+            <p:cNvSpPr/>
+            <p:nvPr/>
+          </p:nvSpPr>
+          <p:spPr>
+            <a:xfrm rot="10800000">
+              <a:off x="0" y="-17780"/>
+              <a:ext cx="1593850" cy="1210945"/>
+            </a:xfrm>
+            <a:prstGeom prst="triangle">
+              <a:avLst/>
+            </a:prstGeom>
+            <a:solidFill>
+              <a:schemeClr val="tx2">
+                <a:lumMod val="75000"/>
+                <a:lumOff val="25000"/>
+              </a:schemeClr>
+            </a:solidFill>
+            <a:ln>
+              <a:noFill/>
+            </a:ln>
+          </p:spPr>
+          <p:style>
+            <a:lnRef idx="2">
+              <a:schemeClr val="accent1">
+                <a:shade val="50000"/>
+              </a:schemeClr>
+            </a:lnRef>
+            <a:fillRef idx="1">
+              <a:schemeClr val="accent1"/>
+            </a:fillRef>
+            <a:effectRef idx="0">
+              <a:schemeClr val="accent1"/>
+            </a:effectRef>
+            <a:fontRef idx="minor">
+              <a:schemeClr val="lt1"/>
+            </a:fontRef>
+          </p:style>
+          <p:txBody>
+            <a:bodyPr rtlCol="0" anchor="ctr"/>
+            <a:lstStyle/>
+            <a:p>
+              <a:pPr algn="ctr"/>
+              <a:endParaRPr lang="zh-CN" altLang="en-US"/>
+            </a:p>
+          </p:txBody>
+        </p:sp>
+        <p:cxnSp>
+          <p:nvCxnSpPr>
+            <p:cNvPr id="7" name="直接连接符 6">
+              <a:extLst>
+                <a:ext uri="{FF2B5EF4-FFF2-40B4-BE49-F238E27FC236}">
+                  <a16:creationId xmlns:a16="http://schemas.microsoft.com/office/drawing/2014/main" id="{F7898038-EF49-FBEE-0FFC-C5BB598055F8}"/>
+                </a:ext>
+              </a:extLst>
+            </p:cNvPr>
+            <p:cNvCxnSpPr/>
+            <p:nvPr/>
+          </p:nvCxnSpPr>
+          <p:spPr>
+            <a:xfrm>
+              <a:off x="200025" y="2540"/>
+              <a:ext cx="0" cy="6075045"/>
+            </a:xfrm>
+            <a:prstGeom prst="line">
+              <a:avLst/>
+            </a:prstGeom>
+            <a:ln>
+              <a:solidFill>
+                <a:schemeClr val="tx2">
+                  <a:lumMod val="75000"/>
+                  <a:lumOff val="25000"/>
+                </a:schemeClr>
+              </a:solidFill>
+            </a:ln>
+          </p:spPr>
+          <p:style>
+            <a:lnRef idx="1">
+              <a:schemeClr val="accent1"/>
+            </a:lnRef>
+            <a:fillRef idx="0">
+              <a:schemeClr val="accent1"/>
+            </a:fillRef>
+            <a:effectRef idx="0">
+              <a:schemeClr val="accent1"/>
+            </a:effectRef>
+            <a:fontRef idx="minor">
+              <a:schemeClr val="tx1"/>
+            </a:fontRef>
+          </p:style>
+        </p:cxnSp>
+        <p:cxnSp>
+          <p:nvCxnSpPr>
+            <p:cNvPr id="8" name="直接连接符 7">
+              <a:extLst>
+                <a:ext uri="{FF2B5EF4-FFF2-40B4-BE49-F238E27FC236}">
+                  <a16:creationId xmlns:a16="http://schemas.microsoft.com/office/drawing/2014/main" id="{CDAB24DD-6E19-B5E2-6242-AA569DCFC750}"/>
+                </a:ext>
+              </a:extLst>
+            </p:cNvPr>
+            <p:cNvCxnSpPr/>
+            <p:nvPr/>
+          </p:nvCxnSpPr>
+          <p:spPr>
+            <a:xfrm>
+              <a:off x="409575" y="348615"/>
+              <a:ext cx="0" cy="4763135"/>
+            </a:xfrm>
+            <a:prstGeom prst="line">
+              <a:avLst/>
+            </a:prstGeom>
+            <a:ln>
+              <a:solidFill>
+                <a:schemeClr val="tx2">
+                  <a:lumMod val="75000"/>
+                  <a:lumOff val="25000"/>
+                </a:schemeClr>
+              </a:solidFill>
+            </a:ln>
+          </p:spPr>
+          <p:style>
+            <a:lnRef idx="1">
+              <a:schemeClr val="accent1"/>
+            </a:lnRef>
+            <a:fillRef idx="0">
+              <a:schemeClr val="accent1"/>
+            </a:fillRef>
+            <a:effectRef idx="0">
+              <a:schemeClr val="accent1"/>
+            </a:effectRef>
+            <a:fontRef idx="minor">
+              <a:schemeClr val="tx1"/>
+            </a:fontRef>
+          </p:style>
+        </p:cxnSp>
+        <p:cxnSp>
+          <p:nvCxnSpPr>
+            <p:cNvPr id="9" name="直接连接符 8">
+              <a:extLst>
+                <a:ext uri="{FF2B5EF4-FFF2-40B4-BE49-F238E27FC236}">
+                  <a16:creationId xmlns:a16="http://schemas.microsoft.com/office/drawing/2014/main" id="{DA63B20D-4ACF-967B-3F6B-69F75BA59E2D}"/>
+                </a:ext>
+              </a:extLst>
+            </p:cNvPr>
+            <p:cNvCxnSpPr/>
+            <p:nvPr/>
+          </p:nvCxnSpPr>
+          <p:spPr>
+            <a:xfrm>
+              <a:off x="628015" y="576580"/>
+              <a:ext cx="0" cy="3105150"/>
+            </a:xfrm>
+            <a:prstGeom prst="line">
+              <a:avLst/>
+            </a:prstGeom>
+            <a:ln>
+              <a:solidFill>
+                <a:schemeClr val="tx2">
+                  <a:lumMod val="75000"/>
+                  <a:lumOff val="25000"/>
+                </a:schemeClr>
+              </a:solidFill>
+            </a:ln>
+          </p:spPr>
+          <p:style>
+            <a:lnRef idx="1">
+              <a:schemeClr val="accent1"/>
+            </a:lnRef>
+            <a:fillRef idx="0">
+              <a:schemeClr val="accent1"/>
+            </a:fillRef>
+            <a:effectRef idx="0">
+              <a:schemeClr val="accent1"/>
+            </a:effectRef>
+            <a:fontRef idx="minor">
+              <a:schemeClr val="tx1"/>
+            </a:fontRef>
+          </p:style>
+        </p:cxnSp>
+      </p:grpSp>
+    </p:spTree>
+    <p:custDataLst>
+      <p:tags r:id="rId1"/>
+    </p:custDataLst>
+  </p:cSld>
+  <p:clrMapOvr>
+    <a:masterClrMapping/>
+  </p:clrMapOvr>
+  <mc:AlternateContent xmlns:mc="http://schemas.openxmlformats.org/markup-compatibility/2006" xmlns:p159="http://schemas.microsoft.com/office/powerpoint/2015/09/main">
+    <mc:Choice Requires="p159">
+      <p:transition xmlns:p14="http://schemas.microsoft.com/office/powerpoint/2010/main" spd="slow" p14:dur="2000">
+        <p159:morph option="byObject"/>
+      </p:transition>
+    </mc:Choice>
+    <mc:Fallback xmlns="">
+      <p:transition spd="slow">
+        <p:fade/>
+      </p:transition>
+    </mc:Fallback>
+  </mc:AlternateContent>
+</p:sld>
+</file>
+
+<file path=ppt/slides/slide30.xml><?xml version="1.0" encoding="utf-8"?>
+<p:sld xmlns:a="http://schemas.openxmlformats.org/drawingml/2006/main" xmlns:r="http://schemas.openxmlformats.org/officeDocument/2006/relationships" xmlns:p="http://schemas.openxmlformats.org/presentationml/2006/main">
+  <p:cSld>
+    <p:spTree>
+      <p:nvGrpSpPr>
+        <p:cNvPr id="1" name="">
+          <a:extLst>
+            <a:ext uri="{FF2B5EF4-FFF2-40B4-BE49-F238E27FC236}">
+              <a16:creationId xmlns:a16="http://schemas.microsoft.com/office/drawing/2014/main" id="{17EDBA26-91D2-CBDA-CF06-524CF6CED92B}"/>
+            </a:ext>
+          </a:extLst>
+        </p:cNvPr>
+        <p:cNvGrpSpPr/>
+        <p:nvPr/>
+      </p:nvGrpSpPr>
+      <p:grpSpPr>
+        <a:xfrm>
+          <a:off x="0" y="0"/>
+          <a:ext cx="0" cy="0"/>
+          <a:chOff x="0" y="0"/>
+          <a:chExt cx="0" cy="0"/>
+        </a:xfrm>
+      </p:grpSpPr>
+      <p:grpSp>
+        <p:nvGrpSpPr>
+          <p:cNvPr id="2" name="组合 1">
+            <a:extLst>
+              <a:ext uri="{FF2B5EF4-FFF2-40B4-BE49-F238E27FC236}">
+                <a16:creationId xmlns:a16="http://schemas.microsoft.com/office/drawing/2014/main" id="{A1905345-00FB-7FB1-2FDD-2EE6B031773A}"/>
+              </a:ext>
+            </a:extLst>
+          </p:cNvPr>
+          <p:cNvGrpSpPr/>
+          <p:nvPr/>
+        </p:nvGrpSpPr>
+        <p:grpSpPr>
+          <a:xfrm>
+            <a:off x="-12700" y="-13335"/>
+            <a:ext cx="5365991" cy="874395"/>
+            <a:chOff x="-12700" y="-13335"/>
+            <a:chExt cx="5365991" cy="874395"/>
+          </a:xfrm>
+        </p:grpSpPr>
+        <p:sp>
+          <p:nvSpPr>
+            <p:cNvPr id="6" name="矩形 5">
+              <a:extLst>
+                <a:ext uri="{FF2B5EF4-FFF2-40B4-BE49-F238E27FC236}">
+                  <a16:creationId xmlns:a16="http://schemas.microsoft.com/office/drawing/2014/main" id="{5025EC8F-C998-EEA7-22DF-EA6EFB21BEB0}"/>
+                </a:ext>
+              </a:extLst>
+            </p:cNvPr>
+            <p:cNvSpPr/>
+            <p:nvPr/>
+          </p:nvSpPr>
+          <p:spPr>
+            <a:xfrm>
+              <a:off x="-12700" y="784860"/>
+              <a:ext cx="5365991" cy="46137"/>
+            </a:xfrm>
+            <a:prstGeom prst="rect">
+              <a:avLst/>
+            </a:prstGeom>
+            <a:solidFill>
+              <a:schemeClr val="tx2">
+                <a:lumMod val="75000"/>
+                <a:lumOff val="25000"/>
+              </a:schemeClr>
+            </a:solidFill>
+            <a:ln>
+              <a:solidFill>
+                <a:schemeClr val="bg1"/>
+              </a:solidFill>
+            </a:ln>
+          </p:spPr>
+          <p:style>
+            <a:lnRef idx="2">
+              <a:schemeClr val="accent1">
+                <a:shade val="50000"/>
+              </a:schemeClr>
+            </a:lnRef>
+            <a:fillRef idx="1">
+              <a:schemeClr val="accent1"/>
+            </a:fillRef>
+            <a:effectRef idx="0">
+              <a:schemeClr val="accent1"/>
+            </a:effectRef>
+            <a:fontRef idx="minor">
+              <a:schemeClr val="lt1"/>
+            </a:fontRef>
+          </p:style>
+          <p:txBody>
+            <a:bodyPr rtlCol="0" anchor="ctr"/>
+            <a:lstStyle/>
+            <a:p>
+              <a:pPr algn="ctr"/>
+              <a:endParaRPr lang="zh-CN" altLang="en-US"/>
+            </a:p>
+          </p:txBody>
+        </p:sp>
+        <p:sp>
+          <p:nvSpPr>
+            <p:cNvPr id="8" name="矩形 7">
+              <a:extLst>
+                <a:ext uri="{FF2B5EF4-FFF2-40B4-BE49-F238E27FC236}">
+                  <a16:creationId xmlns:a16="http://schemas.microsoft.com/office/drawing/2014/main" id="{8E1EEE7D-57C5-F672-D5A4-0D15A698AE29}"/>
+                </a:ext>
+              </a:extLst>
+            </p:cNvPr>
+            <p:cNvSpPr/>
+            <p:nvPr/>
+          </p:nvSpPr>
+          <p:spPr>
+            <a:xfrm>
+              <a:off x="-12700" y="-13335"/>
+              <a:ext cx="874395" cy="874395"/>
+            </a:xfrm>
+            <a:prstGeom prst="rect">
+              <a:avLst/>
+            </a:prstGeom>
+            <a:solidFill>
+              <a:schemeClr val="tx2">
+                <a:lumMod val="75000"/>
+                <a:lumOff val="25000"/>
+              </a:schemeClr>
+            </a:solidFill>
+            <a:ln>
+              <a:solidFill>
+                <a:schemeClr val="bg1"/>
+              </a:solidFill>
+            </a:ln>
+          </p:spPr>
+          <p:style>
+            <a:lnRef idx="2">
+              <a:schemeClr val="accent1">
+                <a:shade val="50000"/>
+              </a:schemeClr>
+            </a:lnRef>
+            <a:fillRef idx="1">
+              <a:schemeClr val="accent1"/>
+            </a:fillRef>
+            <a:effectRef idx="0">
+              <a:schemeClr val="accent1"/>
+            </a:effectRef>
+            <a:fontRef idx="minor">
+              <a:schemeClr val="lt1"/>
+            </a:fontRef>
+          </p:style>
+          <p:txBody>
+            <a:bodyPr rtlCol="0" anchor="ctr"/>
+            <a:lstStyle/>
+            <a:p>
+              <a:pPr algn="ctr"/>
+              <a:r>
+                <a:rPr lang="en-US" altLang="zh-CN" sz="4800">
+                  <a:latin typeface="微软雅黑" panose="020B0503020204020204" pitchFamily="34" charset="-122"/>
+                  <a:ea typeface="微软雅黑" panose="020B0503020204020204" pitchFamily="34" charset="-122"/>
+                </a:rPr>
+                <a:t>4</a:t>
+              </a:r>
+            </a:p>
+          </p:txBody>
+        </p:sp>
+        <p:sp>
+          <p:nvSpPr>
+            <p:cNvPr id="10" name="文本框 9">
+              <a:extLst>
+                <a:ext uri="{FF2B5EF4-FFF2-40B4-BE49-F238E27FC236}">
+                  <a16:creationId xmlns:a16="http://schemas.microsoft.com/office/drawing/2014/main" id="{A2C7C82A-BC9D-DFDA-4299-A2DFA28E700B}"/>
+                </a:ext>
+              </a:extLst>
+            </p:cNvPr>
+            <p:cNvSpPr txBox="1"/>
+            <p:nvPr/>
+          </p:nvSpPr>
+          <p:spPr>
+            <a:xfrm>
+              <a:off x="861695" y="0"/>
+              <a:ext cx="4491596" cy="830997"/>
+            </a:xfrm>
+            <a:prstGeom prst="rect">
+              <a:avLst/>
+            </a:prstGeom>
+            <a:noFill/>
+          </p:spPr>
+          <p:txBody>
+            <a:bodyPr wrap="square" rtlCol="0">
+              <a:spAutoFit/>
+            </a:bodyPr>
+            <a:lstStyle/>
+            <a:p>
+              <a:pPr algn="ctr"/>
+              <a:r>
+                <a:rPr lang="zh-CN" altLang="en-US" sz="4800" b="1">
+                  <a:solidFill>
+                    <a:schemeClr val="tx2">
+                      <a:lumMod val="75000"/>
+                      <a:lumOff val="25000"/>
+                    </a:schemeClr>
+                  </a:solidFill>
+                  <a:latin typeface="华文中宋" panose="02010600040101010101" pitchFamily="2" charset="-122"/>
+                  <a:ea typeface="华文中宋" panose="02010600040101010101" pitchFamily="2" charset="-122"/>
+                </a:rPr>
+                <a:t>实验结果与结论</a:t>
+              </a:r>
+            </a:p>
+          </p:txBody>
+        </p:sp>
+      </p:grpSp>
+      <p:sp>
+        <p:nvSpPr>
+          <p:cNvPr id="26" name="文本框 25">
+            <a:extLst>
+              <a:ext uri="{FF2B5EF4-FFF2-40B4-BE49-F238E27FC236}">
+                <a16:creationId xmlns:a16="http://schemas.microsoft.com/office/drawing/2014/main" id="{67CF6FD1-7CE7-D4FD-837D-16E225929502}"/>
+              </a:ext>
+            </a:extLst>
+          </p:cNvPr>
+          <p:cNvSpPr txBox="1"/>
+          <p:nvPr/>
+        </p:nvSpPr>
+        <p:spPr>
+          <a:xfrm>
+            <a:off x="1355467" y="1750495"/>
+            <a:ext cx="9481066" cy="3357009"/>
+          </a:xfrm>
+          <a:prstGeom prst="rect">
+            <a:avLst/>
+          </a:prstGeom>
+          <a:noFill/>
+        </p:spPr>
+        <p:txBody>
+          <a:bodyPr wrap="square" rtlCol="0">
+            <a:spAutoFit/>
+          </a:bodyPr>
+          <a:lstStyle>
+            <a:defPPr>
+              <a:defRPr lang="zh-CN"/>
+            </a:defPPr>
+            <a:lvl1pPr algn="ctr">
+              <a:defRPr>
+                <a:solidFill>
+                  <a:srgbClr val="324273"/>
+                </a:solidFill>
+                <a:latin typeface="Consolas" panose="020B0609020204030204" pitchFamily="49" charset="0"/>
+                <a:ea typeface="华文中宋" panose="02010600040101010101" pitchFamily="2" charset="-122"/>
+              </a:defRPr>
+            </a:lvl1pPr>
+          </a:lstStyle>
+          <a:p>
+            <a:pPr indent="457200" algn="just">
+              <a:lnSpc>
+                <a:spcPct val="150000"/>
+              </a:lnSpc>
+            </a:pPr>
+            <a:r>
+              <a:rPr lang="zh-CN" altLang="en-US" sz="2400"/>
+              <a:t>那么为什么我们的实验结果显示</a:t>
+            </a:r>
+            <a:r>
+              <a:rPr lang="en-US" altLang="zh-CN" sz="2400"/>
+              <a:t>greedy</a:t>
+            </a:r>
+            <a:r>
+              <a:rPr lang="zh-CN" altLang="en-US" sz="2400"/>
+              <a:t>的性能与</a:t>
+            </a:r>
+            <a:r>
+              <a:rPr lang="en-US" altLang="zh-CN" sz="2400"/>
+              <a:t>MST-1</a:t>
+            </a:r>
+            <a:r>
+              <a:rPr lang="zh-CN" altLang="en-US" sz="2400"/>
+              <a:t>不相上下呢？我们总结了以下原因：</a:t>
+            </a:r>
+            <a:endParaRPr lang="en-US" altLang="zh-CN" sz="2400"/>
+          </a:p>
+          <a:p>
+            <a:pPr indent="457200" algn="just">
+              <a:lnSpc>
+                <a:spcPct val="150000"/>
+              </a:lnSpc>
+            </a:pPr>
+            <a:r>
+              <a:rPr lang="en-US" altLang="zh-CN" sz="2400"/>
+              <a:t>1.</a:t>
+            </a:r>
+            <a:r>
+              <a:rPr lang="zh-CN" altLang="en-US" sz="2400"/>
+              <a:t>数据同一性过强。数据采集于现实、使用欧式距离等特征使得</a:t>
+            </a:r>
+            <a:r>
+              <a:rPr lang="en-US" altLang="zh-CN" sz="2400"/>
+              <a:t>greedy</a:t>
+            </a:r>
+            <a:r>
+              <a:rPr lang="zh-CN" altLang="en-US" sz="2400"/>
+              <a:t>陷于局部视野的缺点没能暴露出来；</a:t>
+            </a:r>
+            <a:endParaRPr lang="en-US" altLang="zh-CN" sz="2400"/>
+          </a:p>
+          <a:p>
+            <a:pPr indent="457200" algn="just">
+              <a:lnSpc>
+                <a:spcPct val="150000"/>
+              </a:lnSpc>
+            </a:pPr>
+            <a:r>
+              <a:rPr lang="en-US" altLang="zh-CN" sz="2400"/>
+              <a:t>2.</a:t>
+            </a:r>
+            <a:r>
+              <a:rPr lang="zh-CN" altLang="en-US" sz="2400"/>
+              <a:t>起点选取问题。我们遍历了</a:t>
+            </a:r>
+            <a:r>
+              <a:rPr lang="en-US" altLang="zh-CN" sz="2400"/>
+              <a:t>greedy</a:t>
+            </a:r>
+            <a:r>
+              <a:rPr lang="zh-CN" altLang="en-US" sz="2400"/>
+              <a:t>所有可能的起点，使得其缺点得到了一些缓解。</a:t>
+            </a:r>
+          </a:p>
+        </p:txBody>
+      </p:sp>
+    </p:spTree>
+    <p:custDataLst>
+      <p:tags r:id="rId1"/>
+    </p:custDataLst>
+    <p:extLst>
+      <p:ext uri="{BB962C8B-B14F-4D97-AF65-F5344CB8AC3E}">
+        <p14:creationId xmlns:p14="http://schemas.microsoft.com/office/powerpoint/2010/main" val="1936770806"/>
+      </p:ext>
+    </p:extLst>
+  </p:cSld>
+  <p:clrMapOvr>
+    <a:masterClrMapping/>
+  </p:clrMapOvr>
+  <mc:AlternateContent xmlns:mc="http://schemas.openxmlformats.org/markup-compatibility/2006" xmlns:p159="http://schemas.microsoft.com/office/powerpoint/2015/09/main">
+    <mc:Choice Requires="p159">
+      <p:transition xmlns:p14="http://schemas.microsoft.com/office/powerpoint/2010/main" spd="slow" p14:dur="2000">
+        <p159:morph option="byObject"/>
+      </p:transition>
+    </mc:Choice>
+    <mc:Fallback xmlns="">
+      <p:transition spd="slow">
+        <p:fade/>
+      </p:transition>
+    </mc:Fallback>
+  </mc:AlternateContent>
+</p:sld>
+</file>
+
+<file path=ppt/slides/slide31.xml><?xml version="1.0" encoding="utf-8"?>
 <p:sld xmlns:a="http://schemas.openxmlformats.org/drawingml/2006/main" xmlns:r="http://schemas.openxmlformats.org/officeDocument/2006/relationships" xmlns:p="http://schemas.openxmlformats.org/presentationml/2006/main">
   <p:cSld>
     <p:spTree>
@@ -34252,8 +36807,8 @@
         </p:nvGrpSpPr>
         <p:grpSpPr>
           <a:xfrm>
-            <a:off x="927592" y="1473018"/>
-            <a:ext cx="10336812" cy="5084038"/>
+            <a:off x="674347" y="1485050"/>
+            <a:ext cx="10843299" cy="5084038"/>
             <a:chOff x="921804" y="1806466"/>
             <a:chExt cx="10336812" cy="5084038"/>
           </a:xfrm>
@@ -34516,14 +37071,14 @@
           <p:nvPr>
             <p:extLst>
               <p:ext uri="{D42A27DB-BD31-4B8C-83A1-F6EECF244321}">
-                <p14:modId xmlns:p14="http://schemas.microsoft.com/office/powerpoint/2010/main" val="574660679"/>
+                <p14:modId xmlns:p14="http://schemas.microsoft.com/office/powerpoint/2010/main" val="2835467019"/>
               </p:ext>
             </p:extLst>
           </p:nvPr>
         </p:nvGraphicFramePr>
         <p:xfrm>
-          <a:off x="1314543" y="2763252"/>
-          <a:ext cx="9562909" cy="1841172"/>
+          <a:off x="927589" y="2550123"/>
+          <a:ext cx="10336814" cy="1841172"/>
         </p:xfrm>
         <a:graphic>
           <a:graphicData uri="http://schemas.openxmlformats.org/drawingml/2006/table">
@@ -34532,45 +37087,52 @@
                 <a:tableStyleId>{69CF1AB2-1976-4502-BF36-3FF5EA218861}</a:tableStyleId>
               </a:tblPr>
               <a:tblGrid>
-                <a:gridCol w="1965171">
+                <a:gridCol w="1820748">
                   <a:extLst>
                     <a:ext uri="{9D8B030D-6E8A-4147-A177-3AD203B41FA5}">
                       <a16:colId xmlns:a16="http://schemas.microsoft.com/office/drawing/2014/main" val="71793056"/>
                     </a:ext>
                   </a:extLst>
                 </a:gridCol>
-                <a:gridCol w="1222466">
+                <a:gridCol w="1132626">
                   <a:extLst>
                     <a:ext uri="{9D8B030D-6E8A-4147-A177-3AD203B41FA5}">
                       <a16:colId xmlns:a16="http://schemas.microsoft.com/office/drawing/2014/main" val="394926860"/>
                     </a:ext>
                   </a:extLst>
                 </a:gridCol>
-                <a:gridCol w="1593818">
+                <a:gridCol w="1476688">
                   <a:extLst>
                     <a:ext uri="{9D8B030D-6E8A-4147-A177-3AD203B41FA5}">
                       <a16:colId xmlns:a16="http://schemas.microsoft.com/office/drawing/2014/main" val="295355810"/>
                     </a:ext>
                   </a:extLst>
                 </a:gridCol>
-                <a:gridCol w="1593818">
+                <a:gridCol w="1476688">
                   <a:extLst>
                     <a:ext uri="{9D8B030D-6E8A-4147-A177-3AD203B41FA5}">
                       <a16:colId xmlns:a16="http://schemas.microsoft.com/office/drawing/2014/main" val="3226184861"/>
                     </a:ext>
                   </a:extLst>
                 </a:gridCol>
-                <a:gridCol w="1593818">
+                <a:gridCol w="1476688">
                   <a:extLst>
                     <a:ext uri="{9D8B030D-6E8A-4147-A177-3AD203B41FA5}">
                       <a16:colId xmlns:a16="http://schemas.microsoft.com/office/drawing/2014/main" val="1483907307"/>
                     </a:ext>
                   </a:extLst>
                 </a:gridCol>
-                <a:gridCol w="1593818">
+                <a:gridCol w="1476688">
                   <a:extLst>
                     <a:ext uri="{9D8B030D-6E8A-4147-A177-3AD203B41FA5}">
                       <a16:colId xmlns:a16="http://schemas.microsoft.com/office/drawing/2014/main" val="3831667883"/>
+                    </a:ext>
+                  </a:extLst>
+                </a:gridCol>
+                <a:gridCol w="1476688">
+                  <a:extLst>
+                    <a:ext uri="{9D8B030D-6E8A-4147-A177-3AD203B41FA5}">
+                      <a16:colId xmlns:a16="http://schemas.microsoft.com/office/drawing/2014/main" val="3199554284"/>
                     </a:ext>
                   </a:extLst>
                 </a:gridCol>
@@ -34688,7 +37250,28 @@
                           <a:latin typeface="Consolas" panose="020B0609020204030204" pitchFamily="49" charset="0"/>
                           <a:ea typeface="华文中宋" panose="02010600040101010101" pitchFamily="2" charset="-122"/>
                         </a:rPr>
-                        <a:t>MST</a:t>
+                        <a:t>MST-0</a:t>
+                      </a:r>
+                      <a:endParaRPr lang="zh-CN" altLang="en-US" sz="2400" baseline="0">
+                        <a:latin typeface="Consolas" panose="020B0609020204030204" pitchFamily="49" charset="0"/>
+                        <a:ea typeface="华文中宋" panose="02010600040101010101" pitchFamily="2" charset="-122"/>
+                      </a:endParaRPr>
+                    </a:p>
+                  </a:txBody>
+                  <a:tcPr marL="116924" marR="116924" marT="58462" marB="58462" anchor="ctr"/>
+                </a:tc>
+                <a:tc>
+                  <a:txBody>
+                    <a:bodyPr/>
+                    <a:lstStyle/>
+                    <a:p>
+                      <a:pPr algn="ctr"/>
+                      <a:r>
+                        <a:rPr lang="en-US" altLang="zh-CN" sz="2400" baseline="0">
+                          <a:latin typeface="Consolas" panose="020B0609020204030204" pitchFamily="49" charset="0"/>
+                          <a:ea typeface="华文中宋" panose="02010600040101010101" pitchFamily="2" charset="-122"/>
+                        </a:rPr>
+                        <a:t>MST-1</a:t>
                       </a:r>
                       <a:endParaRPr lang="zh-CN" altLang="en-US" sz="2400" baseline="0">
                         <a:latin typeface="Consolas" panose="020B0609020204030204" pitchFamily="49" charset="0"/>
@@ -34866,6 +37449,34 @@
                   </a:txBody>
                   <a:tcPr marL="116924" marR="116924" marT="58462" marB="58462" anchor="ctr"/>
                 </a:tc>
+                <a:tc>
+                  <a:txBody>
+                    <a:bodyPr/>
+                    <a:lstStyle/>
+                    <a:p>
+                      <a:pPr algn="ctr"/>
+                      <a:r>
+                        <a:rPr lang="en-US" altLang="zh-CN" sz="2400" baseline="0">
+                          <a:latin typeface="Consolas" panose="020B0609020204030204" pitchFamily="49" charset="0"/>
+                          <a:ea typeface="华文中宋" panose="02010600040101010101" pitchFamily="2" charset="-122"/>
+                        </a:rPr>
+                        <a:t>n</a:t>
+                      </a:r>
+                      <a:r>
+                        <a:rPr lang="en-US" altLang="zh-CN" sz="2400" baseline="30000">
+                          <a:latin typeface="Consolas" panose="020B0609020204030204" pitchFamily="49" charset="0"/>
+                          <a:ea typeface="华文中宋" panose="02010600040101010101" pitchFamily="2" charset="-122"/>
+                        </a:rPr>
+                        <a:t>2</a:t>
+                      </a:r>
+                      <a:endParaRPr lang="zh-CN" altLang="en-US" sz="2400" baseline="0">
+                        <a:latin typeface="Consolas" panose="020B0609020204030204" pitchFamily="49" charset="0"/>
+                        <a:ea typeface="华文中宋" panose="02010600040101010101" pitchFamily="2" charset="-122"/>
+                      </a:endParaRPr>
+                    </a:p>
+                  </a:txBody>
+                  <a:tcPr marL="116924" marR="116924" marT="58462" marB="58462" anchor="ctr"/>
+                </a:tc>
                 <a:extLst>
                   <a:ext uri="{0D108BD9-81ED-4DB2-BD59-A6C34878D82A}">
                     <a16:rowId xmlns:a16="http://schemas.microsoft.com/office/drawing/2014/main" val="1330184763"/>
@@ -35006,6 +37617,27 @@
                   </a:txBody>
                   <a:tcPr marL="116924" marR="116924" marT="58462" marB="58462" anchor="ctr"/>
                 </a:tc>
+                <a:tc>
+                  <a:txBody>
+                    <a:bodyPr/>
+                    <a:lstStyle/>
+                    <a:p>
+                      <a:pPr algn="ctr"/>
+                      <a:r>
+                        <a:rPr lang="en-US" altLang="zh-CN" sz="2400" baseline="0">
+                          <a:latin typeface="Consolas" panose="020B0609020204030204" pitchFamily="49" charset="0"/>
+                          <a:ea typeface="华文中宋" panose="02010600040101010101" pitchFamily="2" charset="-122"/>
+                        </a:rPr>
+                        <a:t>n</a:t>
+                      </a:r>
+                      <a:endParaRPr lang="zh-CN" altLang="en-US" sz="2400" baseline="0">
+                        <a:latin typeface="Consolas" panose="020B0609020204030204" pitchFamily="49" charset="0"/>
+                        <a:ea typeface="华文中宋" panose="02010600040101010101" pitchFamily="2" charset="-122"/>
+                      </a:endParaRPr>
+                    </a:p>
+                  </a:txBody>
+                  <a:tcPr marL="116924" marR="116924" marT="58462" marB="58462" anchor="ctr"/>
+                </a:tc>
                 <a:extLst>
                   <a:ext uri="{0D108BD9-81ED-4DB2-BD59-A6C34878D82A}">
                     <a16:rowId xmlns:a16="http://schemas.microsoft.com/office/drawing/2014/main" val="3131425372"/>
@@ -35030,7 +37662,7 @@
         </p:nvSpPr>
         <p:spPr>
           <a:xfrm>
-            <a:off x="1665189" y="4851864"/>
+            <a:off x="1665188" y="4744500"/>
             <a:ext cx="8861616" cy="1200329"/>
           </a:xfrm>
           <a:prstGeom prst="rect">
@@ -35063,6 +37695,7 @@
             </a:endParaRPr>
           </a:p>
           <a:p>
+            <a:pPr indent="457200"/>
             <a:r>
               <a:rPr lang="zh-CN" altLang="en-US" sz="2400">
                 <a:solidFill>
@@ -35102,6 +37735,7 @@
             </a:endParaRPr>
           </a:p>
           <a:p>
+            <a:pPr indent="457200"/>
             <a:r>
               <a:rPr lang="zh-CN" altLang="en-US" sz="2400">
                 <a:solidFill>
@@ -35168,13 +37802,13 @@
   <p:clrMapOvr>
     <a:masterClrMapping/>
   </p:clrMapOvr>
-  <mc:AlternateContent xmlns:mc="http://schemas.openxmlformats.org/markup-compatibility/2006">
-    <mc:Choice xmlns:p159="http://schemas.microsoft.com/office/powerpoint/2015/09/main" Requires="p159">
+  <mc:AlternateContent xmlns:mc="http://schemas.openxmlformats.org/markup-compatibility/2006" xmlns:p159="http://schemas.microsoft.com/office/powerpoint/2015/09/main">
+    <mc:Choice Requires="p159">
       <p:transition xmlns:p14="http://schemas.microsoft.com/office/powerpoint/2010/main" spd="slow" p14:dur="2000">
         <p159:morph option="byObject"/>
       </p:transition>
     </mc:Choice>
-    <mc:Fallback>
+    <mc:Fallback xmlns="">
       <p:transition spd="slow">
         <p:fade/>
       </p:transition>
@@ -35183,7 +37817,7 @@
 </p:sld>
 </file>
 
-<file path=ppt/slides/slide29.xml><?xml version="1.0" encoding="utf-8"?>
+<file path=ppt/slides/slide32.xml><?xml version="1.0" encoding="utf-8"?>
 <p:sld xmlns:a="http://schemas.openxmlformats.org/drawingml/2006/main" xmlns:r="http://schemas.openxmlformats.org/officeDocument/2006/relationships" xmlns:p="http://schemas.openxmlformats.org/presentationml/2006/main">
   <p:cSld>
     <p:spTree>
@@ -35843,13 +38477,13 @@
   <p:clrMapOvr>
     <a:masterClrMapping/>
   </p:clrMapOvr>
-  <mc:AlternateContent xmlns:mc="http://schemas.openxmlformats.org/markup-compatibility/2006">
-    <mc:Choice xmlns:p159="http://schemas.microsoft.com/office/powerpoint/2015/09/main" Requires="p159">
+  <mc:AlternateContent xmlns:mc="http://schemas.openxmlformats.org/markup-compatibility/2006" xmlns:p159="http://schemas.microsoft.com/office/powerpoint/2015/09/main">
+    <mc:Choice Requires="p159">
       <p:transition xmlns:p14="http://schemas.microsoft.com/office/powerpoint/2010/main" spd="slow" p14:dur="2000">
         <p159:morph option="byObject"/>
       </p:transition>
     </mc:Choice>
-    <mc:Fallback>
+    <mc:Fallback xmlns="">
       <p:transition spd="slow">
         <p:fade/>
       </p:transition>
@@ -35858,623 +38492,7 @@
 </p:sld>
 </file>
 
-<file path=ppt/slides/slide3.xml><?xml version="1.0" encoding="utf-8"?>
-<p:sld xmlns:a="http://schemas.openxmlformats.org/drawingml/2006/main" xmlns:r="http://schemas.openxmlformats.org/officeDocument/2006/relationships" xmlns:p="http://schemas.openxmlformats.org/presentationml/2006/main">
-  <p:cSld>
-    <p:spTree>
-      <p:nvGrpSpPr>
-        <p:cNvPr id="1" name=""/>
-        <p:cNvGrpSpPr/>
-        <p:nvPr/>
-      </p:nvGrpSpPr>
-      <p:grpSpPr>
-        <a:xfrm>
-          <a:off x="0" y="0"/>
-          <a:ext cx="0" cy="0"/>
-          <a:chOff x="0" y="0"/>
-          <a:chExt cx="0" cy="0"/>
-        </a:xfrm>
-      </p:grpSpPr>
-      <p:sp>
-        <p:nvSpPr>
-          <p:cNvPr id="2" name="矩形 1"/>
-          <p:cNvSpPr/>
-          <p:nvPr/>
-        </p:nvSpPr>
-        <p:spPr>
-          <a:xfrm>
-            <a:off x="1933575" y="3660775"/>
-            <a:ext cx="8324215" cy="427990"/>
-          </a:xfrm>
-          <a:prstGeom prst="rect">
-            <a:avLst/>
-          </a:prstGeom>
-          <a:solidFill>
-            <a:schemeClr val="tx2">
-              <a:lumMod val="75000"/>
-              <a:lumOff val="25000"/>
-            </a:schemeClr>
-          </a:solidFill>
-          <a:ln>
-            <a:solidFill>
-              <a:schemeClr val="tx2">
-                <a:lumMod val="75000"/>
-                <a:lumOff val="25000"/>
-              </a:schemeClr>
-            </a:solidFill>
-          </a:ln>
-        </p:spPr>
-        <p:style>
-          <a:lnRef idx="2">
-            <a:schemeClr val="accent1">
-              <a:shade val="50000"/>
-            </a:schemeClr>
-          </a:lnRef>
-          <a:fillRef idx="1">
-            <a:schemeClr val="accent1"/>
-          </a:fillRef>
-          <a:effectRef idx="0">
-            <a:schemeClr val="accent1"/>
-          </a:effectRef>
-          <a:fontRef idx="minor">
-            <a:schemeClr val="lt1"/>
-          </a:fontRef>
-        </p:style>
-        <p:txBody>
-          <a:bodyPr rtlCol="0" anchor="ctr"/>
-          <a:lstStyle/>
-          <a:p>
-            <a:pPr algn="ctr"/>
-            <a:endParaRPr lang="zh-CN" altLang="en-US"/>
-          </a:p>
-        </p:txBody>
-      </p:sp>
-      <p:sp>
-        <p:nvSpPr>
-          <p:cNvPr id="3" name="矩形 2"/>
-          <p:cNvSpPr/>
-          <p:nvPr/>
-        </p:nvSpPr>
-        <p:spPr>
-          <a:xfrm>
-            <a:off x="3903713" y="2679383"/>
-            <a:ext cx="874395" cy="874395"/>
-          </a:xfrm>
-          <a:prstGeom prst="rect">
-            <a:avLst/>
-          </a:prstGeom>
-          <a:solidFill>
-            <a:schemeClr val="tx2">
-              <a:lumMod val="75000"/>
-              <a:lumOff val="25000"/>
-            </a:schemeClr>
-          </a:solidFill>
-          <a:ln>
-            <a:solidFill>
-              <a:schemeClr val="bg1"/>
-            </a:solidFill>
-          </a:ln>
-        </p:spPr>
-        <p:style>
-          <a:lnRef idx="2">
-            <a:schemeClr val="accent1">
-              <a:shade val="50000"/>
-            </a:schemeClr>
-          </a:lnRef>
-          <a:fillRef idx="1">
-            <a:schemeClr val="accent1"/>
-          </a:fillRef>
-          <a:effectRef idx="0">
-            <a:schemeClr val="accent1"/>
-          </a:effectRef>
-          <a:fontRef idx="minor">
-            <a:schemeClr val="lt1"/>
-          </a:fontRef>
-        </p:style>
-        <p:txBody>
-          <a:bodyPr rtlCol="0" anchor="ctr"/>
-          <a:lstStyle/>
-          <a:p>
-            <a:pPr algn="ctr"/>
-            <a:r>
-              <a:rPr lang="en-US" altLang="zh-CN" sz="4800">
-                <a:latin typeface="微软雅黑" panose="020B0503020204020204" pitchFamily="34" charset="-122"/>
-                <a:ea typeface="微软雅黑" panose="020B0503020204020204" pitchFamily="34" charset="-122"/>
-              </a:rPr>
-              <a:t>1</a:t>
-            </a:r>
-          </a:p>
-        </p:txBody>
-      </p:sp>
-      <p:sp>
-        <p:nvSpPr>
-          <p:cNvPr id="14" name="文本框 13"/>
-          <p:cNvSpPr txBox="1"/>
-          <p:nvPr/>
-        </p:nvSpPr>
-        <p:spPr>
-          <a:xfrm>
-            <a:off x="4778108" y="2596177"/>
-            <a:ext cx="3916680" cy="923330"/>
-          </a:xfrm>
-          <a:prstGeom prst="rect">
-            <a:avLst/>
-          </a:prstGeom>
-          <a:noFill/>
-        </p:spPr>
-        <p:txBody>
-          <a:bodyPr wrap="square" rtlCol="0" anchor="ctr">
-            <a:spAutoFit/>
-          </a:bodyPr>
-          <a:lstStyle/>
-          <a:p>
-            <a:r>
-              <a:rPr lang="zh-CN" altLang="en-US" sz="5400" b="1">
-                <a:solidFill>
-                  <a:schemeClr val="tx2">
-                    <a:lumMod val="75000"/>
-                    <a:lumOff val="25000"/>
-                  </a:schemeClr>
-                </a:solidFill>
-                <a:latin typeface="华文中宋" panose="02010600040101010101" pitchFamily="2" charset="-122"/>
-                <a:ea typeface="华文中宋" panose="02010600040101010101" pitchFamily="2" charset="-122"/>
-              </a:rPr>
-              <a:t>课题概述</a:t>
-            </a:r>
-          </a:p>
-        </p:txBody>
-      </p:sp>
-      <p:cxnSp>
-        <p:nvCxnSpPr>
-          <p:cNvPr id="32" name="直接连接符 31"/>
-          <p:cNvCxnSpPr/>
-          <p:nvPr/>
-        </p:nvCxnSpPr>
-        <p:spPr>
-          <a:xfrm>
-            <a:off x="2157095" y="3874770"/>
-            <a:ext cx="7877810" cy="0"/>
-          </a:xfrm>
-          <a:prstGeom prst="line">
-            <a:avLst/>
-          </a:prstGeom>
-          <a:ln>
-            <a:solidFill>
-              <a:schemeClr val="bg1"/>
-            </a:solidFill>
-          </a:ln>
-        </p:spPr>
-        <p:style>
-          <a:lnRef idx="1">
-            <a:schemeClr val="accent1"/>
-          </a:lnRef>
-          <a:fillRef idx="0">
-            <a:schemeClr val="accent1"/>
-          </a:fillRef>
-          <a:effectRef idx="0">
-            <a:schemeClr val="accent1"/>
-          </a:effectRef>
-          <a:fontRef idx="minor">
-            <a:schemeClr val="tx1"/>
-          </a:fontRef>
-        </p:style>
-      </p:cxnSp>
-      <p:grpSp>
-        <p:nvGrpSpPr>
-          <p:cNvPr id="4" name="组合 3">
-            <a:extLst>
-              <a:ext uri="{FF2B5EF4-FFF2-40B4-BE49-F238E27FC236}">
-                <a16:creationId xmlns:a16="http://schemas.microsoft.com/office/drawing/2014/main" id="{3FC41E73-E696-1B9B-DF68-1722D0B3B147}"/>
-              </a:ext>
-            </a:extLst>
-          </p:cNvPr>
-          <p:cNvGrpSpPr/>
-          <p:nvPr/>
-        </p:nvGrpSpPr>
-        <p:grpSpPr>
-          <a:xfrm>
-            <a:off x="0" y="-17780"/>
-            <a:ext cx="1593850" cy="6095365"/>
-            <a:chOff x="0" y="-17780"/>
-            <a:chExt cx="1593850" cy="6095365"/>
-          </a:xfrm>
-        </p:grpSpPr>
-        <p:sp>
-          <p:nvSpPr>
-            <p:cNvPr id="24" name="等腰三角形 23"/>
-            <p:cNvSpPr/>
-            <p:nvPr/>
-          </p:nvSpPr>
-          <p:spPr>
-            <a:xfrm rot="10800000">
-              <a:off x="0" y="-17780"/>
-              <a:ext cx="1593850" cy="1210945"/>
-            </a:xfrm>
-            <a:prstGeom prst="triangle">
-              <a:avLst/>
-            </a:prstGeom>
-            <a:solidFill>
-              <a:schemeClr val="tx2">
-                <a:lumMod val="75000"/>
-                <a:lumOff val="25000"/>
-              </a:schemeClr>
-            </a:solidFill>
-            <a:ln>
-              <a:noFill/>
-            </a:ln>
-          </p:spPr>
-          <p:style>
-            <a:lnRef idx="2">
-              <a:schemeClr val="accent1">
-                <a:shade val="50000"/>
-              </a:schemeClr>
-            </a:lnRef>
-            <a:fillRef idx="1">
-              <a:schemeClr val="accent1"/>
-            </a:fillRef>
-            <a:effectRef idx="0">
-              <a:schemeClr val="accent1"/>
-            </a:effectRef>
-            <a:fontRef idx="minor">
-              <a:schemeClr val="lt1"/>
-            </a:fontRef>
-          </p:style>
-          <p:txBody>
-            <a:bodyPr rtlCol="0" anchor="ctr"/>
-            <a:lstStyle/>
-            <a:p>
-              <a:pPr algn="ctr"/>
-              <a:endParaRPr lang="zh-CN" altLang="en-US"/>
-            </a:p>
-          </p:txBody>
-        </p:sp>
-        <p:cxnSp>
-          <p:nvCxnSpPr>
-            <p:cNvPr id="33" name="直接连接符 32"/>
-            <p:cNvCxnSpPr/>
-            <p:nvPr/>
-          </p:nvCxnSpPr>
-          <p:spPr>
-            <a:xfrm>
-              <a:off x="200025" y="2540"/>
-              <a:ext cx="0" cy="6075045"/>
-            </a:xfrm>
-            <a:prstGeom prst="line">
-              <a:avLst/>
-            </a:prstGeom>
-            <a:ln>
-              <a:solidFill>
-                <a:schemeClr val="tx2">
-                  <a:lumMod val="75000"/>
-                  <a:lumOff val="25000"/>
-                </a:schemeClr>
-              </a:solidFill>
-            </a:ln>
-          </p:spPr>
-          <p:style>
-            <a:lnRef idx="1">
-              <a:schemeClr val="accent1"/>
-            </a:lnRef>
-            <a:fillRef idx="0">
-              <a:schemeClr val="accent1"/>
-            </a:fillRef>
-            <a:effectRef idx="0">
-              <a:schemeClr val="accent1"/>
-            </a:effectRef>
-            <a:fontRef idx="minor">
-              <a:schemeClr val="tx1"/>
-            </a:fontRef>
-          </p:style>
-        </p:cxnSp>
-        <p:cxnSp>
-          <p:nvCxnSpPr>
-            <p:cNvPr id="34" name="直接连接符 33"/>
-            <p:cNvCxnSpPr/>
-            <p:nvPr/>
-          </p:nvCxnSpPr>
-          <p:spPr>
-            <a:xfrm>
-              <a:off x="409575" y="348615"/>
-              <a:ext cx="0" cy="4763135"/>
-            </a:xfrm>
-            <a:prstGeom prst="line">
-              <a:avLst/>
-            </a:prstGeom>
-            <a:ln>
-              <a:solidFill>
-                <a:schemeClr val="tx2">
-                  <a:lumMod val="75000"/>
-                  <a:lumOff val="25000"/>
-                </a:schemeClr>
-              </a:solidFill>
-            </a:ln>
-          </p:spPr>
-          <p:style>
-            <a:lnRef idx="1">
-              <a:schemeClr val="accent1"/>
-            </a:lnRef>
-            <a:fillRef idx="0">
-              <a:schemeClr val="accent1"/>
-            </a:fillRef>
-            <a:effectRef idx="0">
-              <a:schemeClr val="accent1"/>
-            </a:effectRef>
-            <a:fontRef idx="minor">
-              <a:schemeClr val="tx1"/>
-            </a:fontRef>
-          </p:style>
-        </p:cxnSp>
-        <p:cxnSp>
-          <p:nvCxnSpPr>
-            <p:cNvPr id="37" name="直接连接符 36"/>
-            <p:cNvCxnSpPr/>
-            <p:nvPr/>
-          </p:nvCxnSpPr>
-          <p:spPr>
-            <a:xfrm>
-              <a:off x="628015" y="576580"/>
-              <a:ext cx="0" cy="3105150"/>
-            </a:xfrm>
-            <a:prstGeom prst="line">
-              <a:avLst/>
-            </a:prstGeom>
-            <a:ln>
-              <a:solidFill>
-                <a:schemeClr val="tx2">
-                  <a:lumMod val="75000"/>
-                  <a:lumOff val="25000"/>
-                </a:schemeClr>
-              </a:solidFill>
-            </a:ln>
-          </p:spPr>
-          <p:style>
-            <a:lnRef idx="1">
-              <a:schemeClr val="accent1"/>
-            </a:lnRef>
-            <a:fillRef idx="0">
-              <a:schemeClr val="accent1"/>
-            </a:fillRef>
-            <a:effectRef idx="0">
-              <a:schemeClr val="accent1"/>
-            </a:effectRef>
-            <a:fontRef idx="minor">
-              <a:schemeClr val="tx1"/>
-            </a:fontRef>
-          </p:style>
-        </p:cxnSp>
-      </p:grpSp>
-      <p:grpSp>
-        <p:nvGrpSpPr>
-          <p:cNvPr id="5" name="组合 4">
-            <a:extLst>
-              <a:ext uri="{FF2B5EF4-FFF2-40B4-BE49-F238E27FC236}">
-                <a16:creationId xmlns:a16="http://schemas.microsoft.com/office/drawing/2014/main" id="{3C4DAB68-012D-6D3A-1BBC-850CD14F3125}"/>
-              </a:ext>
-            </a:extLst>
-          </p:cNvPr>
-          <p:cNvGrpSpPr/>
-          <p:nvPr/>
-        </p:nvGrpSpPr>
-        <p:grpSpPr>
-          <a:xfrm flipH="1">
-            <a:off x="10598150" y="0"/>
-            <a:ext cx="1593850" cy="6095365"/>
-            <a:chOff x="0" y="-17780"/>
-            <a:chExt cx="1593850" cy="6095365"/>
-          </a:xfrm>
-        </p:grpSpPr>
-        <p:sp>
-          <p:nvSpPr>
-            <p:cNvPr id="6" name="等腰三角形 5">
-              <a:extLst>
-                <a:ext uri="{FF2B5EF4-FFF2-40B4-BE49-F238E27FC236}">
-                  <a16:creationId xmlns:a16="http://schemas.microsoft.com/office/drawing/2014/main" id="{817E435F-C114-793C-3DDA-7F94390B42CF}"/>
-                </a:ext>
-              </a:extLst>
-            </p:cNvPr>
-            <p:cNvSpPr/>
-            <p:nvPr/>
-          </p:nvSpPr>
-          <p:spPr>
-            <a:xfrm rot="10800000">
-              <a:off x="0" y="-17780"/>
-              <a:ext cx="1593850" cy="1210945"/>
-            </a:xfrm>
-            <a:prstGeom prst="triangle">
-              <a:avLst/>
-            </a:prstGeom>
-            <a:solidFill>
-              <a:schemeClr val="tx2">
-                <a:lumMod val="75000"/>
-                <a:lumOff val="25000"/>
-              </a:schemeClr>
-            </a:solidFill>
-            <a:ln>
-              <a:noFill/>
-            </a:ln>
-          </p:spPr>
-          <p:style>
-            <a:lnRef idx="2">
-              <a:schemeClr val="accent1">
-                <a:shade val="50000"/>
-              </a:schemeClr>
-            </a:lnRef>
-            <a:fillRef idx="1">
-              <a:schemeClr val="accent1"/>
-            </a:fillRef>
-            <a:effectRef idx="0">
-              <a:schemeClr val="accent1"/>
-            </a:effectRef>
-            <a:fontRef idx="minor">
-              <a:schemeClr val="lt1"/>
-            </a:fontRef>
-          </p:style>
-          <p:txBody>
-            <a:bodyPr rtlCol="0" anchor="ctr"/>
-            <a:lstStyle/>
-            <a:p>
-              <a:pPr algn="ctr"/>
-              <a:endParaRPr lang="zh-CN" altLang="en-US"/>
-            </a:p>
-          </p:txBody>
-        </p:sp>
-        <p:cxnSp>
-          <p:nvCxnSpPr>
-            <p:cNvPr id="7" name="直接连接符 6">
-              <a:extLst>
-                <a:ext uri="{FF2B5EF4-FFF2-40B4-BE49-F238E27FC236}">
-                  <a16:creationId xmlns:a16="http://schemas.microsoft.com/office/drawing/2014/main" id="{F7898038-EF49-FBEE-0FFC-C5BB598055F8}"/>
-                </a:ext>
-              </a:extLst>
-            </p:cNvPr>
-            <p:cNvCxnSpPr/>
-            <p:nvPr/>
-          </p:nvCxnSpPr>
-          <p:spPr>
-            <a:xfrm>
-              <a:off x="200025" y="2540"/>
-              <a:ext cx="0" cy="6075045"/>
-            </a:xfrm>
-            <a:prstGeom prst="line">
-              <a:avLst/>
-            </a:prstGeom>
-            <a:ln>
-              <a:solidFill>
-                <a:schemeClr val="tx2">
-                  <a:lumMod val="75000"/>
-                  <a:lumOff val="25000"/>
-                </a:schemeClr>
-              </a:solidFill>
-            </a:ln>
-          </p:spPr>
-          <p:style>
-            <a:lnRef idx="1">
-              <a:schemeClr val="accent1"/>
-            </a:lnRef>
-            <a:fillRef idx="0">
-              <a:schemeClr val="accent1"/>
-            </a:fillRef>
-            <a:effectRef idx="0">
-              <a:schemeClr val="accent1"/>
-            </a:effectRef>
-            <a:fontRef idx="minor">
-              <a:schemeClr val="tx1"/>
-            </a:fontRef>
-          </p:style>
-        </p:cxnSp>
-        <p:cxnSp>
-          <p:nvCxnSpPr>
-            <p:cNvPr id="8" name="直接连接符 7">
-              <a:extLst>
-                <a:ext uri="{FF2B5EF4-FFF2-40B4-BE49-F238E27FC236}">
-                  <a16:creationId xmlns:a16="http://schemas.microsoft.com/office/drawing/2014/main" id="{CDAB24DD-6E19-B5E2-6242-AA569DCFC750}"/>
-                </a:ext>
-              </a:extLst>
-            </p:cNvPr>
-            <p:cNvCxnSpPr/>
-            <p:nvPr/>
-          </p:nvCxnSpPr>
-          <p:spPr>
-            <a:xfrm>
-              <a:off x="409575" y="348615"/>
-              <a:ext cx="0" cy="4763135"/>
-            </a:xfrm>
-            <a:prstGeom prst="line">
-              <a:avLst/>
-            </a:prstGeom>
-            <a:ln>
-              <a:solidFill>
-                <a:schemeClr val="tx2">
-                  <a:lumMod val="75000"/>
-                  <a:lumOff val="25000"/>
-                </a:schemeClr>
-              </a:solidFill>
-            </a:ln>
-          </p:spPr>
-          <p:style>
-            <a:lnRef idx="1">
-              <a:schemeClr val="accent1"/>
-            </a:lnRef>
-            <a:fillRef idx="0">
-              <a:schemeClr val="accent1"/>
-            </a:fillRef>
-            <a:effectRef idx="0">
-              <a:schemeClr val="accent1"/>
-            </a:effectRef>
-            <a:fontRef idx="minor">
-              <a:schemeClr val="tx1"/>
-            </a:fontRef>
-          </p:style>
-        </p:cxnSp>
-        <p:cxnSp>
-          <p:nvCxnSpPr>
-            <p:cNvPr id="9" name="直接连接符 8">
-              <a:extLst>
-                <a:ext uri="{FF2B5EF4-FFF2-40B4-BE49-F238E27FC236}">
-                  <a16:creationId xmlns:a16="http://schemas.microsoft.com/office/drawing/2014/main" id="{DA63B20D-4ACF-967B-3F6B-69F75BA59E2D}"/>
-                </a:ext>
-              </a:extLst>
-            </p:cNvPr>
-            <p:cNvCxnSpPr/>
-            <p:nvPr/>
-          </p:nvCxnSpPr>
-          <p:spPr>
-            <a:xfrm>
-              <a:off x="628015" y="576580"/>
-              <a:ext cx="0" cy="3105150"/>
-            </a:xfrm>
-            <a:prstGeom prst="line">
-              <a:avLst/>
-            </a:prstGeom>
-            <a:ln>
-              <a:solidFill>
-                <a:schemeClr val="tx2">
-                  <a:lumMod val="75000"/>
-                  <a:lumOff val="25000"/>
-                </a:schemeClr>
-              </a:solidFill>
-            </a:ln>
-          </p:spPr>
-          <p:style>
-            <a:lnRef idx="1">
-              <a:schemeClr val="accent1"/>
-            </a:lnRef>
-            <a:fillRef idx="0">
-              <a:schemeClr val="accent1"/>
-            </a:fillRef>
-            <a:effectRef idx="0">
-              <a:schemeClr val="accent1"/>
-            </a:effectRef>
-            <a:fontRef idx="minor">
-              <a:schemeClr val="tx1"/>
-            </a:fontRef>
-          </p:style>
-        </p:cxnSp>
-      </p:grpSp>
-    </p:spTree>
-    <p:custDataLst>
-      <p:tags r:id="rId1"/>
-    </p:custDataLst>
-  </p:cSld>
-  <p:clrMapOvr>
-    <a:masterClrMapping/>
-  </p:clrMapOvr>
-  <mc:AlternateContent xmlns:mc="http://schemas.openxmlformats.org/markup-compatibility/2006">
-    <mc:Choice xmlns:p159="http://schemas.microsoft.com/office/powerpoint/2015/09/main" Requires="p159">
-      <p:transition xmlns:p14="http://schemas.microsoft.com/office/powerpoint/2010/main" spd="slow" p14:dur="2000">
-        <p159:morph option="byObject"/>
-      </p:transition>
-    </mc:Choice>
-    <mc:Fallback>
-      <p:transition spd="slow">
-        <p:fade/>
-      </p:transition>
-    </mc:Fallback>
-  </mc:AlternateContent>
-</p:sld>
-</file>
-
-<file path=ppt/slides/slide30.xml><?xml version="1.0" encoding="utf-8"?>
+<file path=ppt/slides/slide33.xml><?xml version="1.0" encoding="utf-8"?>
 <p:sld xmlns:a="http://schemas.openxmlformats.org/drawingml/2006/main" xmlns:r="http://schemas.openxmlformats.org/officeDocument/2006/relationships" xmlns:p="http://schemas.openxmlformats.org/presentationml/2006/main">
   <p:cSld>
     <p:spTree>
@@ -37948,7 +39966,7 @@
           <p:spPr>
             <a:xfrm>
               <a:off x="541682" y="2710592"/>
-              <a:ext cx="2936385" cy="1888466"/>
+              <a:ext cx="2936385" cy="1426801"/>
             </a:xfrm>
             <a:prstGeom prst="rect">
               <a:avLst/>
@@ -38002,7 +40020,7 @@
                   <a:latin typeface="Consolas" panose="020B0609020204030204" pitchFamily="49" charset="0"/>
                   <a:ea typeface="华文中宋" panose="02010600040101010101" pitchFamily="2" charset="-122"/>
                 </a:rPr>
-                <a:t>记录输出文件，比较分析不同算法的性能差异。</a:t>
+                <a:t>统计输出文件，分析不同算法的性能差异。</a:t>
               </a:r>
             </a:p>
           </p:txBody>
@@ -38021,13 +40039,13 @@
   <p:clrMapOvr>
     <a:masterClrMapping/>
   </p:clrMapOvr>
-  <mc:AlternateContent xmlns:mc="http://schemas.openxmlformats.org/markup-compatibility/2006">
-    <mc:Choice xmlns:p159="http://schemas.microsoft.com/office/powerpoint/2015/09/main" Requires="p159">
+  <mc:AlternateContent xmlns:mc="http://schemas.openxmlformats.org/markup-compatibility/2006" xmlns:p159="http://schemas.microsoft.com/office/powerpoint/2015/09/main">
+    <mc:Choice Requires="p159">
       <p:transition xmlns:p14="http://schemas.microsoft.com/office/powerpoint/2010/main" spd="slow" p14:dur="2000">
         <p159:morph option="byObject"/>
       </p:transition>
     </mc:Choice>
-    <mc:Fallback>
+    <mc:Fallback xmlns="">
       <p:transition spd="slow">
         <p:fade/>
       </p:transition>
@@ -38036,7 +40054,7 @@
 </p:sld>
 </file>
 
-<file path=ppt/slides/slide31.xml><?xml version="1.0" encoding="utf-8"?>
+<file path=ppt/slides/slide34.xml><?xml version="1.0" encoding="utf-8"?>
 <p:sld xmlns:a="http://schemas.openxmlformats.org/drawingml/2006/main" xmlns:r="http://schemas.openxmlformats.org/officeDocument/2006/relationships" xmlns:p="http://schemas.openxmlformats.org/presentationml/2006/main">
   <p:cSld>
     <p:spTree>
@@ -38861,13 +40879,13 @@
   <p:clrMapOvr>
     <a:masterClrMapping/>
   </p:clrMapOvr>
-  <mc:AlternateContent xmlns:mc="http://schemas.openxmlformats.org/markup-compatibility/2006">
-    <mc:Choice xmlns:p159="http://schemas.microsoft.com/office/powerpoint/2015/09/main" Requires="p159">
+  <mc:AlternateContent xmlns:mc="http://schemas.openxmlformats.org/markup-compatibility/2006" xmlns:p159="http://schemas.microsoft.com/office/powerpoint/2015/09/main">
+    <mc:Choice Requires="p159">
       <p:transition xmlns:p14="http://schemas.microsoft.com/office/powerpoint/2010/main" spd="slow" p14:dur="2000">
         <p159:morph option="byObject"/>
       </p:transition>
     </mc:Choice>
-    <mc:Fallback>
+    <mc:Fallback xmlns="">
       <p:transition spd="slow">
         <p:fade/>
       </p:transition>
@@ -39944,13 +41962,13 @@
   <p:clrMapOvr>
     <a:masterClrMapping/>
   </p:clrMapOvr>
-  <mc:AlternateContent xmlns:mc="http://schemas.openxmlformats.org/markup-compatibility/2006">
-    <mc:Choice xmlns:p159="http://schemas.microsoft.com/office/powerpoint/2015/09/main" Requires="p159">
+  <mc:AlternateContent xmlns:mc="http://schemas.openxmlformats.org/markup-compatibility/2006" xmlns:p159="http://schemas.microsoft.com/office/powerpoint/2015/09/main">
+    <mc:Choice Requires="p159">
       <p:transition xmlns:p14="http://schemas.microsoft.com/office/powerpoint/2010/main" spd="slow" p14:dur="2000">
         <p159:morph option="byObject"/>
       </p:transition>
     </mc:Choice>
-    <mc:Fallback>
+    <mc:Fallback xmlns="">
       <p:transition spd="slow">
         <p:fade/>
       </p:transition>
@@ -40668,13 +42686,13 @@
   <p:clrMapOvr>
     <a:masterClrMapping/>
   </p:clrMapOvr>
-  <mc:AlternateContent xmlns:mc="http://schemas.openxmlformats.org/markup-compatibility/2006">
-    <mc:Choice xmlns:p159="http://schemas.microsoft.com/office/powerpoint/2015/09/main" Requires="p159">
+  <mc:AlternateContent xmlns:mc="http://schemas.openxmlformats.org/markup-compatibility/2006" xmlns:p159="http://schemas.microsoft.com/office/powerpoint/2015/09/main">
+    <mc:Choice Requires="p159">
       <p:transition xmlns:p14="http://schemas.microsoft.com/office/powerpoint/2010/main" spd="slow" p14:dur="2000">
         <p159:morph option="byObject"/>
       </p:transition>
     </mc:Choice>
-    <mc:Fallback>
+    <mc:Fallback xmlns="">
       <p:transition spd="slow">
         <p:fade/>
       </p:transition>
@@ -41343,13 +43361,13 @@
   <p:clrMapOvr>
     <a:masterClrMapping/>
   </p:clrMapOvr>
-  <mc:AlternateContent xmlns:mc="http://schemas.openxmlformats.org/markup-compatibility/2006">
-    <mc:Choice xmlns:p159="http://schemas.microsoft.com/office/powerpoint/2015/09/main" Requires="p159">
+  <mc:AlternateContent xmlns:mc="http://schemas.openxmlformats.org/markup-compatibility/2006" xmlns:p159="http://schemas.microsoft.com/office/powerpoint/2015/09/main">
+    <mc:Choice Requires="p159">
       <p:transition xmlns:p14="http://schemas.microsoft.com/office/powerpoint/2010/main" spd="slow" p14:dur="2000">
         <p159:morph option="byObject"/>
       </p:transition>
     </mc:Choice>
-    <mc:Fallback>
+    <mc:Fallback xmlns="">
       <p:transition spd="slow">
         <p:fade/>
       </p:transition>
@@ -41646,13 +43664,13 @@
   <p:clrMapOvr>
     <a:masterClrMapping/>
   </p:clrMapOvr>
-  <mc:AlternateContent xmlns:mc="http://schemas.openxmlformats.org/markup-compatibility/2006">
-    <mc:Choice xmlns:p159="http://schemas.microsoft.com/office/powerpoint/2015/09/main" Requires="p159">
+  <mc:AlternateContent xmlns:mc="http://schemas.openxmlformats.org/markup-compatibility/2006" xmlns:p159="http://schemas.microsoft.com/office/powerpoint/2015/09/main">
+    <mc:Choice Requires="p159">
       <p:transition xmlns:p14="http://schemas.microsoft.com/office/powerpoint/2010/main" spd="slow" p14:dur="2000">
         <p159:morph option="byObject"/>
       </p:transition>
     </mc:Choice>
-    <mc:Fallback>
+    <mc:Fallback xmlns="">
       <p:transition spd="slow">
         <p:fade/>
       </p:transition>
@@ -42311,13 +44329,13 @@
   <p:clrMapOvr>
     <a:masterClrMapping/>
   </p:clrMapOvr>
-  <mc:AlternateContent xmlns:mc="http://schemas.openxmlformats.org/markup-compatibility/2006">
-    <mc:Choice xmlns:p159="http://schemas.microsoft.com/office/powerpoint/2015/09/main" Requires="p159">
+  <mc:AlternateContent xmlns:mc="http://schemas.openxmlformats.org/markup-compatibility/2006" xmlns:p159="http://schemas.microsoft.com/office/powerpoint/2015/09/main">
+    <mc:Choice Requires="p159">
       <p:transition xmlns:p14="http://schemas.microsoft.com/office/powerpoint/2010/main" spd="slow" p14:dur="2000">
         <p159:morph option="byObject"/>
       </p:transition>
     </mc:Choice>
-    <mc:Fallback>
+    <mc:Fallback xmlns="">
       <p:transition spd="slow">
         <p:fade/>
       </p:transition>
@@ -43662,13 +45680,13 @@
   <p:clrMapOvr>
     <a:masterClrMapping/>
   </p:clrMapOvr>
-  <mc:AlternateContent xmlns:mc="http://schemas.openxmlformats.org/markup-compatibility/2006">
-    <mc:Choice xmlns:p159="http://schemas.microsoft.com/office/powerpoint/2015/09/main" Requires="p159">
+  <mc:AlternateContent xmlns:mc="http://schemas.openxmlformats.org/markup-compatibility/2006" xmlns:p159="http://schemas.microsoft.com/office/powerpoint/2015/09/main">
+    <mc:Choice Requires="p159">
       <p:transition xmlns:p14="http://schemas.microsoft.com/office/powerpoint/2010/main" spd="slow" p14:dur="2000">
         <p159:morph option="byObject"/>
       </p:transition>
     </mc:Choice>
-    <mc:Fallback>
+    <mc:Fallback xmlns="">
       <p:transition spd="slow">
         <p:fade/>
       </p:transition>
@@ -44587,6 +46605,22 @@
 </p:tagLst>
 </file>
 
+<file path=ppt/tags/tag77.xml><?xml version="1.0" encoding="utf-8"?>
+<p:tagLst xmlns:a="http://schemas.openxmlformats.org/drawingml/2006/main" xmlns:r="http://schemas.openxmlformats.org/officeDocument/2006/relationships" xmlns:p="http://schemas.openxmlformats.org/presentationml/2006/main">
+  <p:tag name="KSO_WM_BEAUTIFY_FLAG" val="#wm#"/>
+  <p:tag name="KSO_WM_TEMPLATE_CATEGORY" val="custom"/>
+  <p:tag name="KSO_WM_TEMPLATE_INDEX" val="20205081"/>
+</p:tagLst>
+</file>
+
+<file path=ppt/tags/tag78.xml><?xml version="1.0" encoding="utf-8"?>
+<p:tagLst xmlns:a="http://schemas.openxmlformats.org/drawingml/2006/main" xmlns:r="http://schemas.openxmlformats.org/officeDocument/2006/relationships" xmlns:p="http://schemas.openxmlformats.org/presentationml/2006/main">
+  <p:tag name="KSO_WM_BEAUTIFY_FLAG" val="#wm#"/>
+  <p:tag name="KSO_WM_TEMPLATE_CATEGORY" val="custom"/>
+  <p:tag name="KSO_WM_TEMPLATE_INDEX" val="20205081"/>
+</p:tagLst>
+</file>
+
 <file path=ppt/tags/tag8.xml><?xml version="1.0" encoding="utf-8"?>
 <p:tagLst xmlns:a="http://schemas.openxmlformats.org/drawingml/2006/main" xmlns:r="http://schemas.openxmlformats.org/officeDocument/2006/relationships" xmlns:p="http://schemas.openxmlformats.org/presentationml/2006/main">
   <p:tag name="KSO_WM_UNIT_HIGHLIGHT" val="0"/>
